--- a/slides/oma-dlya-doma.pptx
+++ b/slides/oma-dlya-doma.pptx
@@ -113,37 +113,37 @@
   <p:extLst>
     <p:ext uri="{521415D9-36F7-43E2-AB2F-B90AF26B5E84}">
       <p14:sectionLst xmlns:p14="http://schemas.microsoft.com/office/powerpoint/2010/main">
-        <p14:section name="Вступление" id="{15a47cbb-6572-ed86-ea0c-d5aaa11ca35e}">
+        <p14:section name="Вступление" id="{c94557f7-1c26-65a6-84a8-4637b65e939c}">
           <p14:sldIdLst>
             <p14:sldId id="256"/>
           </p14:sldIdLst>
         </p14:section>
-        <p14:section name="Проблема" id="{6c38b86c-ae79-ee27-fa5d-e4d1b87b6295}">
+        <p14:section name="Проблема" id="{858b9970-8ecb-9748-2539-d0f0b2634c46}">
           <p14:sldIdLst>
             <p14:sldId id="257"/>
           </p14:sldIdLst>
         </p14:section>
-        <p14:section name="Решение" id="{5dd402c4-db70-b558-df9a-de3d18d01c76}">
+        <p14:section name="Решение" id="{a83f47cd-26fb-b421-ac77-b2a6e99ef024}">
           <p14:sldIdLst>
             <p14:sldId id="258"/>
           </p14:sldIdLst>
         </p14:section>
-        <p14:section name="Конкуренты" id="{2baae260-96ef-6951-c814-c06782b9dc19}">
+        <p14:section name="Конкуренты" id="{d0ddbe83-230a-5bf0-7462-51a282bf289d}">
           <p14:sldIdLst>
             <p14:sldId id="259"/>
           </p14:sldIdLst>
         </p14:section>
-        <p14:section name="Путь пользователя" id="{4fa848e6-d78f-7af0-11ec-fc977205f31c}">
+        <p14:section name="Путь пользователя" id="{0c898252-5465-9f7f-0e85-2db5b2015de0}">
           <p14:sldIdLst>
             <p14:sldId id="260"/>
           </p14:sldIdLst>
         </p14:section>
-        <p14:section name="Демо" id="{058f2f0c-9171-a5be-6229-e0796f0ff818}">
+        <p14:section name="Демо" id="{1ee5dd13-f0e4-9ebe-0549-db73bb02233a}">
           <p14:sldIdLst>
             <p14:sldId id="261"/>
           </p14:sldIdLst>
         </p14:section>
-        <p14:section name="Экономика" id="{1a7dd056-2245-4eb2-d2a2-44cd09764c82}">
+        <p14:section name="Экономика" id="{9b85de67-18a2-3d53-f9d9-3536fc3af8af}">
           <p14:sldIdLst>
             <p14:sldId id="262"/>
           </p14:sldIdLst>
@@ -10123,7 +10123,7 @@
     </a:clrScheme>
     <a:fontScheme name="OMA dlya doma">
       <a:majorFont>
-        <a:latin typeface="Arial"/>
+        <a:latin typeface="Roboto"/>
         <a:ea typeface=""/>
         <a:cs typeface=""/>
         <a:font script="Jpan" typeface="游ゴシック Light"/>
@@ -10175,7 +10175,7 @@
         <a:font script="Tfng" typeface="Ebrima"/>
       </a:majorFont>
       <a:minorFont>
-        <a:latin typeface="Arial"/>
+        <a:latin typeface="Roboto"/>
         <a:ea typeface=""/>
         <a:cs typeface=""/>
         <a:font script="Jpan" typeface="游ゴシック"/>

--- a/slides/oma-dlya-doma.pptx
+++ b/slides/oma-dlya-doma.pptx
@@ -4,8 +4,11 @@
   <p:sldMasterIdLst>
     <p:sldMasterId id="2147483648" r:id="rId1"/>
   </p:sldMasterIdLst>
+  <p:notesMasterIdLst>
+    <p:notesMasterId r:id="rId9"/>
+  </p:notesMasterIdLst>
   <p:sldIdLst>
-    <p:sldId id="256" r:id="rId2"/>
+    <p:sldId id="263" r:id="rId2"/>
     <p:sldId id="257" r:id="rId3"/>
     <p:sldId id="258" r:id="rId4"/>
     <p:sldId id="259" r:id="rId5"/>
@@ -13,9 +16,6 @@
     <p:sldId id="261" r:id="rId7"/>
     <p:sldId id="262" r:id="rId8"/>
   </p:sldIdLst>
-  <p:notesMasterIdLst>
-    <p:notesMasterId r:id="rId9"/>
-  </p:notesMasterIdLst>
   <p:sldSz cx="12192000" cy="6858000"/>
   <p:notesSz cx="6858000" cy="12192000"/>
   <p:defaultTextStyle>
@@ -113,37 +113,37 @@
   <p:extLst>
     <p:ext uri="{521415D9-36F7-43E2-AB2F-B90AF26B5E84}">
       <p14:sectionLst xmlns:p14="http://schemas.microsoft.com/office/powerpoint/2010/main">
-        <p14:section name="Вступление" id="{c94557f7-1c26-65a6-84a8-4637b65e939c}">
+        <p14:section name="Вступление" id="{C94557F7-1C26-65A6-84A8-4637B65E939C}">
           <p14:sldIdLst>
-            <p14:sldId id="256"/>
+            <p14:sldId id="263"/>
           </p14:sldIdLst>
         </p14:section>
-        <p14:section name="Проблема" id="{858b9970-8ecb-9748-2539-d0f0b2634c46}">
+        <p14:section name="Проблема" id="{858B9970-8ECB-9748-2539-D0F0B2634C46}">
           <p14:sldIdLst>
             <p14:sldId id="257"/>
           </p14:sldIdLst>
         </p14:section>
-        <p14:section name="Решение" id="{a83f47cd-26fb-b421-ac77-b2a6e99ef024}">
+        <p14:section name="Решение" id="{A83F47CD-26FB-B421-AC77-B2A6E99EF024}">
           <p14:sldIdLst>
             <p14:sldId id="258"/>
           </p14:sldIdLst>
         </p14:section>
-        <p14:section name="Конкуренты" id="{d0ddbe83-230a-5bf0-7462-51a282bf289d}">
+        <p14:section name="Конкуренты" id="{D0DDBE83-230A-5BF0-7462-51A282BF289D}">
           <p14:sldIdLst>
             <p14:sldId id="259"/>
           </p14:sldIdLst>
         </p14:section>
-        <p14:section name="Путь пользователя" id="{0c898252-5465-9f7f-0e85-2db5b2015de0}">
+        <p14:section name="Путь пользователя" id="{0C898252-5465-9F7F-0E85-2DB5B2015DE0}">
           <p14:sldIdLst>
             <p14:sldId id="260"/>
           </p14:sldIdLst>
         </p14:section>
-        <p14:section name="Демо" id="{1ee5dd13-f0e4-9ebe-0549-db73bb02233a}">
+        <p14:section name="Демо" id="{1EE5DD13-F0E4-9EBE-0549-DB73BB02233A}">
           <p14:sldIdLst>
             <p14:sldId id="261"/>
           </p14:sldIdLst>
         </p14:section>
-        <p14:section name="Экономика" id="{9b85de67-18a2-3d53-f9d9-3536fc3af8af}">
+        <p14:section name="Экономика" id="{9B85DE67-18A2-3D53-F9D9-3536FC3AF8AF}">
           <p14:sldIdLst>
             <p14:sldId id="262"/>
           </p14:sldIdLst>
@@ -179,234 +179,10 @@
           <a:chExt cx="0" cy="0"/>
         </a:xfrm>
       </p:grpSpPr>
-      <p:sp>
-        <p:nvSpPr>
-          <p:cNvPr id="2" name="Header Placeholder 1"/>
-          <p:cNvSpPr>
-            <a:spLocks noGrp="1"/>
-          </p:cNvSpPr>
-          <p:nvPr>
-            <p:ph type="hdr" sz="quarter"/>
-          </p:nvPr>
-        </p:nvSpPr>
-        <p:spPr>
-          <a:xfrm>
-            <a:off x="0" y="0"/>
-            <a:ext cx="2971800" cy="458788"/>
-          </a:xfrm>
-          <a:prstGeom prst="rect">
-            <a:avLst/>
-          </a:prstGeom>
-        </p:spPr>
-        <p:txBody>
-          <a:bodyPr vert="horz" lIns="91440" tIns="45720" rIns="91440" bIns="45720" rtlCol="0"/>
-          <a:lstStyle>
-            <a:lvl1pPr algn="l">
-              <a:defRPr sz="1200"/>
-            </a:lvl1pPr>
-          </a:lstStyle>
-          <a:p>
-            <a:endParaRPr lang="en-US"/>
-          </a:p>
-        </p:txBody>
-      </p:sp>
-      <p:sp>
-        <p:nvSpPr>
-          <p:cNvPr id="3" name="Date Placeholder 2"/>
-          <p:cNvSpPr>
-            <a:spLocks noGrp="1"/>
-          </p:cNvSpPr>
-          <p:nvPr>
-            <p:ph type="dt" idx="1"/>
-          </p:nvPr>
-        </p:nvSpPr>
-        <p:spPr>
-          <a:xfrm>
-            <a:off x="3884613" y="0"/>
-            <a:ext cx="2971800" cy="458788"/>
-          </a:xfrm>
-          <a:prstGeom prst="rect">
-            <a:avLst/>
-          </a:prstGeom>
-        </p:spPr>
-        <p:txBody>
-          <a:bodyPr vert="horz" lIns="91440" tIns="45720" rIns="91440" bIns="45720" rtlCol="0"/>
-          <a:lstStyle>
-            <a:lvl1pPr algn="r">
-              <a:defRPr sz="1200"/>
-            </a:lvl1pPr>
-          </a:lstStyle>
-          <a:p>
-            <a:fld id="{5282F153-3F37-0F45-9E97-73ACFA13230C}" type="datetimeFigureOut">
-              <a:rPr lang="en-US"/>
-              <a:t>7/23/19</a:t>
-            </a:fld>
-            <a:endParaRPr lang="en-US"/>
-          </a:p>
-        </p:txBody>
-      </p:sp>
-      <p:sp>
-        <p:nvSpPr>
-          <p:cNvPr id="4" name="Slide Image Placeholder 3"/>
-          <p:cNvSpPr>
-            <a:spLocks noGrp="1" noRot="1" noChangeAspect="1"/>
-          </p:cNvSpPr>
-          <p:nvPr>
-            <p:ph type="sldImg" idx="2"/>
-          </p:nvPr>
-        </p:nvSpPr>
-        <p:spPr>
-          <a:xfrm>
-            <a:off x="685800" y="1143000"/>
-            <a:ext cx="5486400" cy="3086100"/>
-          </a:xfrm>
-          <a:prstGeom prst="rect">
-            <a:avLst/>
-          </a:prstGeom>
-          <a:noFill/>
-          <a:ln w="12700">
-            <a:solidFill>
-              <a:prstClr val="black"/>
-            </a:solidFill>
-          </a:ln>
-        </p:spPr>
-        <p:txBody>
-          <a:bodyPr vert="horz" lIns="91440" tIns="45720" rIns="91440" bIns="45720" rtlCol="0" anchor="ctr"/>
-          <a:lstStyle/>
-          <a:p>
-            <a:endParaRPr lang="en-US"/>
-          </a:p>
-        </p:txBody>
-      </p:sp>
-      <p:sp>
-        <p:nvSpPr>
-          <p:cNvPr id="5" name="Notes Placeholder 4"/>
-          <p:cNvSpPr>
-            <a:spLocks noGrp="1"/>
-          </p:cNvSpPr>
-          <p:nvPr>
-            <p:ph type="body" sz="quarter" idx="3"/>
-          </p:nvPr>
-        </p:nvSpPr>
-        <p:spPr>
-          <a:xfrm>
-            <a:off x="685800" y="4400550"/>
-            <a:ext cx="5486400" cy="3600450"/>
-          </a:xfrm>
-          <a:prstGeom prst="rect">
-            <a:avLst/>
-          </a:prstGeom>
-        </p:spPr>
-        <p:txBody>
-          <a:bodyPr vert="horz" lIns="91440" tIns="45720" rIns="91440" bIns="45720" rtlCol="0"/>
-          <a:lstStyle/>
-          <a:p>
-            <a:pPr lvl="0"/>
-            <a:r>
-              <a:rPr lang="en-US"/>
-              <a:t>Click to edit Master text styles</a:t>
-            </a:r>
-          </a:p>
-          <a:p>
-            <a:pPr lvl="1"/>
-            <a:r>
-              <a:rPr lang="en-US"/>
-              <a:t>Second level</a:t>
-            </a:r>
-          </a:p>
-          <a:p>
-            <a:pPr lvl="2"/>
-            <a:r>
-              <a:rPr lang="en-US"/>
-              <a:t>Third level</a:t>
-            </a:r>
-          </a:p>
-          <a:p>
-            <a:pPr lvl="3"/>
-            <a:r>
-              <a:rPr lang="en-US"/>
-              <a:t>Fourth level</a:t>
-            </a:r>
-          </a:p>
-          <a:p>
-            <a:pPr lvl="4"/>
-            <a:r>
-              <a:rPr lang="en-US"/>
-              <a:t>Fifth level</a:t>
-            </a:r>
-          </a:p>
-        </p:txBody>
-      </p:sp>
-      <p:sp>
-        <p:nvSpPr>
-          <p:cNvPr id="6" name="Footer Placeholder 5"/>
-          <p:cNvSpPr>
-            <a:spLocks noGrp="1"/>
-          </p:cNvSpPr>
-          <p:nvPr>
-            <p:ph type="ftr" sz="quarter" idx="4"/>
-          </p:nvPr>
-        </p:nvSpPr>
-        <p:spPr>
-          <a:xfrm>
-            <a:off x="0" y="8685213"/>
-            <a:ext cx="2971800" cy="458787"/>
-          </a:xfrm>
-          <a:prstGeom prst="rect">
-            <a:avLst/>
-          </a:prstGeom>
-        </p:spPr>
-        <p:txBody>
-          <a:bodyPr vert="horz" lIns="91440" tIns="45720" rIns="91440" bIns="45720" rtlCol="0" anchor="b"/>
-          <a:lstStyle>
-            <a:lvl1pPr algn="l">
-              <a:defRPr sz="1200"/>
-            </a:lvl1pPr>
-          </a:lstStyle>
-          <a:p>
-            <a:endParaRPr lang="en-US"/>
-          </a:p>
-        </p:txBody>
-      </p:sp>
-      <p:sp>
-        <p:nvSpPr>
-          <p:cNvPr id="7" name="Slide Number Placeholder 6"/>
-          <p:cNvSpPr>
-            <a:spLocks noGrp="1"/>
-          </p:cNvSpPr>
-          <p:nvPr>
-            <p:ph type="sldNum" sz="quarter" idx="5"/>
-          </p:nvPr>
-        </p:nvSpPr>
-        <p:spPr>
-          <a:xfrm>
-            <a:off x="3884613" y="8685213"/>
-            <a:ext cx="2971800" cy="458787"/>
-          </a:xfrm>
-          <a:prstGeom prst="rect">
-            <a:avLst/>
-          </a:prstGeom>
-        </p:spPr>
-        <p:txBody>
-          <a:bodyPr vert="horz" lIns="91440" tIns="45720" rIns="91440" bIns="45720" rtlCol="0" anchor="b"/>
-          <a:lstStyle>
-            <a:lvl1pPr algn="r">
-              <a:defRPr sz="1200"/>
-            </a:lvl1pPr>
-          </a:lstStyle>
-          <a:p>
-            <a:fld id="{CE5E9CC1-C706-0F49-92D6-E571CC5EEA8F}" type="slidenum">
-              <a:rPr lang="en-US"/>
-              <a:t>‹#›</a:t>
-            </a:fld>
-            <a:endParaRPr lang="en-US"/>
-          </a:p>
-        </p:txBody>
-      </p:sp>
     </p:spTree>
     <p:extLst>
       <p:ext uri="{BB962C8B-B14F-4D97-AF65-F5344CB8AC3E}">
-        <p14:creationId xmlns:p14="http://schemas.microsoft.com/office/powerpoint/2010/main" val="1024086991"/>
+        <p14:creationId xmlns:p14="http://schemas.microsoft.com/office/powerpoint/2010/main" val="913359725"/>
       </p:ext>
     </p:extLst>
   </p:cSld>
@@ -552,9 +328,8 @@
           <a:p>
             <a:r>
               <a:rPr lang="en-US" dirty="0"/>
-              <a:t>ОМА для дома — одно приложение, где частный клиент покупает материалы и получает готовый ремонт, а мастер получает заказы и закупку. Ответственный за всё — ОМА.</a:t>
-            </a:r>
-            <a:endParaRPr lang="en-US" dirty="0"/>
+              <a:t>Аудитория у ОМА огромная, но магазин заканчивается на кассе. Клиент остаётся один на один с поиском мастера, а мастер — с поиском заказов. Мы закрываем разрыв для обеих сторон.</a:t>
+            </a:r>
           </a:p>
         </p:txBody>
       </p:sp>
@@ -575,7 +350,7 @@
           <a:p>
             <a:fld id="{F7021451-1387-4CA6-816F-3879F97B5CBC}" type="slidenum">
               <a:rPr lang="en-US"/>
-              <a:t>1</a:t>
+              <a:t>2</a:t>
             </a:fld>
             <a:endParaRPr lang="en-US"/>
           </a:p>
@@ -640,9 +415,8 @@
           <a:p>
             <a:r>
               <a:rPr lang="en-US" dirty="0"/>
-              <a:t>Аудитория у ОМА огромная, но магазин заканчивается на кассе. Клиент остаётся один на один с поиском мастера, а мастер — с поиском заказов. Мы закрываем разрыв для обеих сторон.</a:t>
-            </a:r>
-            <a:endParaRPr lang="en-US" dirty="0"/>
+              <a:t>Две стороны в одном приложении. Частное лицо видит дизайн, стройку и бюджет. Бизнес — заказы, заработок и закупку. Посередине ОМА: договор, цена, гарантия и оплата после приёмки.</a:t>
+            </a:r>
           </a:p>
         </p:txBody>
       </p:sp>
@@ -663,7 +437,7 @@
           <a:p>
             <a:fld id="{F7021451-1387-4CA6-816F-3879F97B5CBC}" type="slidenum">
               <a:rPr lang="en-US"/>
-              <a:t>2</a:t>
+              <a:t>3</a:t>
             </a:fld>
             <a:endParaRPr lang="en-US"/>
           </a:p>
@@ -728,9 +502,8 @@
           <a:p>
             <a:r>
               <a:rPr lang="en-US" dirty="0"/>
-              <a:t>Две стороны в одном приложении. Частное лицо видит дизайн, стройку и бюджет. Бизнес — заказы, заработок и закупку. Посередине ОМА: договор, цена, гарантия и оплата после приёмки.</a:t>
-            </a:r>
-            <a:endParaRPr lang="en-US" dirty="0"/>
+              <a:t>Ни один способ найти мастера сегодня не связывает материалы и работу. У нас смета из товаров ОМА, материалы одной партией к дате работ, оплата после приёмки и один ответственный.</a:t>
+            </a:r>
           </a:p>
         </p:txBody>
       </p:sp>
@@ -751,7 +524,7 @@
           <a:p>
             <a:fld id="{F7021451-1387-4CA6-816F-3879F97B5CBC}" type="slidenum">
               <a:rPr lang="en-US"/>
-              <a:t>3</a:t>
+              <a:t>4</a:t>
             </a:fld>
             <a:endParaRPr lang="en-US"/>
           </a:p>
@@ -816,9 +589,8 @@
           <a:p>
             <a:r>
               <a:rPr lang="en-US" dirty="0"/>
-              <a:t>Ни один способ найти мастера сегодня не связывает материалы и работу. У нас смета из товаров ОМА, материалы одной партией к дате работ, оплата после приёмки и один ответственный.</a:t>
-            </a:r>
-            <a:endParaRPr lang="en-US" dirty="0"/>
+              <a:t>Две дорожки одного процесса. Клиент идёт от задачи до приёмки, мастер — от регистрации до выплаты. Встречаются на заказе, который ведёт ОМА. После ремонта обе стороны остаются в приложении.</a:t>
+            </a:r>
           </a:p>
         </p:txBody>
       </p:sp>
@@ -839,7 +611,7 @@
           <a:p>
             <a:fld id="{F7021451-1387-4CA6-816F-3879F97B5CBC}" type="slidenum">
               <a:rPr lang="en-US"/>
-              <a:t>4</a:t>
+              <a:t>5</a:t>
             </a:fld>
             <a:endParaRPr lang="en-US"/>
           </a:p>
@@ -904,9 +676,8 @@
           <a:p>
             <a:r>
               <a:rPr lang="en-US" dirty="0"/>
-              <a:t>Две дорожки одного процесса. Клиент идёт от задачи до приёмки, мастер — от регистрации до выплаты. Встречаются на заказе, который ведёт ОМА. После ремонта обе стороны остаются в приложении.</a:t>
-            </a:r>
-            <a:endParaRPr lang="en-US" dirty="0"/>
+              <a:t>Прототип открывается по ссылке. Показываем регистрацию с выбором частное лицо или бизнес, категории стройки, каталог мастеров с фильтрами, подбор бюджета и кабинет мастера с заработком.</a:t>
+            </a:r>
           </a:p>
         </p:txBody>
       </p:sp>
@@ -927,7 +698,7 @@
           <a:p>
             <a:fld id="{F7021451-1387-4CA6-816F-3879F97B5CBC}" type="slidenum">
               <a:rPr lang="en-US"/>
-              <a:t>5</a:t>
+              <a:t>6</a:t>
             </a:fld>
             <a:endParaRPr lang="en-US"/>
           </a:p>
@@ -992,97 +763,8 @@
           <a:p>
             <a:r>
               <a:rPr lang="en-US" dirty="0"/>
-              <a:t>Прототип открывается по ссылке. Показываем регистрацию с выбором частное лицо или бизнес, категории стройки, каталог мастеров с фильтрами, подбор бюджета и кабинет мастера с заработком.</a:t>
-            </a:r>
-            <a:endParaRPr lang="en-US" dirty="0"/>
-          </a:p>
-        </p:txBody>
-      </p:sp>
-      <p:sp>
-        <p:nvSpPr>
-          <p:cNvPr id="4" name="Slide Number Placeholder 3"/>
-          <p:cNvSpPr>
-            <a:spLocks noGrp="1"/>
-          </p:cNvSpPr>
-          <p:nvPr>
-            <p:ph type="sldNum" sz="quarter" idx="10"/>
-          </p:nvPr>
-        </p:nvSpPr>
-        <p:spPr/>
-        <p:txBody>
-          <a:bodyPr/>
-          <a:lstStyle/>
-          <a:p>
-            <a:fld id="{F7021451-1387-4CA6-816F-3879F97B5CBC}" type="slidenum">
-              <a:rPr lang="en-US"/>
-              <a:t>6</a:t>
-            </a:fld>
-            <a:endParaRPr lang="en-US"/>
-          </a:p>
-        </p:txBody>
-      </p:sp>
-    </p:spTree>
-    <p:extLst>
-      <p:ext uri="{BB962C8B-B14F-4D97-AF65-F5344CB8AC3E}">
-        <p14:creationId xmlns:p14="http://schemas.microsoft.com/office/powerpoint/2010/main" val="1024086991"/>
-      </p:ext>
-    </p:extLst>
-  </p:cSld>
-  <p:clrMapOvr>
-    <a:masterClrMapping/>
-  </p:clrMapOvr>
-</p:notes>
-</file>
-
-<file path=ppt/notesSlides/notesSlide7.xml><?xml version="1.0" encoding="utf-8"?>
-<p:notes xmlns:a="http://schemas.openxmlformats.org/drawingml/2006/main" xmlns:r="http://schemas.openxmlformats.org/officeDocument/2006/relationships" xmlns:p="http://schemas.openxmlformats.org/presentationml/2006/main">
-  <p:cSld>
-    <p:spTree>
-      <p:nvGrpSpPr>
-        <p:cNvPr id="1" name=""/>
-        <p:cNvGrpSpPr/>
-        <p:nvPr/>
-      </p:nvGrpSpPr>
-      <p:grpSpPr>
-        <a:xfrm>
-          <a:off x="0" y="0"/>
-          <a:ext cx="0" cy="0"/>
-          <a:chOff x="0" y="0"/>
-          <a:chExt cx="0" cy="0"/>
-        </a:xfrm>
-      </p:grpSpPr>
-      <p:sp>
-        <p:nvSpPr>
-          <p:cNvPr id="2" name="Slide Image Placeholder 1"/>
-          <p:cNvSpPr>
-            <a:spLocks noGrp="1" noRot="1" noChangeAspect="1"/>
-          </p:cNvSpPr>
-          <p:nvPr>
-            <p:ph type="sldImg"/>
-          </p:nvPr>
-        </p:nvSpPr>
-        <p:spPr/>
-      </p:sp>
-      <p:sp>
-        <p:nvSpPr>
-          <p:cNvPr id="3" name="Notes Placeholder 2"/>
-          <p:cNvSpPr>
-            <a:spLocks noGrp="1"/>
-          </p:cNvSpPr>
-          <p:nvPr>
-            <p:ph type="body" idx="1"/>
-          </p:nvPr>
-        </p:nvSpPr>
-        <p:spPr/>
-        <p:txBody>
-          <a:bodyPr/>
-          <a:lstStyle/>
-          <a:p>
-            <a:r>
-              <a:rPr lang="en-US" dirty="0"/>
               <a:t>Пилот в Минске стоит 300–500 тысяч рублей за год. С одного заказа ОМА получает около 160 рублей, окупаемость — примерно 2 500 заказов в год. Трафик уже есть: магазины, OMA PRO и «Баланс». Модель законна: ОМА отвечает перед клиентом как исполнитель.</a:t>
             </a:r>
-            <a:endParaRPr lang="en-US" dirty="0"/>
           </a:p>
         </p:txBody>
       </p:sp>
@@ -1160,6 +842,7 @@
         <a:solidFill>
           <a:srgbClr val="24164F"/>
         </a:solidFill>
+        <a:effectLst/>
       </p:bgPr>
     </p:bg>
     <p:spTree>
@@ -1192,6 +875,7 @@
         <a:solidFill>
           <a:srgbClr val="F3F5FA"/>
         </a:solidFill>
+        <a:effectLst/>
       </p:bgPr>
     </p:bg>
     <p:spTree>
@@ -1211,9 +895,11 @@
       <p:sp>
         <p:nvSpPr>
           <p:cNvPr id="2" name="Text 0"/>
-          <p:cNvSpPr/>
+          <p:cNvSpPr>
+            <a:spLocks noGrp="1"/>
+          </p:cNvSpPr>
           <p:nvPr>
-            <p:ph idx="100" type="title" hasCustomPrompt="1"/>
+            <p:ph type="title" idx="100" hasCustomPrompt="1"/>
           </p:nvPr>
         </p:nvSpPr>
         <p:spPr>
@@ -1230,7 +916,7 @@
         <p:txBody>
           <a:bodyPr wrap="square" rtlCol="0"/>
           <a:lstStyle>
-            <a:lvl1pPr algn="l" indent="0" marL="0">
+            <a:lvl1pPr marL="0" indent="0" algn="l">
               <a:buNone/>
               <a:defRPr lang="en-US" sz="3200" b="1" dirty="0">
                 <a:solidFill>
@@ -1240,46 +926,10 @@
             </a:lvl1pPr>
           </a:lstStyle>
           <a:p>
-            <a:pPr algn="l" indent="0" marL="0">
+            <a:pPr marL="0" indent="0" algn="l">
               <a:buNone/>
             </a:pPr>
             <a:endParaRPr lang="en-US" sz="3200" dirty="0"/>
-          </a:p>
-        </p:txBody>
-      </p:sp>
-      <p:sp>
-        <p:nvSpPr>
-          <p:cNvPr id="3" name="Text 0"/>
-          <p:cNvSpPr/>
-          <p:nvPr/>
-        </p:nvSpPr>
-        <p:spPr>
-          <a:xfrm>
-            <a:off x="548640" y="6400800"/>
-            <a:ext cx="5486400" cy="274320"/>
-          </a:xfrm>
-          <a:prstGeom prst="rect">
-            <a:avLst/>
-          </a:prstGeom>
-          <a:noFill/>
-          <a:ln/>
-        </p:spPr>
-        <p:txBody>
-          <a:bodyPr wrap="square" lIns="0" tIns="0" rIns="0" bIns="0" rtlCol="0" anchor="ctr"/>
-          <a:lstStyle/>
-          <a:p>
-            <a:pPr indent="0" marL="0">
-              <a:buNone/>
-            </a:pPr>
-            <a:r>
-              <a:rPr lang="en-US" sz="1000" dirty="0">
-                <a:solidFill>
-                  <a:schemeClr val="accent6"/>
-                </a:solidFill>
-              </a:rPr>
-              <a:t>ОМА для дома · хакатон ОМА 2026</a:t>
-            </a:r>
-            <a:endParaRPr lang="en-US" sz="1000" dirty="0"/>
           </a:p>
         </p:txBody>
       </p:sp>
@@ -1303,7 +953,7 @@
           </a:prstGeom>
           <a:extLst>
             <a:ext uri="{C572A759-6A51-4108-AA02-DFA0A04FC94B}">
-              <ma14:wrappingTextBoxFlag xmlns:ma14="http://schemas.microsoft.com/office/mac/drawingml/2011/main" val="0"/>
+              <ma14:wrappingTextBoxFlag xmlns="" xmlns:ma14="http://schemas.microsoft.com/office/mac/drawingml/2011/main" val="0"/>
             </a:ext>
           </a:extLst>
         </p:spPr>
@@ -1321,8 +971,8 @@
           <a:p>
             <a:pPr algn="r"/>
             <a:fld id="{F7021451-1387-4CA6-816F-3879F97B5CBC}" type="slidenum">
-              <a:rPr b="0" lang="en-US"/>
-              <a:t>1003</a:t>
+              <a:rPr lang="en-US" b="0"/>
+              <a:t>‹#›</a:t>
             </a:fld>
             <a:endParaRPr lang="en-US"/>
           </a:p>
@@ -1336,9 +986,17 @@
 </p:sldLayout>
 </file>
 
-<file path=ppt/slideMasters/slideMaster1.xml><?xml version="1.0" encoding="utf-8"?>
-<p:sldMaster xmlns:a="http://schemas.openxmlformats.org/drawingml/2006/main" xmlns:r="http://schemas.openxmlformats.org/officeDocument/2006/relationships" xmlns:p="http://schemas.openxmlformats.org/presentationml/2006/main">
-  <p:cSld>
+<file path=ppt/slideLayouts/slideLayout4.xml><?xml version="1.0" encoding="utf-8"?>
+<p:sldLayout xmlns:a="http://schemas.openxmlformats.org/drawingml/2006/main" xmlns:r="http://schemas.openxmlformats.org/officeDocument/2006/relationships" xmlns:p="http://schemas.openxmlformats.org/presentationml/2006/main" showMasterSp="0" type="obj">
+  <p:cSld name="Blank">
+    <p:bg>
+      <p:bgPr>
+        <a:solidFill>
+          <a:schemeClr val="bg1"/>
+        </a:solidFill>
+        <a:effectLst/>
+      </p:bgPr>
+    </p:bg>
     <p:spTree>
       <p:nvGrpSpPr>
         <p:cNvPr id="1" name=""/>
@@ -1355,6 +1013,179 @@
       </p:grpSpPr>
       <p:sp>
         <p:nvSpPr>
+          <p:cNvPr id="2" name="Holder 2"/>
+          <p:cNvSpPr>
+            <a:spLocks noGrp="1"/>
+          </p:cNvSpPr>
+          <p:nvPr>
+            <p:ph type="ftr" sz="quarter" idx="5"/>
+          </p:nvPr>
+        </p:nvSpPr>
+        <p:spPr/>
+        <p:txBody>
+          <a:bodyPr lIns="0" tIns="0" rIns="0" bIns="0"/>
+          <a:lstStyle>
+            <a:lvl1pPr algn="ctr">
+              <a:defRPr>
+                <a:solidFill>
+                  <a:schemeClr val="tx1">
+                    <a:tint val="75000"/>
+                  </a:schemeClr>
+                </a:solidFill>
+              </a:defRPr>
+            </a:lvl1pPr>
+          </a:lstStyle>
+          <a:p>
+            <a:endParaRPr/>
+          </a:p>
+        </p:txBody>
+      </p:sp>
+      <p:sp>
+        <p:nvSpPr>
+          <p:cNvPr id="3" name="Holder 3"/>
+          <p:cNvSpPr>
+            <a:spLocks noGrp="1"/>
+          </p:cNvSpPr>
+          <p:nvPr>
+            <p:ph type="dt" sz="half" idx="6"/>
+          </p:nvPr>
+        </p:nvSpPr>
+        <p:spPr/>
+        <p:txBody>
+          <a:bodyPr lIns="0" tIns="0" rIns="0" bIns="0"/>
+          <a:lstStyle>
+            <a:lvl1pPr algn="l">
+              <a:defRPr>
+                <a:solidFill>
+                  <a:schemeClr val="tx1">
+                    <a:tint val="75000"/>
+                  </a:schemeClr>
+                </a:solidFill>
+              </a:defRPr>
+            </a:lvl1pPr>
+          </a:lstStyle>
+          <a:p>
+            <a:fld id="{1D8BD707-D9CF-40AE-B4C6-C98DA3205C09}" type="datetimeFigureOut">
+              <a:rPr lang="en-US"/>
+              <a:t>10/28/2026</a:t>
+            </a:fld>
+            <a:endParaRPr lang="en-US"/>
+          </a:p>
+        </p:txBody>
+      </p:sp>
+      <p:sp>
+        <p:nvSpPr>
+          <p:cNvPr id="4" name="Holder 4"/>
+          <p:cNvSpPr>
+            <a:spLocks noGrp="1"/>
+          </p:cNvSpPr>
+          <p:nvPr>
+            <p:ph type="sldNum" sz="quarter" idx="7"/>
+          </p:nvPr>
+        </p:nvSpPr>
+        <p:spPr/>
+        <p:txBody>
+          <a:bodyPr lIns="0" tIns="0" rIns="0" bIns="0"/>
+          <a:lstStyle>
+            <a:lvl1pPr>
+              <a:defRPr sz="950" b="0" i="0">
+                <a:solidFill>
+                  <a:srgbClr val="596678"/>
+                </a:solidFill>
+                <a:latin typeface="Arial"/>
+                <a:cs typeface="Arial"/>
+              </a:defRPr>
+            </a:lvl1pPr>
+          </a:lstStyle>
+          <a:p>
+            <a:pPr marL="139700">
+              <a:lnSpc>
+                <a:spcPct val="100000"/>
+              </a:lnSpc>
+              <a:spcBef>
+                <a:spcPts val="190"/>
+              </a:spcBef>
+            </a:pPr>
+            <a:fld id="{81D60167-4931-47E6-BA6A-407CBD079E47}" type="slidenum">
+              <a:rPr spc="75" dirty="0">
+                <a:solidFill>
+                  <a:srgbClr val="B6CCF1"/>
+                </a:solidFill>
+              </a:rPr>
+              <a:t>‹#›</a:t>
+            </a:fld>
+            <a:r>
+              <a:rPr spc="-70" dirty="0">
+                <a:solidFill>
+                  <a:srgbClr val="B6CCF1"/>
+                </a:solidFill>
+              </a:rPr>
+              <a:t> </a:t>
+            </a:r>
+            <a:r>
+              <a:rPr spc="110" dirty="0">
+                <a:solidFill>
+                  <a:srgbClr val="B6CCF1"/>
+                </a:solidFill>
+              </a:rPr>
+              <a:t>/</a:t>
+            </a:r>
+            <a:r>
+              <a:rPr spc="-65" dirty="0">
+                <a:solidFill>
+                  <a:srgbClr val="B6CCF1"/>
+                </a:solidFill>
+              </a:rPr>
+              <a:t> </a:t>
+            </a:r>
+            <a:r>
+              <a:rPr spc="50" dirty="0">
+                <a:solidFill>
+                  <a:srgbClr val="B6CCF1"/>
+                </a:solidFill>
+              </a:rPr>
+              <a:t>17</a:t>
+            </a:r>
+          </a:p>
+        </p:txBody>
+      </p:sp>
+    </p:spTree>
+    <p:extLst>
+      <p:ext uri="{BB962C8B-B14F-4D97-AF65-F5344CB8AC3E}">
+        <p14:creationId xmlns:p14="http://schemas.microsoft.com/office/powerpoint/2010/main" val="1111902540"/>
+      </p:ext>
+    </p:extLst>
+  </p:cSld>
+  <p:clrMapOvr>
+    <a:masterClrMapping/>
+  </p:clrMapOvr>
+</p:sldLayout>
+</file>
+
+<file path=ppt/slideMasters/slideMaster1.xml><?xml version="1.0" encoding="utf-8"?>
+<p:sldMaster xmlns:a="http://schemas.openxmlformats.org/drawingml/2006/main" xmlns:r="http://schemas.openxmlformats.org/officeDocument/2006/relationships" xmlns:p="http://schemas.openxmlformats.org/presentationml/2006/main">
+  <p:cSld>
+    <p:bg>
+      <p:bgRef idx="1001">
+        <a:schemeClr val="bg1"/>
+      </p:bgRef>
+    </p:bg>
+    <p:spTree>
+      <p:nvGrpSpPr>
+        <p:cNvPr id="1" name=""/>
+        <p:cNvGrpSpPr/>
+        <p:nvPr/>
+      </p:nvGrpSpPr>
+      <p:grpSpPr>
+        <a:xfrm>
+          <a:off x="0" y="0"/>
+          <a:ext cx="0" cy="0"/>
+          <a:chOff x="0" y="0"/>
+          <a:chExt cx="0" cy="0"/>
+        </a:xfrm>
+      </p:grpSpPr>
+      <p:sp>
+        <p:nvSpPr>
           <p:cNvPr id="25" name="Slide Number Placeholder 0"/>
           <p:cNvSpPr>
             <a:spLocks noGrp="1"/>
@@ -1373,7 +1204,7 @@
           </a:prstGeom>
           <a:extLst>
             <a:ext uri="{C572A759-6A51-4108-AA02-DFA0A04FC94B}">
-              <ma14:wrappingTextBoxFlag xmlns:ma14="http://schemas.microsoft.com/office/mac/drawingml/2011/main" val="0"/>
+              <ma14:wrappingTextBoxFlag xmlns="" xmlns:ma14="http://schemas.microsoft.com/office/mac/drawingml/2011/main" val="0"/>
             </a:ext>
           </a:extLst>
         </p:spPr>
@@ -1391,8 +1222,8 @@
           <a:p>
             <a:pPr algn="r"/>
             <a:fld id="{F7021451-1387-4CA6-816F-3879F97B5CBC}" type="slidenum">
-              <a:rPr b="0" lang="en-US"/>
-              <a:t>null</a:t>
+              <a:rPr lang="en-US" b="0"/>
+              <a:t>‹#›</a:t>
             </a:fld>
             <a:endParaRPr lang="en-US"/>
           </a:p>
@@ -1405,6 +1236,7 @@
     <p:sldLayoutId id="2147483649" r:id="rId1"/>
     <p:sldLayoutId id="2147483650" r:id="rId2"/>
     <p:sldLayoutId id="2147483651" r:id="rId3"/>
+    <p:sldLayoutId id="2147483652" r:id="rId4"/>
   </p:sldLayoutIdLst>
   <p:hf sldNum="0" hdr="0" ftr="0" dt="0"/>
   <p:txStyles>
@@ -1662,7 +1494,7 @@
 
 <file path=ppt/slides/slide1.xml><?xml version="1.0" encoding="utf-8"?>
 <p:sld xmlns:a="http://schemas.openxmlformats.org/drawingml/2006/main" xmlns:r="http://schemas.openxmlformats.org/officeDocument/2006/relationships" xmlns:p="http://schemas.openxmlformats.org/presentationml/2006/main">
-  <p:cSld name="Slide 1">
+  <p:cSld>
     <p:spTree>
       <p:nvGrpSpPr>
         <p:cNvPr id="1" name=""/>
@@ -1679,201 +1511,13 @@
       </p:grpSpPr>
       <p:pic>
         <p:nvPicPr>
-          <p:cNvPr id="2" name="Логотип" descr="/tmp/claude-0/-home-user-hackatonoma/e77f010d-b8c6-588a-a375-3aa4548717b1/scratchpad/deckgen/assets/lockup-white.png">    </p:cNvPr>
-          <p:cNvPicPr>
-            <a:picLocks noChangeAspect="1"/>
-          </p:cNvPicPr>
-          <p:nvPr/>
-        </p:nvPicPr>
-        <p:blipFill>
-          <a:blip r:embed="rId1"/>
-          <a:stretch>
-            <a:fillRect/>
-          </a:stretch>
-        </p:blipFill>
-        <p:spPr>
-          <a:xfrm>
-            <a:off x="640080" y="1143000"/>
-            <a:ext cx="5852160" cy="1397324"/>
-          </a:xfrm>
-          <a:prstGeom prst="rect">
-            <a:avLst/>
-          </a:prstGeom>
-        </p:spPr>
-      </p:pic>
-      <p:sp>
-        <p:nvSpPr>
-          <p:cNvPr id="3" name="Подзаголовок"/>
-          <p:cNvSpPr txBox="1"/>
-          <p:nvPr/>
-        </p:nvSpPr>
-        <p:spPr>
-          <a:xfrm>
-            <a:off x="640080" y="2880360"/>
-            <a:ext cx="6309360" cy="914400"/>
-          </a:xfrm>
-          <a:prstGeom prst="rect">
-            <a:avLst/>
-          </a:prstGeom>
-          <a:noFill/>
-          <a:ln/>
-        </p:spPr>
-        <p:txBody>
-          <a:bodyPr wrap="square" lIns="0" tIns="0" rIns="0" bIns="0" rtlCol="0" anchor="t"/>
-          <a:lstStyle/>
-          <a:p>
-            <a:pPr indent="0" marL="0">
-              <a:buNone/>
-            </a:pPr>
-            <a:r>
-              <a:rPr lang="en-US" sz="2400" b="1" dirty="0">
-                <a:solidFill>
-                  <a:schemeClr val="bg1"/>
-                </a:solidFill>
-              </a:rPr>
-              <a:t>Ремонт в одном окне — от выбора материалов до готового результата</a:t>
-            </a:r>
-            <a:endParaRPr lang="en-US" sz="2400" dirty="0"/>
-          </a:p>
-        </p:txBody>
-      </p:sp>
-      <p:sp>
-        <p:nvSpPr>
-          <p:cNvPr id="4" name="Описание"/>
-          <p:cNvSpPr txBox="1"/>
-          <p:nvPr/>
-        </p:nvSpPr>
-        <p:spPr>
-          <a:xfrm>
-            <a:off x="640080" y="3886200"/>
-            <a:ext cx="6309360" cy="365760"/>
-          </a:xfrm>
-          <a:prstGeom prst="rect">
-            <a:avLst/>
-          </a:prstGeom>
-          <a:noFill/>
-          <a:ln/>
-        </p:spPr>
-        <p:txBody>
-          <a:bodyPr wrap="square" lIns="0" tIns="0" rIns="0" bIns="0" rtlCol="0" anchor="t"/>
-          <a:lstStyle/>
-          <a:p>
-            <a:pPr indent="0" marL="0">
-              <a:buNone/>
-            </a:pPr>
-            <a:r>
-              <a:rPr lang="en-US" sz="1600" dirty="0">
-                <a:solidFill>
-                  <a:srgbClr val="C9BFF0"/>
-                </a:solidFill>
-              </a:rPr>
-              <a:t>Приложение ОМА для частных клиентов и для мастеров</a:t>
-            </a:r>
-            <a:endParaRPr lang="en-US" sz="1600" dirty="0"/>
-          </a:p>
-        </p:txBody>
-      </p:sp>
-      <p:sp>
-        <p:nvSpPr>
-          <p:cNvPr id="5" name="Команда"/>
-          <p:cNvSpPr txBox="1"/>
-          <p:nvPr/>
-        </p:nvSpPr>
-        <p:spPr>
-          <a:xfrm>
-            <a:off x="640080" y="4800600"/>
-            <a:ext cx="3657600" cy="1097280"/>
-          </a:xfrm>
-          <a:prstGeom prst="rect">
-            <a:avLst/>
-          </a:prstGeom>
-          <a:noFill/>
-          <a:ln/>
-        </p:spPr>
-        <p:txBody>
-          <a:bodyPr wrap="square" lIns="0" tIns="0" rIns="0" bIns="0" rtlCol="0" anchor="t"/>
-          <a:lstStyle/>
-          <a:p>
-            <a:pPr indent="0" marL="0">
-              <a:spcAft>
-                <a:spcPts val="400"/>
-              </a:spcAft>
-              <a:buNone/>
-            </a:pPr>
-            <a:r>
-              <a:rPr lang="en-US" sz="1500" dirty="0">
-                <a:solidFill>
-                  <a:schemeClr val="bg1"/>
-                </a:solidFill>
-              </a:rPr>
-              <a:t>Мовсик Алексей</a:t>
-            </a:r>
-            <a:endParaRPr lang="en-US" sz="1500" dirty="0"/>
-          </a:p>
-          <a:p>
-            <a:pPr indent="0" marL="0">
-              <a:spcAft>
-                <a:spcPts val="400"/>
-              </a:spcAft>
-              <a:buNone/>
-            </a:pPr>
-            <a:r>
-              <a:rPr lang="en-US" sz="1500" dirty="0">
-                <a:solidFill>
-                  <a:schemeClr val="bg1"/>
-                </a:solidFill>
-              </a:rPr>
-              <a:t>Мухин Захар (спикер)</a:t>
-            </a:r>
-            <a:endParaRPr lang="en-US" sz="1500" dirty="0"/>
-          </a:p>
-          <a:p>
-            <a:pPr indent="0" marL="0">
-              <a:spcAft>
-                <a:spcPts val="400"/>
-              </a:spcAft>
-              <a:buNone/>
-            </a:pPr>
-            <a:r>
-              <a:rPr lang="en-US" sz="1500" dirty="0">
-                <a:solidFill>
-                  <a:schemeClr val="bg1"/>
-                </a:solidFill>
-              </a:rPr>
-              <a:t>Гайдук Никита</a:t>
-            </a:r>
-            <a:endParaRPr lang="en-US" sz="1500" dirty="0"/>
-          </a:p>
-        </p:txBody>
-      </p:sp>
-      <p:sp>
-        <p:nvSpPr>
-          <p:cNvPr id="6" name="Подложка"/>
-          <p:cNvSpPr/>
-          <p:nvPr/>
-        </p:nvSpPr>
-        <p:spPr>
-          <a:xfrm>
-            <a:off x="7498080" y="822960"/>
-            <a:ext cx="4206240" cy="4206240"/>
-          </a:xfrm>
-          <a:prstGeom prst="ellipse">
-            <a:avLst/>
-          </a:prstGeom>
-          <a:solidFill>
-            <a:srgbClr val="37235E"/>
-          </a:solidFill>
-          <a:ln w="12700">
-            <a:solidFill>
-              <a:srgbClr val="37235E"/>
-            </a:solidFill>
-            <a:prstDash val="solid"/>
-          </a:ln>
-        </p:spPr>
-      </p:sp>
-      <p:pic>
-        <p:nvPicPr>
-          <p:cNvPr id="7" name="Дом" descr="/tmp/claude-0/-home-user-hackatonoma/e77f010d-b8c6-588a-a375-3aa4548717b1/scratchpad/deckgen/assets/home.png">    </p:cNvPr>
+          <p:cNvPr id="3" name="Рисунок 2">
+            <a:extLst>
+              <a:ext uri="{FF2B5EF4-FFF2-40B4-BE49-F238E27FC236}">
+                <a16:creationId xmlns:a16="http://schemas.microsoft.com/office/drawing/2014/main" id="{61B84969-1E8E-465A-978F-06F4E0FFD9BA}"/>
+              </a:ext>
+            </a:extLst>
+          </p:cNvPr>
           <p:cNvPicPr>
             <a:picLocks noChangeAspect="1"/>
           </p:cNvPicPr>
@@ -1887,8 +1531,8 @@
         </p:blipFill>
         <p:spPr>
           <a:xfrm>
-            <a:off x="8001000" y="1234440"/>
-            <a:ext cx="3200400" cy="3200400"/>
+            <a:off x="0" y="-109523"/>
+            <a:ext cx="12334233" cy="6967523"/>
           </a:xfrm>
           <a:prstGeom prst="rect">
             <a:avLst/>
@@ -1897,76 +1541,394 @@
       </p:pic>
       <p:pic>
         <p:nvPicPr>
-          <p:cNvPr id="8" name="Мастер" descr="/tmp/claude-0/-home-user-hackatonoma/e77f010d-b8c6-588a-a375-3aa4548717b1/scratchpad/deckgen/assets/worker.png">    </p:cNvPr>
-          <p:cNvPicPr>
-            <a:picLocks noChangeAspect="1"/>
-          </p:cNvPicPr>
+          <p:cNvPr id="5" name="object 5"/>
+          <p:cNvPicPr/>
           <p:nvPr/>
         </p:nvPicPr>
         <p:blipFill>
-          <a:blip r:embed="rId3"/>
+          <a:blip r:embed="rId3" cstate="print"/>
           <a:stretch>
             <a:fillRect/>
           </a:stretch>
         </p:blipFill>
         <p:spPr>
           <a:xfrm>
-            <a:off x="7040880" y="3886200"/>
-            <a:ext cx="1645920" cy="1645920"/>
+            <a:off x="596899" y="1934457"/>
+            <a:ext cx="5991563" cy="1434854"/>
           </a:xfrm>
           <a:prstGeom prst="rect">
             <a:avLst/>
           </a:prstGeom>
         </p:spPr>
       </p:pic>
+      <p:sp>
+        <p:nvSpPr>
+          <p:cNvPr id="6" name="object 6"/>
+          <p:cNvSpPr txBox="1"/>
+          <p:nvPr/>
+        </p:nvSpPr>
+        <p:spPr>
+          <a:xfrm>
+            <a:off x="596899" y="3488689"/>
+            <a:ext cx="8572500" cy="2208169"/>
+          </a:xfrm>
+          <a:prstGeom prst="rect">
+            <a:avLst/>
+          </a:prstGeom>
+        </p:spPr>
+        <p:txBody>
+          <a:bodyPr vert="horz" wrap="square" lIns="0" tIns="7620" rIns="0" bIns="0" rtlCol="0">
+            <a:spAutoFit/>
+          </a:bodyPr>
+          <a:lstStyle/>
+          <a:p>
+            <a:r>
+              <a:rPr lang="en-US" sz="2000" b="1" dirty="0" err="1">
+                <a:solidFill>
+                  <a:schemeClr val="bg1"/>
+                </a:solidFill>
+              </a:rPr>
+              <a:t>Ремонт</a:t>
+            </a:r>
+            <a:r>
+              <a:rPr lang="en-US" sz="2000" b="1" dirty="0">
+                <a:solidFill>
+                  <a:schemeClr val="bg1"/>
+                </a:solidFill>
+              </a:rPr>
+              <a:t> в </a:t>
+            </a:r>
+            <a:r>
+              <a:rPr lang="en-US" sz="2000" b="1" dirty="0" err="1">
+                <a:solidFill>
+                  <a:schemeClr val="bg1"/>
+                </a:solidFill>
+              </a:rPr>
+              <a:t>одном</a:t>
+            </a:r>
+            <a:r>
+              <a:rPr lang="en-US" sz="2000" b="1" dirty="0">
+                <a:solidFill>
+                  <a:schemeClr val="bg1"/>
+                </a:solidFill>
+              </a:rPr>
+              <a:t> </a:t>
+            </a:r>
+            <a:r>
+              <a:rPr lang="en-US" sz="2000" b="1" dirty="0" err="1">
+                <a:solidFill>
+                  <a:schemeClr val="bg1"/>
+                </a:solidFill>
+              </a:rPr>
+              <a:t>окне</a:t>
+            </a:r>
+            <a:r>
+              <a:rPr lang="en-US" sz="2000" b="1" dirty="0">
+                <a:solidFill>
+                  <a:schemeClr val="bg1"/>
+                </a:solidFill>
+              </a:rPr>
+              <a:t> — </a:t>
+            </a:r>
+            <a:r>
+              <a:rPr lang="en-US" sz="2000" b="1" dirty="0" err="1">
+                <a:solidFill>
+                  <a:schemeClr val="bg1"/>
+                </a:solidFill>
+              </a:rPr>
+              <a:t>от</a:t>
+            </a:r>
+            <a:r>
+              <a:rPr lang="en-US" sz="2000" b="1" dirty="0">
+                <a:solidFill>
+                  <a:schemeClr val="bg1"/>
+                </a:solidFill>
+              </a:rPr>
+              <a:t> </a:t>
+            </a:r>
+            <a:r>
+              <a:rPr lang="en-US" sz="2000" b="1" dirty="0" err="1">
+                <a:solidFill>
+                  <a:schemeClr val="bg1"/>
+                </a:solidFill>
+              </a:rPr>
+              <a:t>выбора</a:t>
+            </a:r>
+            <a:r>
+              <a:rPr lang="en-US" sz="2000" b="1" dirty="0">
+                <a:solidFill>
+                  <a:schemeClr val="bg1"/>
+                </a:solidFill>
+              </a:rPr>
+              <a:t> </a:t>
+            </a:r>
+            <a:r>
+              <a:rPr lang="en-US" sz="2000" b="1" dirty="0" err="1">
+                <a:solidFill>
+                  <a:schemeClr val="bg1"/>
+                </a:solidFill>
+              </a:rPr>
+              <a:t>материалов</a:t>
+            </a:r>
+            <a:r>
+              <a:rPr lang="en-US" sz="2000" b="1" dirty="0">
+                <a:solidFill>
+                  <a:schemeClr val="bg1"/>
+                </a:solidFill>
+              </a:rPr>
+              <a:t> </a:t>
+            </a:r>
+            <a:r>
+              <a:rPr lang="en-US" sz="2000" b="1" dirty="0" err="1">
+                <a:solidFill>
+                  <a:schemeClr val="bg1"/>
+                </a:solidFill>
+              </a:rPr>
+              <a:t>до</a:t>
+            </a:r>
+            <a:r>
+              <a:rPr lang="en-US" sz="2000" b="1" dirty="0">
+                <a:solidFill>
+                  <a:schemeClr val="bg1"/>
+                </a:solidFill>
+              </a:rPr>
+              <a:t> </a:t>
+            </a:r>
+            <a:r>
+              <a:rPr lang="en-US" sz="2000" b="1" dirty="0" err="1">
+                <a:solidFill>
+                  <a:schemeClr val="bg1"/>
+                </a:solidFill>
+              </a:rPr>
+              <a:t>готового</a:t>
+            </a:r>
+            <a:r>
+              <a:rPr lang="en-US" sz="2000" b="1" dirty="0">
+                <a:solidFill>
+                  <a:schemeClr val="bg1"/>
+                </a:solidFill>
+              </a:rPr>
+              <a:t> </a:t>
+            </a:r>
+            <a:r>
+              <a:rPr lang="en-US" sz="2000" b="1" dirty="0" err="1">
+                <a:solidFill>
+                  <a:schemeClr val="bg1"/>
+                </a:solidFill>
+              </a:rPr>
+              <a:t>результата</a:t>
+            </a:r>
+            <a:endParaRPr lang="en-US" sz="2000" dirty="0"/>
+          </a:p>
+          <a:p>
+            <a:pPr marL="12700" marR="5080">
+              <a:lnSpc>
+                <a:spcPct val="120500"/>
+              </a:lnSpc>
+              <a:spcBef>
+                <a:spcPts val="60"/>
+              </a:spcBef>
+            </a:pPr>
+            <a:endParaRPr lang="ru-RU" sz="2100" spc="-75" dirty="0">
+              <a:solidFill>
+                <a:srgbClr val="D5E4FA"/>
+              </a:solidFill>
+              <a:cs typeface="Arial"/>
+            </a:endParaRPr>
+          </a:p>
+          <a:p>
+            <a:pPr marL="12700" marR="5080">
+              <a:lnSpc>
+                <a:spcPct val="120500"/>
+              </a:lnSpc>
+              <a:spcBef>
+                <a:spcPts val="60"/>
+              </a:spcBef>
+            </a:pPr>
+            <a:r>
+              <a:rPr lang="ru-RU" sz="2100" spc="-75" dirty="0" err="1">
+                <a:solidFill>
+                  <a:srgbClr val="D5E4FA"/>
+                </a:solidFill>
+                <a:cs typeface="Arial"/>
+              </a:rPr>
+              <a:t>Мовсик</a:t>
+            </a:r>
+            <a:r>
+              <a:rPr lang="ru-RU" sz="2100" spc="-75" dirty="0">
+                <a:solidFill>
+                  <a:srgbClr val="D5E4FA"/>
+                </a:solidFill>
+                <a:cs typeface="Arial"/>
+              </a:rPr>
+              <a:t> Алексей</a:t>
+            </a:r>
+          </a:p>
+          <a:p>
+            <a:pPr marL="12700" marR="5080">
+              <a:lnSpc>
+                <a:spcPct val="120500"/>
+              </a:lnSpc>
+              <a:spcBef>
+                <a:spcPts val="60"/>
+              </a:spcBef>
+            </a:pPr>
+            <a:r>
+              <a:rPr lang="ru-RU" sz="2100" spc="-75" dirty="0">
+                <a:solidFill>
+                  <a:srgbClr val="D5E4FA"/>
+                </a:solidFill>
+                <a:cs typeface="Arial"/>
+              </a:rPr>
+              <a:t>Мухин Захар (спикер)</a:t>
+            </a:r>
+          </a:p>
+          <a:p>
+            <a:pPr marL="12700" marR="5080">
+              <a:lnSpc>
+                <a:spcPct val="120500"/>
+              </a:lnSpc>
+              <a:spcBef>
+                <a:spcPts val="60"/>
+              </a:spcBef>
+            </a:pPr>
+            <a:r>
+              <a:rPr lang="ru-RU" sz="2100" spc="-75" dirty="0">
+                <a:solidFill>
+                  <a:srgbClr val="D5E4FA"/>
+                </a:solidFill>
+                <a:cs typeface="Arial"/>
+              </a:rPr>
+              <a:t>Гайдук Никита</a:t>
+            </a:r>
+          </a:p>
+        </p:txBody>
+      </p:sp>
+      <p:sp>
+        <p:nvSpPr>
+          <p:cNvPr id="8" name="object 8"/>
+          <p:cNvSpPr txBox="1">
+            <a:spLocks noGrp="1"/>
+          </p:cNvSpPr>
+          <p:nvPr>
+            <p:ph type="sldNum" sz="quarter" idx="7"/>
+          </p:nvPr>
+        </p:nvSpPr>
+        <p:spPr>
+          <a:xfrm>
+            <a:off x="-324197" y="0"/>
+            <a:ext cx="0" cy="170560"/>
+          </a:xfrm>
+          <a:prstGeom prst="rect">
+            <a:avLst/>
+          </a:prstGeom>
+        </p:spPr>
+        <p:txBody>
+          <a:bodyPr vert="horz" wrap="square" lIns="0" tIns="24130" rIns="0" bIns="0" rtlCol="0">
+            <a:spAutoFit/>
+          </a:bodyPr>
+          <a:lstStyle/>
+          <a:p>
+            <a:pPr marL="139700">
+              <a:lnSpc>
+                <a:spcPct val="100000"/>
+              </a:lnSpc>
+              <a:spcBef>
+                <a:spcPts val="190"/>
+              </a:spcBef>
+            </a:pPr>
+            <a:endParaRPr spc="50" dirty="0">
+              <a:solidFill>
+                <a:srgbClr val="B6CCF1"/>
+              </a:solidFill>
+            </a:endParaRPr>
+          </a:p>
+        </p:txBody>
+      </p:sp>
+      <p:sp>
+        <p:nvSpPr>
+          <p:cNvPr id="39" name="QR: подложка"/>
+          <p:cNvSpPr/>
+          <p:nvPr/>
+        </p:nvSpPr>
+        <p:spPr>
+          <a:xfrm>
+            <a:off x="9646920" y="1417320"/>
+            <a:ext cx="2011680" cy="2011680"/>
+          </a:xfrm>
+          <a:prstGeom prst="roundRect">
+            <a:avLst>
+              <a:gd name="adj" fmla="val 8000"/>
+            </a:avLst>
+          </a:prstGeom>
+          <a:solidFill>
+            <a:srgbClr val="FFFFFF"/>
+          </a:solidFill>
+          <a:ln>
+            <a:noFill/>
+          </a:ln>
+        </p:spPr>
+      </p:sp>
       <p:pic>
         <p:nvPicPr>
-          <p:cNvPr id="9" name="Инструменты" descr="/tmp/claude-0/-home-user-hackatonoma/e77f010d-b8c6-588a-a375-3aa4548717b1/scratchpad/deckgen/assets/toolbox.png">    </p:cNvPr>
+          <p:cNvPr id="40" name="QR-код прототипа" descr="QR-код: kvasiuum.github.io/hackatonoma"/>
           <p:cNvPicPr>
             <a:picLocks noChangeAspect="1"/>
           </p:cNvPicPr>
           <p:nvPr/>
         </p:nvPicPr>
         <p:blipFill>
-          <a:blip r:embed="rId4"/>
+          <a:blip r:embed="rIdQr"/>
           <a:stretch>
             <a:fillRect/>
           </a:stretch>
         </p:blipFill>
         <p:spPr>
           <a:xfrm>
-            <a:off x="10241280" y="4069080"/>
-            <a:ext cx="1463040" cy="1463040"/>
+            <a:off x="9802368" y="1572768"/>
+            <a:ext cx="1700784" cy="1700784"/>
           </a:xfrm>
           <a:prstGeom prst="rect">
             <a:avLst/>
           </a:prstGeom>
         </p:spPr>
       </p:pic>
-      <p:pic>
-        <p:nvPicPr>
-          <p:cNvPr id="10" name="Материалы" descr="/tmp/claude-0/-home-user-hackatonoma/e77f010d-b8c6-588a-a375-3aa4548717b1/scratchpad/deckgen/assets/bricks.png">    </p:cNvPr>
-          <p:cNvPicPr>
-            <a:picLocks noChangeAspect="1"/>
-          </p:cNvPicPr>
-          <p:nvPr/>
-        </p:nvPicPr>
-        <p:blipFill>
-          <a:blip r:embed="rId5"/>
-          <a:stretch>
-            <a:fillRect/>
-          </a:stretch>
-        </p:blipFill>
-        <p:spPr>
-          <a:xfrm>
-            <a:off x="10744200" y="685800"/>
-            <a:ext cx="1005840" cy="1005840"/>
-          </a:xfrm>
-          <a:prstGeom prst="rect">
-            <a:avLst/>
-          </a:prstGeom>
-        </p:spPr>
-      </p:pic>
+      <p:sp>
+        <p:nvSpPr>
+          <p:cNvPr id="41" name="QR: подпись"/>
+          <p:cNvSpPr txBox="1"/>
+          <p:nvPr/>
+        </p:nvSpPr>
+        <p:spPr>
+          <a:xfrm>
+            <a:off x="9464040" y="3538728"/>
+            <a:ext cx="2377440" cy="320040"/>
+          </a:xfrm>
+          <a:prstGeom prst="rect">
+            <a:avLst/>
+          </a:prstGeom>
+          <a:noFill/>
+        </p:spPr>
+        <p:txBody>
+          <a:bodyPr wrap="square" lIns="0" tIns="0" rIns="0" bIns="0" rtlCol="0" anchor="t">
+            <a:normAutofit/>
+          </a:bodyPr>
+          <a:lstStyle/>
+          <a:p>
+            <a:pPr algn="ctr" marL="0" indent="0">
+              <a:buNone/>
+            </a:pPr>
+            <a:r>
+              <a:rPr lang="ru-RU" sz="1400" b="1" dirty="0">
+                <a:solidFill>
+                  <a:srgbClr val="D5E4FA"/>
+                </a:solidFill>
+              </a:rPr>
+              <a:t>Откройте прототип</a:t>
+            </a:r>
+          </a:p>
+        </p:txBody>
+      </p:sp>
     </p:spTree>
   </p:cSld>
   <p:clrMapOvr>
@@ -1995,9 +1957,11 @@
       <p:sp>
         <p:nvSpPr>
           <p:cNvPr id="2" name="Text 0"/>
-          <p:cNvSpPr/>
+          <p:cNvSpPr>
+            <a:spLocks noGrp="1"/>
+          </p:cNvSpPr>
           <p:nvPr>
-            <p:ph idx="100" type="title" hasCustomPrompt="1"/>
+            <p:ph type="title" idx="100" hasCustomPrompt="1"/>
           </p:nvPr>
         </p:nvSpPr>
         <p:spPr>
@@ -2015,7 +1979,7 @@
           <a:bodyPr wrap="square" lIns="0" tIns="0" rIns="0" bIns="0" rtlCol="0" anchor="ctr"/>
           <a:lstStyle/>
           <a:p>
-            <a:pPr algn="l" indent="0" marL="0">
+            <a:pPr marL="0" indent="0" algn="l">
               <a:buNone/>
             </a:pPr>
             <a:r>
@@ -2047,7 +2011,7 @@
             </a:avLst>
           </a:prstGeom>
           <a:solidFill>
-            <a:srgbClr val="24164F"/>
+            <a:srgbClr val="1B1480"/>
           </a:solidFill>
           <a:ln w="12700">
             <a:solidFill>
@@ -2056,7 +2020,7 @@
             <a:prstDash val="solid"/>
           </a:ln>
           <a:effectLst>
-            <a:outerShdw sx="100000" sy="100000" kx="0" ky="0" algn="bl" rotWithShape="0" blurRad="101600" dist="25400" dir="5400000">
+            <a:outerShdw blurRad="101600" dist="25400" dir="5400000" algn="bl" rotWithShape="0">
               <a:srgbClr val="1A1433">
                 <a:alpha val="8000"/>
               </a:srgbClr>
@@ -2085,7 +2049,7 @@
           <a:bodyPr wrap="square" lIns="0" tIns="0" rIns="0" bIns="0" rtlCol="0" anchor="t"/>
           <a:lstStyle/>
           <a:p>
-            <a:pPr indent="0" marL="0">
+            <a:pPr marL="0" indent="0">
               <a:buNone/>
             </a:pPr>
             <a:r>
@@ -2121,7 +2085,7 @@
           <a:bodyPr wrap="square" lIns="0" tIns="0" rIns="0" bIns="0" rtlCol="0" anchor="t"/>
           <a:lstStyle/>
           <a:p>
-            <a:pPr indent="0" marL="0">
+            <a:pPr marL="0" indent="0">
               <a:buNone/>
             </a:pPr>
             <a:r>
@@ -2162,7 +2126,7 @@
             <a:prstDash val="solid"/>
           </a:ln>
           <a:effectLst>
-            <a:outerShdw sx="100000" sy="100000" kx="0" ky="0" algn="bl" rotWithShape="0" blurRad="101600" dist="25400" dir="5400000">
+            <a:outerShdw blurRad="101600" dist="25400" dir="5400000" algn="bl" rotWithShape="0">
               <a:srgbClr val="1A1433">
                 <a:alpha val="8000"/>
               </a:srgbClr>
@@ -2191,7 +2155,7 @@
           <a:bodyPr wrap="square" lIns="0" tIns="0" rIns="0" bIns="0" rtlCol="0" anchor="t"/>
           <a:lstStyle/>
           <a:p>
-            <a:pPr indent="0" marL="0">
+            <a:pPr marL="0" indent="0">
               <a:buNone/>
             </a:pPr>
             <a:r>
@@ -2227,7 +2191,7 @@
           <a:bodyPr wrap="square" lIns="0" tIns="0" rIns="0" bIns="0" rtlCol="0" anchor="t"/>
           <a:lstStyle/>
           <a:p>
-            <a:pPr indent="0" marL="0">
+            <a:pPr marL="0" indent="0">
               <a:buNone/>
             </a:pPr>
             <a:r>
@@ -2268,7 +2232,7 @@
             <a:prstDash val="solid"/>
           </a:ln>
           <a:effectLst>
-            <a:outerShdw sx="100000" sy="100000" kx="0" ky="0" algn="bl" rotWithShape="0" blurRad="101600" dist="25400" dir="5400000">
+            <a:outerShdw blurRad="101600" dist="25400" dir="5400000" algn="bl" rotWithShape="0">
               <a:srgbClr val="1A1433">
                 <a:alpha val="8000"/>
               </a:srgbClr>
@@ -2297,7 +2261,7 @@
           <a:bodyPr wrap="square" lIns="0" tIns="0" rIns="0" bIns="0" rtlCol="0" anchor="t"/>
           <a:lstStyle/>
           <a:p>
-            <a:pPr indent="0" marL="0">
+            <a:pPr marL="0" indent="0">
               <a:buNone/>
             </a:pPr>
             <a:r>
@@ -2333,7 +2297,7 @@
           <a:bodyPr wrap="square" lIns="0" tIns="0" rIns="0" bIns="0" rtlCol="0" anchor="t"/>
           <a:lstStyle/>
           <a:p>
-            <a:pPr indent="0" marL="0">
+            <a:pPr marL="0" indent="0">
               <a:buNone/>
             </a:pPr>
             <a:r>
@@ -2374,7 +2338,7 @@
             <a:prstDash val="solid"/>
           </a:ln>
           <a:effectLst>
-            <a:outerShdw sx="100000" sy="100000" kx="0" ky="0" algn="bl" rotWithShape="0" blurRad="101600" dist="25400" dir="5400000">
+            <a:outerShdw blurRad="101600" dist="25400" dir="5400000" algn="bl" rotWithShape="0">
               <a:srgbClr val="1A1433">
                 <a:alpha val="8000"/>
               </a:srgbClr>
@@ -2384,14 +2348,14 @@
       </p:sp>
       <p:pic>
         <p:nvPicPr>
-          <p:cNvPr id="13" name="Иконка 1" descr="/tmp/claude-0/-home-user-hackatonoma/e77f010d-b8c6-588a-a375-3aa4548717b1/scratchpad/deckgen/assets/home.png">    </p:cNvPr>
+          <p:cNvPr id="13" name="Иконка 1" descr="/tmp/claude-0/-home-user-hackatonoma/e77f010d-b8c6-588a-a375-3aa4548717b1/scratchpad/deckgen/assets/home.png"/>
           <p:cNvPicPr>
             <a:picLocks noChangeAspect="1"/>
           </p:cNvPicPr>
           <p:nvPr/>
         </p:nvPicPr>
         <p:blipFill>
-          <a:blip r:embed="rId1"/>
+          <a:blip r:embed="rId3"/>
           <a:stretch>
             <a:fillRect/>
           </a:stretch>
@@ -2427,7 +2391,7 @@
           <a:bodyPr wrap="square" lIns="0" tIns="0" rIns="0" bIns="0" rtlCol="0" anchor="t"/>
           <a:lstStyle/>
           <a:p>
-            <a:pPr indent="0" marL="0">
+            <a:pPr marL="0" indent="0">
               <a:buNone/>
             </a:pPr>
             <a:r>
@@ -2463,7 +2427,7 @@
           <a:bodyPr wrap="square" lIns="0" tIns="0" rIns="0" bIns="0" rtlCol="0" anchor="t"/>
           <a:lstStyle/>
           <a:p>
-            <a:pPr indent="0" marL="0">
+            <a:pPr marL="0" indent="0">
               <a:buNone/>
             </a:pPr>
             <a:r>
@@ -2580,7 +2544,7 @@
             <a:prstDash val="solid"/>
           </a:ln>
           <a:effectLst>
-            <a:outerShdw sx="100000" sy="100000" kx="0" ky="0" algn="bl" rotWithShape="0" blurRad="101600" dist="25400" dir="5400000">
+            <a:outerShdw blurRad="101600" dist="25400" dir="5400000" algn="bl" rotWithShape="0">
               <a:srgbClr val="1A1433">
                 <a:alpha val="8000"/>
               </a:srgbClr>
@@ -2590,14 +2554,14 @@
       </p:sp>
       <p:pic>
         <p:nvPicPr>
-          <p:cNvPr id="18" name="Иконка 2" descr="/tmp/claude-0/-home-user-hackatonoma/e77f010d-b8c6-588a-a375-3aa4548717b1/scratchpad/deckgen/assets/briefcase.png">    </p:cNvPr>
+          <p:cNvPr id="18" name="Иконка 2" descr="/tmp/claude-0/-home-user-hackatonoma/e77f010d-b8c6-588a-a375-3aa4548717b1/scratchpad/deckgen/assets/briefcase.png"/>
           <p:cNvPicPr>
             <a:picLocks noChangeAspect="1"/>
           </p:cNvPicPr>
           <p:nvPr/>
         </p:nvPicPr>
         <p:blipFill>
-          <a:blip r:embed="rId2"/>
+          <a:blip r:embed="rId4"/>
           <a:stretch>
             <a:fillRect/>
           </a:stretch>
@@ -2633,7 +2597,7 @@
           <a:bodyPr wrap="square" lIns="0" tIns="0" rIns="0" bIns="0" rtlCol="0" anchor="t"/>
           <a:lstStyle/>
           <a:p>
-            <a:pPr indent="0" marL="0">
+            <a:pPr marL="0" indent="0">
               <a:buNone/>
             </a:pPr>
             <a:r>
@@ -2669,7 +2633,7 @@
           <a:bodyPr wrap="square" lIns="0" tIns="0" rIns="0" bIns="0" rtlCol="0" anchor="t"/>
           <a:lstStyle/>
           <a:p>
-            <a:pPr indent="0" marL="0">
+            <a:pPr marL="0" indent="0">
               <a:buNone/>
             </a:pPr>
             <a:r>
@@ -2780,7 +2744,7 @@
           </a:prstGeom>
           <a:extLst>
             <a:ext uri="{C572A759-6A51-4108-AA02-DFA0A04FC94B}">
-              <ma14:wrappingTextBoxFlag xmlns:ma14="http://schemas.microsoft.com/office/mac/drawingml/2011/main" val="0"/>
+              <ma14:wrappingTextBoxFlag xmlns="" xmlns:ma14="http://schemas.microsoft.com/office/mac/drawingml/2011/main" val="0"/>
             </a:ext>
           </a:extLst>
         </p:spPr>
@@ -2798,10 +2762,130 @@
           <a:p>
             <a:pPr algn="r"/>
             <a:fld id="{F7021451-1387-4CA6-816F-3879F97B5CBC}" type="slidenum">
-              <a:rPr b="0" lang="en-US"/>
+              <a:rPr lang="en-US" b="0"/>
               <a:t>2</a:t>
             </a:fld>
             <a:endParaRPr lang="en-US"/>
+          </a:p>
+        </p:txBody>
+      </p:sp>
+      <p:sp>
+        <p:nvSpPr>
+          <p:cNvPr id="50" name="Одним словом 1"/>
+          <p:cNvSpPr/>
+          <p:nvPr/>
+        </p:nvSpPr>
+        <p:spPr>
+          <a:xfrm>
+            <a:off x="3566160" y="5641848"/>
+            <a:ext cx="2148840" cy="402336"/>
+          </a:xfrm>
+          <a:prstGeom prst="roundRect">
+            <a:avLst>
+              <a:gd name="adj" fmla="val 50000"/>
+            </a:avLst>
+          </a:prstGeom>
+          <a:solidFill>
+            <a:srgbClr val="FFF1E2"/>
+          </a:solidFill>
+          <a:ln>
+            <a:noFill/>
+          </a:ln>
+        </p:spPr>
+      </p:sp>
+      <p:sp>
+        <p:nvSpPr>
+          <p:cNvPr id="51" name="Одним словом 1: текст"/>
+          <p:cNvSpPr txBox="1"/>
+          <p:nvPr/>
+        </p:nvSpPr>
+        <p:spPr>
+          <a:xfrm>
+            <a:off x="3566160" y="5641848"/>
+            <a:ext cx="2148840" cy="402336"/>
+          </a:xfrm>
+          <a:prstGeom prst="rect">
+            <a:avLst/>
+          </a:prstGeom>
+          <a:noFill/>
+        </p:spPr>
+        <p:txBody>
+          <a:bodyPr wrap="square" lIns="0" tIns="0" rIns="0" bIns="0" rtlCol="0" anchor="ctr">
+            <a:normAutofit/>
+          </a:bodyPr>
+          <a:lstStyle/>
+          <a:p>
+            <a:pPr algn="ctr" marL="0" indent="0">
+              <a:buNone/>
+            </a:pPr>
+            <a:r>
+              <a:rPr lang="ru-RU" sz="1600" b="1" dirty="0">
+                <a:solidFill>
+                  <a:srgbClr val="C25E00"/>
+                </a:solidFill>
+              </a:rPr>
+              <a:t>Неопределённость</a:t>
+            </a:r>
+          </a:p>
+        </p:txBody>
+      </p:sp>
+      <p:sp>
+        <p:nvSpPr>
+          <p:cNvPr id="52" name="Одним словом 2"/>
+          <p:cNvSpPr/>
+          <p:nvPr/>
+        </p:nvSpPr>
+        <p:spPr>
+          <a:xfrm>
+            <a:off x="9189720" y="5641848"/>
+            <a:ext cx="2148840" cy="402336"/>
+          </a:xfrm>
+          <a:prstGeom prst="roundRect">
+            <a:avLst>
+              <a:gd name="adj" fmla="val 50000"/>
+            </a:avLst>
+          </a:prstGeom>
+          <a:solidFill>
+            <a:srgbClr val="FFF1E2"/>
+          </a:solidFill>
+          <a:ln>
+            <a:noFill/>
+          </a:ln>
+        </p:spPr>
+      </p:sp>
+      <p:sp>
+        <p:nvSpPr>
+          <p:cNvPr id="53" name="Одним словом 2: текст"/>
+          <p:cNvSpPr txBox="1"/>
+          <p:nvPr/>
+        </p:nvSpPr>
+        <p:spPr>
+          <a:xfrm>
+            <a:off x="9189720" y="5641848"/>
+            <a:ext cx="2148840" cy="402336"/>
+          </a:xfrm>
+          <a:prstGeom prst="rect">
+            <a:avLst/>
+          </a:prstGeom>
+          <a:noFill/>
+        </p:spPr>
+        <p:txBody>
+          <a:bodyPr wrap="square" lIns="0" tIns="0" rIns="0" bIns="0" rtlCol="0" anchor="ctr">
+            <a:normAutofit/>
+          </a:bodyPr>
+          <a:lstStyle/>
+          <a:p>
+            <a:pPr algn="ctr" marL="0" indent="0">
+              <a:buNone/>
+            </a:pPr>
+            <a:r>
+              <a:rPr lang="ru-RU" sz="1600" b="1" dirty="0">
+                <a:solidFill>
+                  <a:srgbClr val="C25E00"/>
+                </a:solidFill>
+              </a:rPr>
+              <a:t>Нестабильность</a:t>
+            </a:r>
           </a:p>
         </p:txBody>
       </p:sp>
@@ -2833,9 +2917,11 @@
       <p:sp>
         <p:nvSpPr>
           <p:cNvPr id="2" name="Text 0"/>
-          <p:cNvSpPr/>
+          <p:cNvSpPr>
+            <a:spLocks noGrp="1"/>
+          </p:cNvSpPr>
           <p:nvPr>
-            <p:ph idx="100" type="title" hasCustomPrompt="1"/>
+            <p:ph type="title" idx="100" hasCustomPrompt="1"/>
           </p:nvPr>
         </p:nvSpPr>
         <p:spPr>
@@ -2853,7 +2939,7 @@
           <a:bodyPr wrap="square" lIns="0" tIns="0" rIns="0" bIns="0" rtlCol="0" anchor="ctr"/>
           <a:lstStyle/>
           <a:p>
-            <a:pPr algn="l" indent="0" marL="0">
+            <a:pPr marL="0" indent="0" algn="l">
               <a:buNone/>
             </a:pPr>
             <a:r>
@@ -2894,7 +2980,7 @@
             <a:prstDash val="solid"/>
           </a:ln>
           <a:effectLst>
-            <a:outerShdw sx="100000" sy="100000" kx="0" ky="0" algn="bl" rotWithShape="0" blurRad="101600" dist="25400" dir="5400000">
+            <a:outerShdw blurRad="101600" dist="25400" dir="5400000" algn="bl" rotWithShape="0">
               <a:srgbClr val="1A1433">
                 <a:alpha val="8000"/>
               </a:srgbClr>
@@ -2904,14 +2990,14 @@
       </p:sp>
       <p:pic>
         <p:nvPicPr>
-          <p:cNvPr id="4" name="Частное лицо: иконка" descr="/tmp/claude-0/-home-user-hackatonoma/e77f010d-b8c6-588a-a375-3aa4548717b1/scratchpad/deckgen/assets/home.png">    </p:cNvPr>
+          <p:cNvPr id="4" name="Частное лицо: иконка" descr="/tmp/claude-0/-home-user-hackatonoma/e77f010d-b8c6-588a-a375-3aa4548717b1/scratchpad/deckgen/assets/home.png"/>
           <p:cNvPicPr>
             <a:picLocks noChangeAspect="1"/>
           </p:cNvPicPr>
           <p:nvPr/>
         </p:nvPicPr>
         <p:blipFill>
-          <a:blip r:embed="rId1"/>
+          <a:blip r:embed="rId3"/>
           <a:stretch>
             <a:fillRect/>
           </a:stretch>
@@ -2947,7 +3033,7 @@
           <a:bodyPr wrap="square" lIns="0" tIns="0" rIns="0" bIns="0" rtlCol="0" anchor="t"/>
           <a:lstStyle/>
           <a:p>
-            <a:pPr indent="0" marL="0">
+            <a:pPr marL="0" indent="0">
               <a:buNone/>
             </a:pPr>
             <a:r>
@@ -2983,7 +3069,7 @@
           <a:bodyPr wrap="square" lIns="0" tIns="0" rIns="0" bIns="0" rtlCol="0" anchor="t"/>
           <a:lstStyle/>
           <a:p>
-            <a:pPr indent="0" marL="0">
+            <a:pPr marL="0" indent="0">
               <a:buNone/>
             </a:pPr>
             <a:r>
@@ -3154,7 +3240,7 @@
             <a:prstDash val="solid"/>
           </a:ln>
           <a:effectLst>
-            <a:outerShdw sx="100000" sy="100000" kx="0" ky="0" algn="bl" rotWithShape="0" blurRad="101600" dist="25400" dir="5400000">
+            <a:outerShdw blurRad="101600" dist="25400" dir="5400000" algn="bl" rotWithShape="0">
               <a:srgbClr val="1A1433">
                 <a:alpha val="8000"/>
               </a:srgbClr>
@@ -3164,14 +3250,14 @@
       </p:sp>
       <p:pic>
         <p:nvPicPr>
-          <p:cNvPr id="9" name="Бизнес: иконка" descr="/tmp/claude-0/-home-user-hackatonoma/e77f010d-b8c6-588a-a375-3aa4548717b1/scratchpad/deckgen/assets/briefcase.png">    </p:cNvPr>
+          <p:cNvPr id="9" name="Бизнес: иконка" descr="/tmp/claude-0/-home-user-hackatonoma/e77f010d-b8c6-588a-a375-3aa4548717b1/scratchpad/deckgen/assets/briefcase.png"/>
           <p:cNvPicPr>
             <a:picLocks noChangeAspect="1"/>
           </p:cNvPicPr>
           <p:nvPr/>
         </p:nvPicPr>
         <p:blipFill>
-          <a:blip r:embed="rId2"/>
+          <a:blip r:embed="rId4"/>
           <a:stretch>
             <a:fillRect/>
           </a:stretch>
@@ -3207,7 +3293,7 @@
           <a:bodyPr wrap="square" lIns="0" tIns="0" rIns="0" bIns="0" rtlCol="0" anchor="t"/>
           <a:lstStyle/>
           <a:p>
-            <a:pPr indent="0" marL="0">
+            <a:pPr marL="0" indent="0">
               <a:buNone/>
             </a:pPr>
             <a:r>
@@ -3243,7 +3329,7 @@
           <a:bodyPr wrap="square" lIns="0" tIns="0" rIns="0" bIns="0" rtlCol="0" anchor="t"/>
           <a:lstStyle/>
           <a:p>
-            <a:pPr indent="0" marL="0">
+            <a:pPr marL="0" indent="0">
               <a:buNone/>
             </a:pPr>
             <a:r>
@@ -3405,7 +3491,7 @@
             </a:avLst>
           </a:prstGeom>
           <a:solidFill>
-            <a:srgbClr val="24164F"/>
+            <a:srgbClr val="1B1480"/>
           </a:solidFill>
           <a:ln w="12700">
             <a:solidFill>
@@ -3414,7 +3500,7 @@
             <a:prstDash val="solid"/>
           </a:ln>
           <a:effectLst>
-            <a:outerShdw sx="100000" sy="100000" kx="0" ky="0" algn="bl" rotWithShape="0" blurRad="101600" dist="25400" dir="5400000">
+            <a:outerShdw blurRad="101600" dist="25400" dir="5400000" algn="bl" rotWithShape="0">
               <a:srgbClr val="1A1433">
                 <a:alpha val="8000"/>
               </a:srgbClr>
@@ -3424,14 +3510,14 @@
       </p:sp>
       <p:pic>
         <p:nvPicPr>
-          <p:cNvPr id="14" name="ОМА: логотип" descr="/tmp/claude-0/-home-user-hackatonoma/e77f010d-b8c6-588a-a375-3aa4548717b1/scratchpad/deckgen/assets/lockup-white.png">    </p:cNvPr>
+          <p:cNvPr id="14" name="ОМА: логотип" descr="/tmp/claude-0/-home-user-hackatonoma/e77f010d-b8c6-588a-a375-3aa4548717b1/scratchpad/deckgen/assets/lockup-white.png"/>
           <p:cNvPicPr>
             <a:picLocks noChangeAspect="1"/>
           </p:cNvPicPr>
           <p:nvPr/>
         </p:nvPicPr>
         <p:blipFill>
-          <a:blip r:embed="rId3"/>
+          <a:blip r:embed="rId5"/>
           <a:stretch>
             <a:fillRect/>
           </a:stretch>
@@ -3467,7 +3553,7 @@
           <a:bodyPr wrap="square" lIns="0" tIns="0" rIns="0" bIns="0" rtlCol="0" anchor="t"/>
           <a:lstStyle/>
           <a:p>
-            <a:pPr indent="0" marL="0">
+            <a:pPr marL="0" indent="0">
               <a:buNone/>
             </a:pPr>
             <a:r>
@@ -3692,7 +3778,7 @@
           <a:bodyPr wrap="square" lIns="0" tIns="0" rIns="0" bIns="0" rtlCol="0" anchor="ctr"/>
           <a:lstStyle/>
           <a:p>
-            <a:pPr indent="0" marL="0">
+            <a:pPr marL="0" indent="0">
               <a:buNone/>
             </a:pPr>
             <a:r>
@@ -3703,9 +3789,6 @@
               </a:rPr>
               <a:t>Результат: </a:t>
             </a:r>
-            <a:pPr indent="0" marL="0">
-              <a:buNone/>
-            </a:pPr>
             <a:r>
               <a:rPr lang="en-US" sz="1500" dirty="0">
                 <a:solidFill>
@@ -3738,7 +3821,7 @@
           </a:prstGeom>
           <a:extLst>
             <a:ext uri="{C572A759-6A51-4108-AA02-DFA0A04FC94B}">
-              <ma14:wrappingTextBoxFlag xmlns:ma14="http://schemas.microsoft.com/office/mac/drawingml/2011/main" val="0"/>
+              <ma14:wrappingTextBoxFlag xmlns="" xmlns:ma14="http://schemas.microsoft.com/office/mac/drawingml/2011/main" val="0"/>
             </a:ext>
           </a:extLst>
         </p:spPr>
@@ -3756,7 +3839,7 @@
           <a:p>
             <a:pPr algn="r"/>
             <a:fld id="{F7021451-1387-4CA6-816F-3879F97B5CBC}" type="slidenum">
-              <a:rPr b="0" lang="en-US"/>
+              <a:rPr lang="en-US" b="0"/>
               <a:t>3</a:t>
             </a:fld>
             <a:endParaRPr lang="en-US"/>
@@ -3791,9 +3874,11 @@
       <p:sp>
         <p:nvSpPr>
           <p:cNvPr id="2" name="Text 0"/>
-          <p:cNvSpPr/>
+          <p:cNvSpPr>
+            <a:spLocks noGrp="1"/>
+          </p:cNvSpPr>
           <p:nvPr>
-            <p:ph idx="100" type="title" hasCustomPrompt="1"/>
+            <p:ph type="title" idx="100" hasCustomPrompt="1"/>
           </p:nvPr>
         </p:nvSpPr>
         <p:spPr>
@@ -3811,7 +3896,7 @@
           <a:bodyPr wrap="square" lIns="0" tIns="0" rIns="0" bIns="0" rtlCol="0" anchor="ctr"/>
           <a:lstStyle/>
           <a:p>
-            <a:pPr algn="l" indent="0" marL="0">
+            <a:pPr marL="0" indent="0" algn="l">
               <a:buNone/>
             </a:pPr>
             <a:r>
@@ -3826,2495 +3911,6 @@
           </a:p>
         </p:txBody>
       </p:sp>
-      <p:graphicFrame>
-        <p:nvGraphicFramePr>
-          <p:cNvPr id="5" name="Сравнение"/>
-          <p:cNvGraphicFramePr>
-            <a:graphicFrameLocks noGrp="1"/>
-          </p:cNvGraphicFramePr>
-          <p:nvPr>
-            <p:extLst>
-              <p:ext uri="{D42A27DB-BD31-4B8C-83A1-F6EECF244321}">
-                <p14:modId xmlns:p14="http://schemas.microsoft.com/office/powerpoint/2010/main" val="1579011935"/>
-              </p:ext>
-            </p:extLst>
-          </p:nvPr>
-        </p:nvGraphicFramePr>
-        <p:xfrm>
-          <a:off x="548640" y="1280160"/>
-          <a:ext cx="11094415" cy="914400"/>
-        </p:xfrm>
-        <a:graphic>
-          <a:graphicData uri="http://schemas.openxmlformats.org/drawingml/2006/table">
-            <a:tbl>
-              <a:tblPr/>
-              <a:tblGrid>
-                <a:gridCol w="3291840"/>
-                <a:gridCol w="1691640"/>
-                <a:gridCol w="1965960"/>
-                <a:gridCol w="2240280"/>
-                <a:gridCol w="1904695"/>
-              </a:tblGrid>
-              <a:tr h="429768">
-                <a:tc>
-                  <a:txBody>
-                    <a:bodyPr/>
-                    <a:lstStyle/>
-                    <a:p>
-                      <a:pPr indent="0" marL="0">
-                        <a:buNone/>
-                      </a:pPr>
-                      <a:r>
-                        <a:rPr lang="en-US" sz="1300" b="1" dirty="0">
-                          <a:solidFill>
-                            <a:srgbClr val="FFFFFF"/>
-                          </a:solidFill>
-                        </a:rPr>
-                        <a:t>Критерий</a:t>
-                      </a:r>
-                      <a:endParaRPr lang="en-US" sz="1300" dirty="0"/>
-                    </a:p>
-                  </a:txBody>
-                  <a:tcPr marL="109728" marR="109728" marT="36576" marB="36576" anchor="ctr">
-                    <a:lnL w="9525" cap="flat" cmpd="sng" algn="ctr">
-                      <a:solidFill>
-                        <a:srgbClr val="DCE1EC"/>
-                      </a:solidFill>
-                      <a:prstDash val="solid"/>
-                      <a:round/>
-                      <a:headEnd type="none" w="med" len="med"/>
-                      <a:tailEnd type="none" w="med" len="med"/>
-                    </a:lnL>
-                    <a:lnR w="9525" cap="flat" cmpd="sng" algn="ctr">
-                      <a:solidFill>
-                        <a:srgbClr val="DCE1EC"/>
-                      </a:solidFill>
-                      <a:prstDash val="solid"/>
-                      <a:round/>
-                      <a:headEnd type="none" w="med" len="med"/>
-                      <a:tailEnd type="none" w="med" len="med"/>
-                    </a:lnR>
-                    <a:lnT w="9525" cap="flat" cmpd="sng" algn="ctr">
-                      <a:solidFill>
-                        <a:srgbClr val="DCE1EC"/>
-                      </a:solidFill>
-                      <a:prstDash val="solid"/>
-                      <a:round/>
-                      <a:headEnd type="none" w="med" len="med"/>
-                      <a:tailEnd type="none" w="med" len="med"/>
-                    </a:lnT>
-                    <a:lnB w="9525" cap="flat" cmpd="sng" algn="ctr">
-                      <a:solidFill>
-                        <a:srgbClr val="DCE1EC"/>
-                      </a:solidFill>
-                      <a:prstDash val="solid"/>
-                      <a:round/>
-                      <a:headEnd type="none" w="med" len="med"/>
-                      <a:tailEnd type="none" w="med" len="med"/>
-                    </a:lnB>
-                    <a:solidFill>
-                      <a:srgbClr val="24164F"/>
-                    </a:solidFill>
-                  </a:tcPr>
-                </a:tc>
-                <a:tc>
-                  <a:txBody>
-                    <a:bodyPr/>
-                    <a:lstStyle/>
-                    <a:p>
-                      <a:pPr indent="0" marL="0">
-                        <a:buNone/>
-                      </a:pPr>
-                      <a:r>
-                        <a:rPr lang="en-US" sz="1300" b="1" dirty="0">
-                          <a:solidFill>
-                            <a:srgbClr val="FFFFFF"/>
-                          </a:solidFill>
-                        </a:rPr>
-                        <a:t>Объявления</a:t>
-                      </a:r>
-                      <a:endParaRPr lang="en-US" sz="1300" dirty="0"/>
-                    </a:p>
-                  </a:txBody>
-                  <a:tcPr marL="109728" marR="109728" marT="36576" marB="36576" anchor="ctr">
-                    <a:lnL w="9525" cap="flat" cmpd="sng" algn="ctr">
-                      <a:solidFill>
-                        <a:srgbClr val="DCE1EC"/>
-                      </a:solidFill>
-                      <a:prstDash val="solid"/>
-                      <a:round/>
-                      <a:headEnd type="none" w="med" len="med"/>
-                      <a:tailEnd type="none" w="med" len="med"/>
-                    </a:lnL>
-                    <a:lnR w="9525" cap="flat" cmpd="sng" algn="ctr">
-                      <a:solidFill>
-                        <a:srgbClr val="DCE1EC"/>
-                      </a:solidFill>
-                      <a:prstDash val="solid"/>
-                      <a:round/>
-                      <a:headEnd type="none" w="med" len="med"/>
-                      <a:tailEnd type="none" w="med" len="med"/>
-                    </a:lnR>
-                    <a:lnT w="9525" cap="flat" cmpd="sng" algn="ctr">
-                      <a:solidFill>
-                        <a:srgbClr val="DCE1EC"/>
-                      </a:solidFill>
-                      <a:prstDash val="solid"/>
-                      <a:round/>
-                      <a:headEnd type="none" w="med" len="med"/>
-                      <a:tailEnd type="none" w="med" len="med"/>
-                    </a:lnT>
-                    <a:lnB w="9525" cap="flat" cmpd="sng" algn="ctr">
-                      <a:solidFill>
-                        <a:srgbClr val="DCE1EC"/>
-                      </a:solidFill>
-                      <a:prstDash val="solid"/>
-                      <a:round/>
-                      <a:headEnd type="none" w="med" len="med"/>
-                      <a:tailEnd type="none" w="med" len="med"/>
-                    </a:lnB>
-                    <a:solidFill>
-                      <a:srgbClr val="24164F"/>
-                    </a:solidFill>
-                  </a:tcPr>
-                </a:tc>
-                <a:tc>
-                  <a:txBody>
-                    <a:bodyPr/>
-                    <a:lstStyle/>
-                    <a:p>
-                      <a:pPr indent="0" marL="0">
-                        <a:buNone/>
-                      </a:pPr>
-                      <a:r>
-                        <a:rPr lang="en-US" sz="1300" b="1" dirty="0">
-                          <a:solidFill>
-                            <a:srgbClr val="FFFFFF"/>
-                          </a:solidFill>
-                        </a:rPr>
-                        <a:t>Мастер «по знакомству»</a:t>
-                      </a:r>
-                      <a:endParaRPr lang="en-US" sz="1300" dirty="0"/>
-                    </a:p>
-                  </a:txBody>
-                  <a:tcPr marL="109728" marR="109728" marT="36576" marB="36576" anchor="ctr">
-                    <a:lnL w="9525" cap="flat" cmpd="sng" algn="ctr">
-                      <a:solidFill>
-                        <a:srgbClr val="DCE1EC"/>
-                      </a:solidFill>
-                      <a:prstDash val="solid"/>
-                      <a:round/>
-                      <a:headEnd type="none" w="med" len="med"/>
-                      <a:tailEnd type="none" w="med" len="med"/>
-                    </a:lnL>
-                    <a:lnR w="9525" cap="flat" cmpd="sng" algn="ctr">
-                      <a:solidFill>
-                        <a:srgbClr val="DCE1EC"/>
-                      </a:solidFill>
-                      <a:prstDash val="solid"/>
-                      <a:round/>
-                      <a:headEnd type="none" w="med" len="med"/>
-                      <a:tailEnd type="none" w="med" len="med"/>
-                    </a:lnR>
-                    <a:lnT w="9525" cap="flat" cmpd="sng" algn="ctr">
-                      <a:solidFill>
-                        <a:srgbClr val="DCE1EC"/>
-                      </a:solidFill>
-                      <a:prstDash val="solid"/>
-                      <a:round/>
-                      <a:headEnd type="none" w="med" len="med"/>
-                      <a:tailEnd type="none" w="med" len="med"/>
-                    </a:lnT>
-                    <a:lnB w="9525" cap="flat" cmpd="sng" algn="ctr">
-                      <a:solidFill>
-                        <a:srgbClr val="DCE1EC"/>
-                      </a:solidFill>
-                      <a:prstDash val="solid"/>
-                      <a:round/>
-                      <a:headEnd type="none" w="med" len="med"/>
-                      <a:tailEnd type="none" w="med" len="med"/>
-                    </a:lnB>
-                    <a:solidFill>
-                      <a:srgbClr val="24164F"/>
-                    </a:solidFill>
-                  </a:tcPr>
-                </a:tc>
-                <a:tc>
-                  <a:txBody>
-                    <a:bodyPr/>
-                    <a:lstStyle/>
-                    <a:p>
-                      <a:pPr indent="0" marL="0">
-                        <a:buNone/>
-                      </a:pPr>
-                      <a:r>
-                        <a:rPr lang="en-US" sz="1300" b="1" dirty="0">
-                          <a:solidFill>
-                            <a:srgbClr val="FFFFFF"/>
-                          </a:solidFill>
-                        </a:rPr>
-                        <a:t>Сервисы услуг (Onliner, Kufar)</a:t>
-                      </a:r>
-                      <a:endParaRPr lang="en-US" sz="1300" dirty="0"/>
-                    </a:p>
-                  </a:txBody>
-                  <a:tcPr marL="109728" marR="109728" marT="36576" marB="36576" anchor="ctr">
-                    <a:lnL w="9525" cap="flat" cmpd="sng" algn="ctr">
-                      <a:solidFill>
-                        <a:srgbClr val="DCE1EC"/>
-                      </a:solidFill>
-                      <a:prstDash val="solid"/>
-                      <a:round/>
-                      <a:headEnd type="none" w="med" len="med"/>
-                      <a:tailEnd type="none" w="med" len="med"/>
-                    </a:lnL>
-                    <a:lnR w="9525" cap="flat" cmpd="sng" algn="ctr">
-                      <a:solidFill>
-                        <a:srgbClr val="DCE1EC"/>
-                      </a:solidFill>
-                      <a:prstDash val="solid"/>
-                      <a:round/>
-                      <a:headEnd type="none" w="med" len="med"/>
-                      <a:tailEnd type="none" w="med" len="med"/>
-                    </a:lnR>
-                    <a:lnT w="9525" cap="flat" cmpd="sng" algn="ctr">
-                      <a:solidFill>
-                        <a:srgbClr val="DCE1EC"/>
-                      </a:solidFill>
-                      <a:prstDash val="solid"/>
-                      <a:round/>
-                      <a:headEnd type="none" w="med" len="med"/>
-                      <a:tailEnd type="none" w="med" len="med"/>
-                    </a:lnT>
-                    <a:lnB w="9525" cap="flat" cmpd="sng" algn="ctr">
-                      <a:solidFill>
-                        <a:srgbClr val="DCE1EC"/>
-                      </a:solidFill>
-                      <a:prstDash val="solid"/>
-                      <a:round/>
-                      <a:headEnd type="none" w="med" len="med"/>
-                      <a:tailEnd type="none" w="med" len="med"/>
-                    </a:lnB>
-                    <a:solidFill>
-                      <a:srgbClr val="24164F"/>
-                    </a:solidFill>
-                  </a:tcPr>
-                </a:tc>
-                <a:tc>
-                  <a:txBody>
-                    <a:bodyPr/>
-                    <a:lstStyle/>
-                    <a:p>
-                      <a:pPr indent="0" marL="0">
-                        <a:buNone/>
-                      </a:pPr>
-                      <a:r>
-                        <a:rPr lang="en-US" sz="1300" b="1" dirty="0">
-                          <a:solidFill>
-                            <a:srgbClr val="FFFFFF"/>
-                          </a:solidFill>
-                        </a:rPr>
-                        <a:t>ОМА для дома</a:t>
-                      </a:r>
-                      <a:endParaRPr lang="en-US" sz="1300" dirty="0"/>
-                    </a:p>
-                  </a:txBody>
-                  <a:tcPr marL="109728" marR="109728" marT="36576" marB="36576" anchor="ctr">
-                    <a:lnL w="9525" cap="flat" cmpd="sng" algn="ctr">
-                      <a:solidFill>
-                        <a:srgbClr val="DCE1EC"/>
-                      </a:solidFill>
-                      <a:prstDash val="solid"/>
-                      <a:round/>
-                      <a:headEnd type="none" w="med" len="med"/>
-                      <a:tailEnd type="none" w="med" len="med"/>
-                    </a:lnL>
-                    <a:lnR w="9525" cap="flat" cmpd="sng" algn="ctr">
-                      <a:solidFill>
-                        <a:srgbClr val="DCE1EC"/>
-                      </a:solidFill>
-                      <a:prstDash val="solid"/>
-                      <a:round/>
-                      <a:headEnd type="none" w="med" len="med"/>
-                      <a:tailEnd type="none" w="med" len="med"/>
-                    </a:lnR>
-                    <a:lnT w="9525" cap="flat" cmpd="sng" algn="ctr">
-                      <a:solidFill>
-                        <a:srgbClr val="DCE1EC"/>
-                      </a:solidFill>
-                      <a:prstDash val="solid"/>
-                      <a:round/>
-                      <a:headEnd type="none" w="med" len="med"/>
-                      <a:tailEnd type="none" w="med" len="med"/>
-                    </a:lnT>
-                    <a:lnB w="9525" cap="flat" cmpd="sng" algn="ctr">
-                      <a:solidFill>
-                        <a:srgbClr val="DCE1EC"/>
-                      </a:solidFill>
-                      <a:prstDash val="solid"/>
-                      <a:round/>
-                      <a:headEnd type="none" w="med" len="med"/>
-                      <a:tailEnd type="none" w="med" len="med"/>
-                    </a:lnB>
-                    <a:solidFill>
-                      <a:srgbClr val="FF8200"/>
-                    </a:solidFill>
-                  </a:tcPr>
-                </a:tc>
-              </a:tr>
-              <a:tr h="429768">
-                <a:tc>
-                  <a:txBody>
-                    <a:bodyPr/>
-                    <a:lstStyle/>
-                    <a:p>
-                      <a:pPr indent="0" marL="0">
-                        <a:buNone/>
-                      </a:pPr>
-                      <a:r>
-                        <a:rPr lang="en-US" sz="1300" b="1" dirty="0">
-                          <a:solidFill>
-                            <a:srgbClr val="1A1433"/>
-                          </a:solidFill>
-                        </a:rPr>
-                        <a:t>Смета материалов с пояснением</a:t>
-                      </a:r>
-                      <a:endParaRPr lang="en-US" sz="1300" dirty="0"/>
-                    </a:p>
-                  </a:txBody>
-                  <a:tcPr marL="109728" marR="109728" marT="36576" marB="36576" anchor="ctr">
-                    <a:lnL w="9525" cap="flat" cmpd="sng" algn="ctr">
-                      <a:solidFill>
-                        <a:srgbClr val="DCE1EC"/>
-                      </a:solidFill>
-                      <a:prstDash val="solid"/>
-                      <a:round/>
-                      <a:headEnd type="none" w="med" len="med"/>
-                      <a:tailEnd type="none" w="med" len="med"/>
-                    </a:lnL>
-                    <a:lnR w="9525" cap="flat" cmpd="sng" algn="ctr">
-                      <a:solidFill>
-                        <a:srgbClr val="DCE1EC"/>
-                      </a:solidFill>
-                      <a:prstDash val="solid"/>
-                      <a:round/>
-                      <a:headEnd type="none" w="med" len="med"/>
-                      <a:tailEnd type="none" w="med" len="med"/>
-                    </a:lnR>
-                    <a:lnT w="9525" cap="flat" cmpd="sng" algn="ctr">
-                      <a:solidFill>
-                        <a:srgbClr val="DCE1EC"/>
-                      </a:solidFill>
-                      <a:prstDash val="solid"/>
-                      <a:round/>
-                      <a:headEnd type="none" w="med" len="med"/>
-                      <a:tailEnd type="none" w="med" len="med"/>
-                    </a:lnT>
-                    <a:lnB w="9525" cap="flat" cmpd="sng" algn="ctr">
-                      <a:solidFill>
-                        <a:srgbClr val="DCE1EC"/>
-                      </a:solidFill>
-                      <a:prstDash val="solid"/>
-                      <a:round/>
-                      <a:headEnd type="none" w="med" len="med"/>
-                      <a:tailEnd type="none" w="med" len="med"/>
-                    </a:lnB>
-                    <a:solidFill>
-                      <a:srgbClr val="FFFFFF"/>
-                    </a:solidFill>
-                  </a:tcPr>
-                </a:tc>
-                <a:tc>
-                  <a:txBody>
-                    <a:bodyPr/>
-                    <a:lstStyle/>
-                    <a:p>
-                      <a:pPr indent="0" marL="0">
-                        <a:buNone/>
-                      </a:pPr>
-                      <a:r>
-                        <a:rPr lang="en-US" sz="1300" dirty="0">
-                          <a:solidFill>
-                            <a:srgbClr val="5C6478"/>
-                          </a:solidFill>
-                        </a:rPr>
-                        <a:t>Нет</a:t>
-                      </a:r>
-                      <a:endParaRPr lang="en-US" sz="1300" dirty="0"/>
-                    </a:p>
-                  </a:txBody>
-                  <a:tcPr marL="109728" marR="109728" marT="36576" marB="36576" anchor="ctr">
-                    <a:lnL w="9525" cap="flat" cmpd="sng" algn="ctr">
-                      <a:solidFill>
-                        <a:srgbClr val="DCE1EC"/>
-                      </a:solidFill>
-                      <a:prstDash val="solid"/>
-                      <a:round/>
-                      <a:headEnd type="none" w="med" len="med"/>
-                      <a:tailEnd type="none" w="med" len="med"/>
-                    </a:lnL>
-                    <a:lnR w="9525" cap="flat" cmpd="sng" algn="ctr">
-                      <a:solidFill>
-                        <a:srgbClr val="DCE1EC"/>
-                      </a:solidFill>
-                      <a:prstDash val="solid"/>
-                      <a:round/>
-                      <a:headEnd type="none" w="med" len="med"/>
-                      <a:tailEnd type="none" w="med" len="med"/>
-                    </a:lnR>
-                    <a:lnT w="9525" cap="flat" cmpd="sng" algn="ctr">
-                      <a:solidFill>
-                        <a:srgbClr val="DCE1EC"/>
-                      </a:solidFill>
-                      <a:prstDash val="solid"/>
-                      <a:round/>
-                      <a:headEnd type="none" w="med" len="med"/>
-                      <a:tailEnd type="none" w="med" len="med"/>
-                    </a:lnT>
-                    <a:lnB w="9525" cap="flat" cmpd="sng" algn="ctr">
-                      <a:solidFill>
-                        <a:srgbClr val="DCE1EC"/>
-                      </a:solidFill>
-                      <a:prstDash val="solid"/>
-                      <a:round/>
-                      <a:headEnd type="none" w="med" len="med"/>
-                      <a:tailEnd type="none" w="med" len="med"/>
-                    </a:lnB>
-                    <a:solidFill>
-                      <a:srgbClr val="FFFFFF"/>
-                    </a:solidFill>
-                  </a:tcPr>
-                </a:tc>
-                <a:tc>
-                  <a:txBody>
-                    <a:bodyPr/>
-                    <a:lstStyle/>
-                    <a:p>
-                      <a:pPr indent="0" marL="0">
-                        <a:buNone/>
-                      </a:pPr>
-                      <a:r>
-                        <a:rPr lang="en-US" sz="1300" dirty="0">
-                          <a:solidFill>
-                            <a:srgbClr val="1A1433"/>
-                          </a:solidFill>
-                        </a:rPr>
-                        <a:t>Частично</a:t>
-                      </a:r>
-                      <a:endParaRPr lang="en-US" sz="1300" dirty="0"/>
-                    </a:p>
-                  </a:txBody>
-                  <a:tcPr marL="109728" marR="109728" marT="36576" marB="36576" anchor="ctr">
-                    <a:lnL w="9525" cap="flat" cmpd="sng" algn="ctr">
-                      <a:solidFill>
-                        <a:srgbClr val="DCE1EC"/>
-                      </a:solidFill>
-                      <a:prstDash val="solid"/>
-                      <a:round/>
-                      <a:headEnd type="none" w="med" len="med"/>
-                      <a:tailEnd type="none" w="med" len="med"/>
-                    </a:lnL>
-                    <a:lnR w="9525" cap="flat" cmpd="sng" algn="ctr">
-                      <a:solidFill>
-                        <a:srgbClr val="DCE1EC"/>
-                      </a:solidFill>
-                      <a:prstDash val="solid"/>
-                      <a:round/>
-                      <a:headEnd type="none" w="med" len="med"/>
-                      <a:tailEnd type="none" w="med" len="med"/>
-                    </a:lnR>
-                    <a:lnT w="9525" cap="flat" cmpd="sng" algn="ctr">
-                      <a:solidFill>
-                        <a:srgbClr val="DCE1EC"/>
-                      </a:solidFill>
-                      <a:prstDash val="solid"/>
-                      <a:round/>
-                      <a:headEnd type="none" w="med" len="med"/>
-                      <a:tailEnd type="none" w="med" len="med"/>
-                    </a:lnT>
-                    <a:lnB w="9525" cap="flat" cmpd="sng" algn="ctr">
-                      <a:solidFill>
-                        <a:srgbClr val="DCE1EC"/>
-                      </a:solidFill>
-                      <a:prstDash val="solid"/>
-                      <a:round/>
-                      <a:headEnd type="none" w="med" len="med"/>
-                      <a:tailEnd type="none" w="med" len="med"/>
-                    </a:lnB>
-                    <a:solidFill>
-                      <a:srgbClr val="FFFFFF"/>
-                    </a:solidFill>
-                  </a:tcPr>
-                </a:tc>
-                <a:tc>
-                  <a:txBody>
-                    <a:bodyPr/>
-                    <a:lstStyle/>
-                    <a:p>
-                      <a:pPr indent="0" marL="0">
-                        <a:buNone/>
-                      </a:pPr>
-                      <a:r>
-                        <a:rPr lang="en-US" sz="1300" dirty="0">
-                          <a:solidFill>
-                            <a:srgbClr val="1A1433"/>
-                          </a:solidFill>
-                        </a:rPr>
-                        <a:t>Частично</a:t>
-                      </a:r>
-                      <a:endParaRPr lang="en-US" sz="1300" dirty="0"/>
-                    </a:p>
-                  </a:txBody>
-                  <a:tcPr marL="109728" marR="109728" marT="36576" marB="36576" anchor="ctr">
-                    <a:lnL w="9525" cap="flat" cmpd="sng" algn="ctr">
-                      <a:solidFill>
-                        <a:srgbClr val="DCE1EC"/>
-                      </a:solidFill>
-                      <a:prstDash val="solid"/>
-                      <a:round/>
-                      <a:headEnd type="none" w="med" len="med"/>
-                      <a:tailEnd type="none" w="med" len="med"/>
-                    </a:lnL>
-                    <a:lnR w="9525" cap="flat" cmpd="sng" algn="ctr">
-                      <a:solidFill>
-                        <a:srgbClr val="DCE1EC"/>
-                      </a:solidFill>
-                      <a:prstDash val="solid"/>
-                      <a:round/>
-                      <a:headEnd type="none" w="med" len="med"/>
-                      <a:tailEnd type="none" w="med" len="med"/>
-                    </a:lnR>
-                    <a:lnT w="9525" cap="flat" cmpd="sng" algn="ctr">
-                      <a:solidFill>
-                        <a:srgbClr val="DCE1EC"/>
-                      </a:solidFill>
-                      <a:prstDash val="solid"/>
-                      <a:round/>
-                      <a:headEnd type="none" w="med" len="med"/>
-                      <a:tailEnd type="none" w="med" len="med"/>
-                    </a:lnT>
-                    <a:lnB w="9525" cap="flat" cmpd="sng" algn="ctr">
-                      <a:solidFill>
-                        <a:srgbClr val="DCE1EC"/>
-                      </a:solidFill>
-                      <a:prstDash val="solid"/>
-                      <a:round/>
-                      <a:headEnd type="none" w="med" len="med"/>
-                      <a:tailEnd type="none" w="med" len="med"/>
-                    </a:lnB>
-                    <a:solidFill>
-                      <a:srgbClr val="FFFFFF"/>
-                    </a:solidFill>
-                  </a:tcPr>
-                </a:tc>
-                <a:tc>
-                  <a:txBody>
-                    <a:bodyPr/>
-                    <a:lstStyle/>
-                    <a:p>
-                      <a:pPr indent="0" marL="0">
-                        <a:buNone/>
-                      </a:pPr>
-                      <a:r>
-                        <a:rPr lang="en-US" sz="1300" b="1" dirty="0">
-                          <a:solidFill>
-                            <a:srgbClr val="24164F"/>
-                          </a:solidFill>
-                        </a:rPr>
-                        <a:t>Да</a:t>
-                      </a:r>
-                      <a:endParaRPr lang="en-US" sz="1300" dirty="0"/>
-                    </a:p>
-                  </a:txBody>
-                  <a:tcPr marL="109728" marR="109728" marT="36576" marB="36576" anchor="ctr">
-                    <a:lnL w="9525" cap="flat" cmpd="sng" algn="ctr">
-                      <a:solidFill>
-                        <a:srgbClr val="DCE1EC"/>
-                      </a:solidFill>
-                      <a:prstDash val="solid"/>
-                      <a:round/>
-                      <a:headEnd type="none" w="med" len="med"/>
-                      <a:tailEnd type="none" w="med" len="med"/>
-                    </a:lnL>
-                    <a:lnR w="9525" cap="flat" cmpd="sng" algn="ctr">
-                      <a:solidFill>
-                        <a:srgbClr val="DCE1EC"/>
-                      </a:solidFill>
-                      <a:prstDash val="solid"/>
-                      <a:round/>
-                      <a:headEnd type="none" w="med" len="med"/>
-                      <a:tailEnd type="none" w="med" len="med"/>
-                    </a:lnR>
-                    <a:lnT w="9525" cap="flat" cmpd="sng" algn="ctr">
-                      <a:solidFill>
-                        <a:srgbClr val="DCE1EC"/>
-                      </a:solidFill>
-                      <a:prstDash val="solid"/>
-                      <a:round/>
-                      <a:headEnd type="none" w="med" len="med"/>
-                      <a:tailEnd type="none" w="med" len="med"/>
-                    </a:lnT>
-                    <a:lnB w="9525" cap="flat" cmpd="sng" algn="ctr">
-                      <a:solidFill>
-                        <a:srgbClr val="DCE1EC"/>
-                      </a:solidFill>
-                      <a:prstDash val="solid"/>
-                      <a:round/>
-                      <a:headEnd type="none" w="med" len="med"/>
-                      <a:tailEnd type="none" w="med" len="med"/>
-                    </a:lnB>
-                    <a:solidFill>
-                      <a:srgbClr val="FFF1E2"/>
-                    </a:solidFill>
-                  </a:tcPr>
-                </a:tc>
-              </a:tr>
-              <a:tr h="429768">
-                <a:tc>
-                  <a:txBody>
-                    <a:bodyPr/>
-                    <a:lstStyle/>
-                    <a:p>
-                      <a:pPr indent="0" marL="0">
-                        <a:buNone/>
-                      </a:pPr>
-                      <a:r>
-                        <a:rPr lang="en-US" sz="1300" b="1" dirty="0">
-                          <a:solidFill>
-                            <a:srgbClr val="1A1433"/>
-                          </a:solidFill>
-                        </a:rPr>
-                        <a:t>Материалы одной партией к дате работ</a:t>
-                      </a:r>
-                      <a:endParaRPr lang="en-US" sz="1300" dirty="0"/>
-                    </a:p>
-                  </a:txBody>
-                  <a:tcPr marL="109728" marR="109728" marT="36576" marB="36576" anchor="ctr">
-                    <a:lnL w="9525" cap="flat" cmpd="sng" algn="ctr">
-                      <a:solidFill>
-                        <a:srgbClr val="DCE1EC"/>
-                      </a:solidFill>
-                      <a:prstDash val="solid"/>
-                      <a:round/>
-                      <a:headEnd type="none" w="med" len="med"/>
-                      <a:tailEnd type="none" w="med" len="med"/>
-                    </a:lnL>
-                    <a:lnR w="9525" cap="flat" cmpd="sng" algn="ctr">
-                      <a:solidFill>
-                        <a:srgbClr val="DCE1EC"/>
-                      </a:solidFill>
-                      <a:prstDash val="solid"/>
-                      <a:round/>
-                      <a:headEnd type="none" w="med" len="med"/>
-                      <a:tailEnd type="none" w="med" len="med"/>
-                    </a:lnR>
-                    <a:lnT w="9525" cap="flat" cmpd="sng" algn="ctr">
-                      <a:solidFill>
-                        <a:srgbClr val="DCE1EC"/>
-                      </a:solidFill>
-                      <a:prstDash val="solid"/>
-                      <a:round/>
-                      <a:headEnd type="none" w="med" len="med"/>
-                      <a:tailEnd type="none" w="med" len="med"/>
-                    </a:lnT>
-                    <a:lnB w="9525" cap="flat" cmpd="sng" algn="ctr">
-                      <a:solidFill>
-                        <a:srgbClr val="DCE1EC"/>
-                      </a:solidFill>
-                      <a:prstDash val="solid"/>
-                      <a:round/>
-                      <a:headEnd type="none" w="med" len="med"/>
-                      <a:tailEnd type="none" w="med" len="med"/>
-                    </a:lnB>
-                    <a:solidFill>
-                      <a:srgbClr val="FFFFFF"/>
-                    </a:solidFill>
-                  </a:tcPr>
-                </a:tc>
-                <a:tc>
-                  <a:txBody>
-                    <a:bodyPr/>
-                    <a:lstStyle/>
-                    <a:p>
-                      <a:pPr indent="0" marL="0">
-                        <a:buNone/>
-                      </a:pPr>
-                      <a:r>
-                        <a:rPr lang="en-US" sz="1300" dirty="0">
-                          <a:solidFill>
-                            <a:srgbClr val="5C6478"/>
-                          </a:solidFill>
-                        </a:rPr>
-                        <a:t>Нет</a:t>
-                      </a:r>
-                      <a:endParaRPr lang="en-US" sz="1300" dirty="0"/>
-                    </a:p>
-                  </a:txBody>
-                  <a:tcPr marL="109728" marR="109728" marT="36576" marB="36576" anchor="ctr">
-                    <a:lnL w="9525" cap="flat" cmpd="sng" algn="ctr">
-                      <a:solidFill>
-                        <a:srgbClr val="DCE1EC"/>
-                      </a:solidFill>
-                      <a:prstDash val="solid"/>
-                      <a:round/>
-                      <a:headEnd type="none" w="med" len="med"/>
-                      <a:tailEnd type="none" w="med" len="med"/>
-                    </a:lnL>
-                    <a:lnR w="9525" cap="flat" cmpd="sng" algn="ctr">
-                      <a:solidFill>
-                        <a:srgbClr val="DCE1EC"/>
-                      </a:solidFill>
-                      <a:prstDash val="solid"/>
-                      <a:round/>
-                      <a:headEnd type="none" w="med" len="med"/>
-                      <a:tailEnd type="none" w="med" len="med"/>
-                    </a:lnR>
-                    <a:lnT w="9525" cap="flat" cmpd="sng" algn="ctr">
-                      <a:solidFill>
-                        <a:srgbClr val="DCE1EC"/>
-                      </a:solidFill>
-                      <a:prstDash val="solid"/>
-                      <a:round/>
-                      <a:headEnd type="none" w="med" len="med"/>
-                      <a:tailEnd type="none" w="med" len="med"/>
-                    </a:lnT>
-                    <a:lnB w="9525" cap="flat" cmpd="sng" algn="ctr">
-                      <a:solidFill>
-                        <a:srgbClr val="DCE1EC"/>
-                      </a:solidFill>
-                      <a:prstDash val="solid"/>
-                      <a:round/>
-                      <a:headEnd type="none" w="med" len="med"/>
-                      <a:tailEnd type="none" w="med" len="med"/>
-                    </a:lnB>
-                    <a:solidFill>
-                      <a:srgbClr val="FFFFFF"/>
-                    </a:solidFill>
-                  </a:tcPr>
-                </a:tc>
-                <a:tc>
-                  <a:txBody>
-                    <a:bodyPr/>
-                    <a:lstStyle/>
-                    <a:p>
-                      <a:pPr indent="0" marL="0">
-                        <a:buNone/>
-                      </a:pPr>
-                      <a:r>
-                        <a:rPr lang="en-US" sz="1300" dirty="0">
-                          <a:solidFill>
-                            <a:srgbClr val="5C6478"/>
-                          </a:solidFill>
-                        </a:rPr>
-                        <a:t>Нет</a:t>
-                      </a:r>
-                      <a:endParaRPr lang="en-US" sz="1300" dirty="0"/>
-                    </a:p>
-                  </a:txBody>
-                  <a:tcPr marL="109728" marR="109728" marT="36576" marB="36576" anchor="ctr">
-                    <a:lnL w="9525" cap="flat" cmpd="sng" algn="ctr">
-                      <a:solidFill>
-                        <a:srgbClr val="DCE1EC"/>
-                      </a:solidFill>
-                      <a:prstDash val="solid"/>
-                      <a:round/>
-                      <a:headEnd type="none" w="med" len="med"/>
-                      <a:tailEnd type="none" w="med" len="med"/>
-                    </a:lnL>
-                    <a:lnR w="9525" cap="flat" cmpd="sng" algn="ctr">
-                      <a:solidFill>
-                        <a:srgbClr val="DCE1EC"/>
-                      </a:solidFill>
-                      <a:prstDash val="solid"/>
-                      <a:round/>
-                      <a:headEnd type="none" w="med" len="med"/>
-                      <a:tailEnd type="none" w="med" len="med"/>
-                    </a:lnR>
-                    <a:lnT w="9525" cap="flat" cmpd="sng" algn="ctr">
-                      <a:solidFill>
-                        <a:srgbClr val="DCE1EC"/>
-                      </a:solidFill>
-                      <a:prstDash val="solid"/>
-                      <a:round/>
-                      <a:headEnd type="none" w="med" len="med"/>
-                      <a:tailEnd type="none" w="med" len="med"/>
-                    </a:lnT>
-                    <a:lnB w="9525" cap="flat" cmpd="sng" algn="ctr">
-                      <a:solidFill>
-                        <a:srgbClr val="DCE1EC"/>
-                      </a:solidFill>
-                      <a:prstDash val="solid"/>
-                      <a:round/>
-                      <a:headEnd type="none" w="med" len="med"/>
-                      <a:tailEnd type="none" w="med" len="med"/>
-                    </a:lnB>
-                    <a:solidFill>
-                      <a:srgbClr val="FFFFFF"/>
-                    </a:solidFill>
-                  </a:tcPr>
-                </a:tc>
-                <a:tc>
-                  <a:txBody>
-                    <a:bodyPr/>
-                    <a:lstStyle/>
-                    <a:p>
-                      <a:pPr indent="0" marL="0">
-                        <a:buNone/>
-                      </a:pPr>
-                      <a:r>
-                        <a:rPr lang="en-US" sz="1300" dirty="0">
-                          <a:solidFill>
-                            <a:srgbClr val="5C6478"/>
-                          </a:solidFill>
-                        </a:rPr>
-                        <a:t>Нет</a:t>
-                      </a:r>
-                      <a:endParaRPr lang="en-US" sz="1300" dirty="0"/>
-                    </a:p>
-                  </a:txBody>
-                  <a:tcPr marL="109728" marR="109728" marT="36576" marB="36576" anchor="ctr">
-                    <a:lnL w="9525" cap="flat" cmpd="sng" algn="ctr">
-                      <a:solidFill>
-                        <a:srgbClr val="DCE1EC"/>
-                      </a:solidFill>
-                      <a:prstDash val="solid"/>
-                      <a:round/>
-                      <a:headEnd type="none" w="med" len="med"/>
-                      <a:tailEnd type="none" w="med" len="med"/>
-                    </a:lnL>
-                    <a:lnR w="9525" cap="flat" cmpd="sng" algn="ctr">
-                      <a:solidFill>
-                        <a:srgbClr val="DCE1EC"/>
-                      </a:solidFill>
-                      <a:prstDash val="solid"/>
-                      <a:round/>
-                      <a:headEnd type="none" w="med" len="med"/>
-                      <a:tailEnd type="none" w="med" len="med"/>
-                    </a:lnR>
-                    <a:lnT w="9525" cap="flat" cmpd="sng" algn="ctr">
-                      <a:solidFill>
-                        <a:srgbClr val="DCE1EC"/>
-                      </a:solidFill>
-                      <a:prstDash val="solid"/>
-                      <a:round/>
-                      <a:headEnd type="none" w="med" len="med"/>
-                      <a:tailEnd type="none" w="med" len="med"/>
-                    </a:lnT>
-                    <a:lnB w="9525" cap="flat" cmpd="sng" algn="ctr">
-                      <a:solidFill>
-                        <a:srgbClr val="DCE1EC"/>
-                      </a:solidFill>
-                      <a:prstDash val="solid"/>
-                      <a:round/>
-                      <a:headEnd type="none" w="med" len="med"/>
-                      <a:tailEnd type="none" w="med" len="med"/>
-                    </a:lnB>
-                    <a:solidFill>
-                      <a:srgbClr val="FFFFFF"/>
-                    </a:solidFill>
-                  </a:tcPr>
-                </a:tc>
-                <a:tc>
-                  <a:txBody>
-                    <a:bodyPr/>
-                    <a:lstStyle/>
-                    <a:p>
-                      <a:pPr indent="0" marL="0">
-                        <a:buNone/>
-                      </a:pPr>
-                      <a:r>
-                        <a:rPr lang="en-US" sz="1300" b="1" dirty="0">
-                          <a:solidFill>
-                            <a:srgbClr val="24164F"/>
-                          </a:solidFill>
-                        </a:rPr>
-                        <a:t>Да</a:t>
-                      </a:r>
-                      <a:endParaRPr lang="en-US" sz="1300" dirty="0"/>
-                    </a:p>
-                  </a:txBody>
-                  <a:tcPr marL="109728" marR="109728" marT="36576" marB="36576" anchor="ctr">
-                    <a:lnL w="9525" cap="flat" cmpd="sng" algn="ctr">
-                      <a:solidFill>
-                        <a:srgbClr val="DCE1EC"/>
-                      </a:solidFill>
-                      <a:prstDash val="solid"/>
-                      <a:round/>
-                      <a:headEnd type="none" w="med" len="med"/>
-                      <a:tailEnd type="none" w="med" len="med"/>
-                    </a:lnL>
-                    <a:lnR w="9525" cap="flat" cmpd="sng" algn="ctr">
-                      <a:solidFill>
-                        <a:srgbClr val="DCE1EC"/>
-                      </a:solidFill>
-                      <a:prstDash val="solid"/>
-                      <a:round/>
-                      <a:headEnd type="none" w="med" len="med"/>
-                      <a:tailEnd type="none" w="med" len="med"/>
-                    </a:lnR>
-                    <a:lnT w="9525" cap="flat" cmpd="sng" algn="ctr">
-                      <a:solidFill>
-                        <a:srgbClr val="DCE1EC"/>
-                      </a:solidFill>
-                      <a:prstDash val="solid"/>
-                      <a:round/>
-                      <a:headEnd type="none" w="med" len="med"/>
-                      <a:tailEnd type="none" w="med" len="med"/>
-                    </a:lnT>
-                    <a:lnB w="9525" cap="flat" cmpd="sng" algn="ctr">
-                      <a:solidFill>
-                        <a:srgbClr val="DCE1EC"/>
-                      </a:solidFill>
-                      <a:prstDash val="solid"/>
-                      <a:round/>
-                      <a:headEnd type="none" w="med" len="med"/>
-                      <a:tailEnd type="none" w="med" len="med"/>
-                    </a:lnB>
-                    <a:solidFill>
-                      <a:srgbClr val="FFF1E2"/>
-                    </a:solidFill>
-                  </a:tcPr>
-                </a:tc>
-              </a:tr>
-              <a:tr h="429768">
-                <a:tc>
-                  <a:txBody>
-                    <a:bodyPr/>
-                    <a:lstStyle/>
-                    <a:p>
-                      <a:pPr indent="0" marL="0">
-                        <a:buNone/>
-                      </a:pPr>
-                      <a:r>
-                        <a:rPr lang="en-US" sz="1300" b="1" dirty="0">
-                          <a:solidFill>
-                            <a:srgbClr val="1A1433"/>
-                          </a:solidFill>
-                        </a:rPr>
-                        <a:t>Фиксированная цена работ</a:t>
-                      </a:r>
-                      <a:endParaRPr lang="en-US" sz="1300" dirty="0"/>
-                    </a:p>
-                  </a:txBody>
-                  <a:tcPr marL="109728" marR="109728" marT="36576" marB="36576" anchor="ctr">
-                    <a:lnL w="9525" cap="flat" cmpd="sng" algn="ctr">
-                      <a:solidFill>
-                        <a:srgbClr val="DCE1EC"/>
-                      </a:solidFill>
-                      <a:prstDash val="solid"/>
-                      <a:round/>
-                      <a:headEnd type="none" w="med" len="med"/>
-                      <a:tailEnd type="none" w="med" len="med"/>
-                    </a:lnL>
-                    <a:lnR w="9525" cap="flat" cmpd="sng" algn="ctr">
-                      <a:solidFill>
-                        <a:srgbClr val="DCE1EC"/>
-                      </a:solidFill>
-                      <a:prstDash val="solid"/>
-                      <a:round/>
-                      <a:headEnd type="none" w="med" len="med"/>
-                      <a:tailEnd type="none" w="med" len="med"/>
-                    </a:lnR>
-                    <a:lnT w="9525" cap="flat" cmpd="sng" algn="ctr">
-                      <a:solidFill>
-                        <a:srgbClr val="DCE1EC"/>
-                      </a:solidFill>
-                      <a:prstDash val="solid"/>
-                      <a:round/>
-                      <a:headEnd type="none" w="med" len="med"/>
-                      <a:tailEnd type="none" w="med" len="med"/>
-                    </a:lnT>
-                    <a:lnB w="9525" cap="flat" cmpd="sng" algn="ctr">
-                      <a:solidFill>
-                        <a:srgbClr val="DCE1EC"/>
-                      </a:solidFill>
-                      <a:prstDash val="solid"/>
-                      <a:round/>
-                      <a:headEnd type="none" w="med" len="med"/>
-                      <a:tailEnd type="none" w="med" len="med"/>
-                    </a:lnB>
-                    <a:solidFill>
-                      <a:srgbClr val="FFFFFF"/>
-                    </a:solidFill>
-                  </a:tcPr>
-                </a:tc>
-                <a:tc>
-                  <a:txBody>
-                    <a:bodyPr/>
-                    <a:lstStyle/>
-                    <a:p>
-                      <a:pPr indent="0" marL="0">
-                        <a:buNone/>
-                      </a:pPr>
-                      <a:r>
-                        <a:rPr lang="en-US" sz="1300" dirty="0">
-                          <a:solidFill>
-                            <a:srgbClr val="5C6478"/>
-                          </a:solidFill>
-                        </a:rPr>
-                        <a:t>Нет</a:t>
-                      </a:r>
-                      <a:endParaRPr lang="en-US" sz="1300" dirty="0"/>
-                    </a:p>
-                  </a:txBody>
-                  <a:tcPr marL="109728" marR="109728" marT="36576" marB="36576" anchor="ctr">
-                    <a:lnL w="9525" cap="flat" cmpd="sng" algn="ctr">
-                      <a:solidFill>
-                        <a:srgbClr val="DCE1EC"/>
-                      </a:solidFill>
-                      <a:prstDash val="solid"/>
-                      <a:round/>
-                      <a:headEnd type="none" w="med" len="med"/>
-                      <a:tailEnd type="none" w="med" len="med"/>
-                    </a:lnL>
-                    <a:lnR w="9525" cap="flat" cmpd="sng" algn="ctr">
-                      <a:solidFill>
-                        <a:srgbClr val="DCE1EC"/>
-                      </a:solidFill>
-                      <a:prstDash val="solid"/>
-                      <a:round/>
-                      <a:headEnd type="none" w="med" len="med"/>
-                      <a:tailEnd type="none" w="med" len="med"/>
-                    </a:lnR>
-                    <a:lnT w="9525" cap="flat" cmpd="sng" algn="ctr">
-                      <a:solidFill>
-                        <a:srgbClr val="DCE1EC"/>
-                      </a:solidFill>
-                      <a:prstDash val="solid"/>
-                      <a:round/>
-                      <a:headEnd type="none" w="med" len="med"/>
-                      <a:tailEnd type="none" w="med" len="med"/>
-                    </a:lnT>
-                    <a:lnB w="9525" cap="flat" cmpd="sng" algn="ctr">
-                      <a:solidFill>
-                        <a:srgbClr val="DCE1EC"/>
-                      </a:solidFill>
-                      <a:prstDash val="solid"/>
-                      <a:round/>
-                      <a:headEnd type="none" w="med" len="med"/>
-                      <a:tailEnd type="none" w="med" len="med"/>
-                    </a:lnB>
-                    <a:solidFill>
-                      <a:srgbClr val="FFFFFF"/>
-                    </a:solidFill>
-                  </a:tcPr>
-                </a:tc>
-                <a:tc>
-                  <a:txBody>
-                    <a:bodyPr/>
-                    <a:lstStyle/>
-                    <a:p>
-                      <a:pPr indent="0" marL="0">
-                        <a:buNone/>
-                      </a:pPr>
-                      <a:r>
-                        <a:rPr lang="en-US" sz="1300" dirty="0">
-                          <a:solidFill>
-                            <a:srgbClr val="5C6478"/>
-                          </a:solidFill>
-                        </a:rPr>
-                        <a:t>Нет</a:t>
-                      </a:r>
-                      <a:endParaRPr lang="en-US" sz="1300" dirty="0"/>
-                    </a:p>
-                  </a:txBody>
-                  <a:tcPr marL="109728" marR="109728" marT="36576" marB="36576" anchor="ctr">
-                    <a:lnL w="9525" cap="flat" cmpd="sng" algn="ctr">
-                      <a:solidFill>
-                        <a:srgbClr val="DCE1EC"/>
-                      </a:solidFill>
-                      <a:prstDash val="solid"/>
-                      <a:round/>
-                      <a:headEnd type="none" w="med" len="med"/>
-                      <a:tailEnd type="none" w="med" len="med"/>
-                    </a:lnL>
-                    <a:lnR w="9525" cap="flat" cmpd="sng" algn="ctr">
-                      <a:solidFill>
-                        <a:srgbClr val="DCE1EC"/>
-                      </a:solidFill>
-                      <a:prstDash val="solid"/>
-                      <a:round/>
-                      <a:headEnd type="none" w="med" len="med"/>
-                      <a:tailEnd type="none" w="med" len="med"/>
-                    </a:lnR>
-                    <a:lnT w="9525" cap="flat" cmpd="sng" algn="ctr">
-                      <a:solidFill>
-                        <a:srgbClr val="DCE1EC"/>
-                      </a:solidFill>
-                      <a:prstDash val="solid"/>
-                      <a:round/>
-                      <a:headEnd type="none" w="med" len="med"/>
-                      <a:tailEnd type="none" w="med" len="med"/>
-                    </a:lnT>
-                    <a:lnB w="9525" cap="flat" cmpd="sng" algn="ctr">
-                      <a:solidFill>
-                        <a:srgbClr val="DCE1EC"/>
-                      </a:solidFill>
-                      <a:prstDash val="solid"/>
-                      <a:round/>
-                      <a:headEnd type="none" w="med" len="med"/>
-                      <a:tailEnd type="none" w="med" len="med"/>
-                    </a:lnB>
-                    <a:solidFill>
-                      <a:srgbClr val="FFFFFF"/>
-                    </a:solidFill>
-                  </a:tcPr>
-                </a:tc>
-                <a:tc>
-                  <a:txBody>
-                    <a:bodyPr/>
-                    <a:lstStyle/>
-                    <a:p>
-                      <a:pPr indent="0" marL="0">
-                        <a:buNone/>
-                      </a:pPr>
-                      <a:r>
-                        <a:rPr lang="en-US" sz="1300" dirty="0">
-                          <a:solidFill>
-                            <a:srgbClr val="1A1433"/>
-                          </a:solidFill>
-                        </a:rPr>
-                        <a:t>По договорённости</a:t>
-                      </a:r>
-                      <a:endParaRPr lang="en-US" sz="1300" dirty="0"/>
-                    </a:p>
-                  </a:txBody>
-                  <a:tcPr marL="109728" marR="109728" marT="36576" marB="36576" anchor="ctr">
-                    <a:lnL w="9525" cap="flat" cmpd="sng" algn="ctr">
-                      <a:solidFill>
-                        <a:srgbClr val="DCE1EC"/>
-                      </a:solidFill>
-                      <a:prstDash val="solid"/>
-                      <a:round/>
-                      <a:headEnd type="none" w="med" len="med"/>
-                      <a:tailEnd type="none" w="med" len="med"/>
-                    </a:lnL>
-                    <a:lnR w="9525" cap="flat" cmpd="sng" algn="ctr">
-                      <a:solidFill>
-                        <a:srgbClr val="DCE1EC"/>
-                      </a:solidFill>
-                      <a:prstDash val="solid"/>
-                      <a:round/>
-                      <a:headEnd type="none" w="med" len="med"/>
-                      <a:tailEnd type="none" w="med" len="med"/>
-                    </a:lnR>
-                    <a:lnT w="9525" cap="flat" cmpd="sng" algn="ctr">
-                      <a:solidFill>
-                        <a:srgbClr val="DCE1EC"/>
-                      </a:solidFill>
-                      <a:prstDash val="solid"/>
-                      <a:round/>
-                      <a:headEnd type="none" w="med" len="med"/>
-                      <a:tailEnd type="none" w="med" len="med"/>
-                    </a:lnT>
-                    <a:lnB w="9525" cap="flat" cmpd="sng" algn="ctr">
-                      <a:solidFill>
-                        <a:srgbClr val="DCE1EC"/>
-                      </a:solidFill>
-                      <a:prstDash val="solid"/>
-                      <a:round/>
-                      <a:headEnd type="none" w="med" len="med"/>
-                      <a:tailEnd type="none" w="med" len="med"/>
-                    </a:lnB>
-                    <a:solidFill>
-                      <a:srgbClr val="FFFFFF"/>
-                    </a:solidFill>
-                  </a:tcPr>
-                </a:tc>
-                <a:tc>
-                  <a:txBody>
-                    <a:bodyPr/>
-                    <a:lstStyle/>
-                    <a:p>
-                      <a:pPr indent="0" marL="0">
-                        <a:buNone/>
-                      </a:pPr>
-                      <a:r>
-                        <a:rPr lang="en-US" sz="1300" b="1" dirty="0">
-                          <a:solidFill>
-                            <a:srgbClr val="24164F"/>
-                          </a:solidFill>
-                        </a:rPr>
-                        <a:t>Да</a:t>
-                      </a:r>
-                      <a:endParaRPr lang="en-US" sz="1300" dirty="0"/>
-                    </a:p>
-                  </a:txBody>
-                  <a:tcPr marL="109728" marR="109728" marT="36576" marB="36576" anchor="ctr">
-                    <a:lnL w="9525" cap="flat" cmpd="sng" algn="ctr">
-                      <a:solidFill>
-                        <a:srgbClr val="DCE1EC"/>
-                      </a:solidFill>
-                      <a:prstDash val="solid"/>
-                      <a:round/>
-                      <a:headEnd type="none" w="med" len="med"/>
-                      <a:tailEnd type="none" w="med" len="med"/>
-                    </a:lnL>
-                    <a:lnR w="9525" cap="flat" cmpd="sng" algn="ctr">
-                      <a:solidFill>
-                        <a:srgbClr val="DCE1EC"/>
-                      </a:solidFill>
-                      <a:prstDash val="solid"/>
-                      <a:round/>
-                      <a:headEnd type="none" w="med" len="med"/>
-                      <a:tailEnd type="none" w="med" len="med"/>
-                    </a:lnR>
-                    <a:lnT w="9525" cap="flat" cmpd="sng" algn="ctr">
-                      <a:solidFill>
-                        <a:srgbClr val="DCE1EC"/>
-                      </a:solidFill>
-                      <a:prstDash val="solid"/>
-                      <a:round/>
-                      <a:headEnd type="none" w="med" len="med"/>
-                      <a:tailEnd type="none" w="med" len="med"/>
-                    </a:lnT>
-                    <a:lnB w="9525" cap="flat" cmpd="sng" algn="ctr">
-                      <a:solidFill>
-                        <a:srgbClr val="DCE1EC"/>
-                      </a:solidFill>
-                      <a:prstDash val="solid"/>
-                      <a:round/>
-                      <a:headEnd type="none" w="med" len="med"/>
-                      <a:tailEnd type="none" w="med" len="med"/>
-                    </a:lnB>
-                    <a:solidFill>
-                      <a:srgbClr val="FFF1E2"/>
-                    </a:solidFill>
-                  </a:tcPr>
-                </a:tc>
-              </a:tr>
-              <a:tr h="429768">
-                <a:tc>
-                  <a:txBody>
-                    <a:bodyPr/>
-                    <a:lstStyle/>
-                    <a:p>
-                      <a:pPr indent="0" marL="0">
-                        <a:buNone/>
-                      </a:pPr>
-                      <a:r>
-                        <a:rPr lang="en-US" sz="1300" b="1" dirty="0">
-                          <a:solidFill>
-                            <a:srgbClr val="1A1433"/>
-                          </a:solidFill>
-                        </a:rPr>
-                        <a:t>Оплата после приёмки этапа</a:t>
-                      </a:r>
-                      <a:endParaRPr lang="en-US" sz="1300" dirty="0"/>
-                    </a:p>
-                  </a:txBody>
-                  <a:tcPr marL="109728" marR="109728" marT="36576" marB="36576" anchor="ctr">
-                    <a:lnL w="9525" cap="flat" cmpd="sng" algn="ctr">
-                      <a:solidFill>
-                        <a:srgbClr val="DCE1EC"/>
-                      </a:solidFill>
-                      <a:prstDash val="solid"/>
-                      <a:round/>
-                      <a:headEnd type="none" w="med" len="med"/>
-                      <a:tailEnd type="none" w="med" len="med"/>
-                    </a:lnL>
-                    <a:lnR w="9525" cap="flat" cmpd="sng" algn="ctr">
-                      <a:solidFill>
-                        <a:srgbClr val="DCE1EC"/>
-                      </a:solidFill>
-                      <a:prstDash val="solid"/>
-                      <a:round/>
-                      <a:headEnd type="none" w="med" len="med"/>
-                      <a:tailEnd type="none" w="med" len="med"/>
-                    </a:lnR>
-                    <a:lnT w="9525" cap="flat" cmpd="sng" algn="ctr">
-                      <a:solidFill>
-                        <a:srgbClr val="DCE1EC"/>
-                      </a:solidFill>
-                      <a:prstDash val="solid"/>
-                      <a:round/>
-                      <a:headEnd type="none" w="med" len="med"/>
-                      <a:tailEnd type="none" w="med" len="med"/>
-                    </a:lnT>
-                    <a:lnB w="9525" cap="flat" cmpd="sng" algn="ctr">
-                      <a:solidFill>
-                        <a:srgbClr val="DCE1EC"/>
-                      </a:solidFill>
-                      <a:prstDash val="solid"/>
-                      <a:round/>
-                      <a:headEnd type="none" w="med" len="med"/>
-                      <a:tailEnd type="none" w="med" len="med"/>
-                    </a:lnB>
-                    <a:solidFill>
-                      <a:srgbClr val="FFFFFF"/>
-                    </a:solidFill>
-                  </a:tcPr>
-                </a:tc>
-                <a:tc>
-                  <a:txBody>
-                    <a:bodyPr/>
-                    <a:lstStyle/>
-                    <a:p>
-                      <a:pPr indent="0" marL="0">
-                        <a:buNone/>
-                      </a:pPr>
-                      <a:r>
-                        <a:rPr lang="en-US" sz="1300" dirty="0">
-                          <a:solidFill>
-                            <a:srgbClr val="5C6478"/>
-                          </a:solidFill>
-                        </a:rPr>
-                        <a:t>Нет</a:t>
-                      </a:r>
-                      <a:endParaRPr lang="en-US" sz="1300" dirty="0"/>
-                    </a:p>
-                  </a:txBody>
-                  <a:tcPr marL="109728" marR="109728" marT="36576" marB="36576" anchor="ctr">
-                    <a:lnL w="9525" cap="flat" cmpd="sng" algn="ctr">
-                      <a:solidFill>
-                        <a:srgbClr val="DCE1EC"/>
-                      </a:solidFill>
-                      <a:prstDash val="solid"/>
-                      <a:round/>
-                      <a:headEnd type="none" w="med" len="med"/>
-                      <a:tailEnd type="none" w="med" len="med"/>
-                    </a:lnL>
-                    <a:lnR w="9525" cap="flat" cmpd="sng" algn="ctr">
-                      <a:solidFill>
-                        <a:srgbClr val="DCE1EC"/>
-                      </a:solidFill>
-                      <a:prstDash val="solid"/>
-                      <a:round/>
-                      <a:headEnd type="none" w="med" len="med"/>
-                      <a:tailEnd type="none" w="med" len="med"/>
-                    </a:lnR>
-                    <a:lnT w="9525" cap="flat" cmpd="sng" algn="ctr">
-                      <a:solidFill>
-                        <a:srgbClr val="DCE1EC"/>
-                      </a:solidFill>
-                      <a:prstDash val="solid"/>
-                      <a:round/>
-                      <a:headEnd type="none" w="med" len="med"/>
-                      <a:tailEnd type="none" w="med" len="med"/>
-                    </a:lnT>
-                    <a:lnB w="9525" cap="flat" cmpd="sng" algn="ctr">
-                      <a:solidFill>
-                        <a:srgbClr val="DCE1EC"/>
-                      </a:solidFill>
-                      <a:prstDash val="solid"/>
-                      <a:round/>
-                      <a:headEnd type="none" w="med" len="med"/>
-                      <a:tailEnd type="none" w="med" len="med"/>
-                    </a:lnB>
-                    <a:solidFill>
-                      <a:srgbClr val="FFFFFF"/>
-                    </a:solidFill>
-                  </a:tcPr>
-                </a:tc>
-                <a:tc>
-                  <a:txBody>
-                    <a:bodyPr/>
-                    <a:lstStyle/>
-                    <a:p>
-                      <a:pPr indent="0" marL="0">
-                        <a:buNone/>
-                      </a:pPr>
-                      <a:r>
-                        <a:rPr lang="en-US" sz="1300" dirty="0">
-                          <a:solidFill>
-                            <a:srgbClr val="1A1433"/>
-                          </a:solidFill>
-                        </a:rPr>
-                        <a:t>По договорённости</a:t>
-                      </a:r>
-                      <a:endParaRPr lang="en-US" sz="1300" dirty="0"/>
-                    </a:p>
-                  </a:txBody>
-                  <a:tcPr marL="109728" marR="109728" marT="36576" marB="36576" anchor="ctr">
-                    <a:lnL w="9525" cap="flat" cmpd="sng" algn="ctr">
-                      <a:solidFill>
-                        <a:srgbClr val="DCE1EC"/>
-                      </a:solidFill>
-                      <a:prstDash val="solid"/>
-                      <a:round/>
-                      <a:headEnd type="none" w="med" len="med"/>
-                      <a:tailEnd type="none" w="med" len="med"/>
-                    </a:lnL>
-                    <a:lnR w="9525" cap="flat" cmpd="sng" algn="ctr">
-                      <a:solidFill>
-                        <a:srgbClr val="DCE1EC"/>
-                      </a:solidFill>
-                      <a:prstDash val="solid"/>
-                      <a:round/>
-                      <a:headEnd type="none" w="med" len="med"/>
-                      <a:tailEnd type="none" w="med" len="med"/>
-                    </a:lnR>
-                    <a:lnT w="9525" cap="flat" cmpd="sng" algn="ctr">
-                      <a:solidFill>
-                        <a:srgbClr val="DCE1EC"/>
-                      </a:solidFill>
-                      <a:prstDash val="solid"/>
-                      <a:round/>
-                      <a:headEnd type="none" w="med" len="med"/>
-                      <a:tailEnd type="none" w="med" len="med"/>
-                    </a:lnT>
-                    <a:lnB w="9525" cap="flat" cmpd="sng" algn="ctr">
-                      <a:solidFill>
-                        <a:srgbClr val="DCE1EC"/>
-                      </a:solidFill>
-                      <a:prstDash val="solid"/>
-                      <a:round/>
-                      <a:headEnd type="none" w="med" len="med"/>
-                      <a:tailEnd type="none" w="med" len="med"/>
-                    </a:lnB>
-                    <a:solidFill>
-                      <a:srgbClr val="FFFFFF"/>
-                    </a:solidFill>
-                  </a:tcPr>
-                </a:tc>
-                <a:tc>
-                  <a:txBody>
-                    <a:bodyPr/>
-                    <a:lstStyle/>
-                    <a:p>
-                      <a:pPr indent="0" marL="0">
-                        <a:buNone/>
-                      </a:pPr>
-                      <a:r>
-                        <a:rPr lang="en-US" sz="1300" dirty="0">
-                          <a:solidFill>
-                            <a:srgbClr val="1A1433"/>
-                          </a:solidFill>
-                        </a:rPr>
-                        <a:t>Частично</a:t>
-                      </a:r>
-                      <a:endParaRPr lang="en-US" sz="1300" dirty="0"/>
-                    </a:p>
-                  </a:txBody>
-                  <a:tcPr marL="109728" marR="109728" marT="36576" marB="36576" anchor="ctr">
-                    <a:lnL w="9525" cap="flat" cmpd="sng" algn="ctr">
-                      <a:solidFill>
-                        <a:srgbClr val="DCE1EC"/>
-                      </a:solidFill>
-                      <a:prstDash val="solid"/>
-                      <a:round/>
-                      <a:headEnd type="none" w="med" len="med"/>
-                      <a:tailEnd type="none" w="med" len="med"/>
-                    </a:lnL>
-                    <a:lnR w="9525" cap="flat" cmpd="sng" algn="ctr">
-                      <a:solidFill>
-                        <a:srgbClr val="DCE1EC"/>
-                      </a:solidFill>
-                      <a:prstDash val="solid"/>
-                      <a:round/>
-                      <a:headEnd type="none" w="med" len="med"/>
-                      <a:tailEnd type="none" w="med" len="med"/>
-                    </a:lnR>
-                    <a:lnT w="9525" cap="flat" cmpd="sng" algn="ctr">
-                      <a:solidFill>
-                        <a:srgbClr val="DCE1EC"/>
-                      </a:solidFill>
-                      <a:prstDash val="solid"/>
-                      <a:round/>
-                      <a:headEnd type="none" w="med" len="med"/>
-                      <a:tailEnd type="none" w="med" len="med"/>
-                    </a:lnT>
-                    <a:lnB w="9525" cap="flat" cmpd="sng" algn="ctr">
-                      <a:solidFill>
-                        <a:srgbClr val="DCE1EC"/>
-                      </a:solidFill>
-                      <a:prstDash val="solid"/>
-                      <a:round/>
-                      <a:headEnd type="none" w="med" len="med"/>
-                      <a:tailEnd type="none" w="med" len="med"/>
-                    </a:lnB>
-                    <a:solidFill>
-                      <a:srgbClr val="FFFFFF"/>
-                    </a:solidFill>
-                  </a:tcPr>
-                </a:tc>
-                <a:tc>
-                  <a:txBody>
-                    <a:bodyPr/>
-                    <a:lstStyle/>
-                    <a:p>
-                      <a:pPr indent="0" marL="0">
-                        <a:buNone/>
-                      </a:pPr>
-                      <a:r>
-                        <a:rPr lang="en-US" sz="1300" b="1" dirty="0">
-                          <a:solidFill>
-                            <a:srgbClr val="24164F"/>
-                          </a:solidFill>
-                        </a:rPr>
-                        <a:t>Да</a:t>
-                      </a:r>
-                      <a:endParaRPr lang="en-US" sz="1300" dirty="0"/>
-                    </a:p>
-                  </a:txBody>
-                  <a:tcPr marL="109728" marR="109728" marT="36576" marB="36576" anchor="ctr">
-                    <a:lnL w="9525" cap="flat" cmpd="sng" algn="ctr">
-                      <a:solidFill>
-                        <a:srgbClr val="DCE1EC"/>
-                      </a:solidFill>
-                      <a:prstDash val="solid"/>
-                      <a:round/>
-                      <a:headEnd type="none" w="med" len="med"/>
-                      <a:tailEnd type="none" w="med" len="med"/>
-                    </a:lnL>
-                    <a:lnR w="9525" cap="flat" cmpd="sng" algn="ctr">
-                      <a:solidFill>
-                        <a:srgbClr val="DCE1EC"/>
-                      </a:solidFill>
-                      <a:prstDash val="solid"/>
-                      <a:round/>
-                      <a:headEnd type="none" w="med" len="med"/>
-                      <a:tailEnd type="none" w="med" len="med"/>
-                    </a:lnR>
-                    <a:lnT w="9525" cap="flat" cmpd="sng" algn="ctr">
-                      <a:solidFill>
-                        <a:srgbClr val="DCE1EC"/>
-                      </a:solidFill>
-                      <a:prstDash val="solid"/>
-                      <a:round/>
-                      <a:headEnd type="none" w="med" len="med"/>
-                      <a:tailEnd type="none" w="med" len="med"/>
-                    </a:lnT>
-                    <a:lnB w="9525" cap="flat" cmpd="sng" algn="ctr">
-                      <a:solidFill>
-                        <a:srgbClr val="DCE1EC"/>
-                      </a:solidFill>
-                      <a:prstDash val="solid"/>
-                      <a:round/>
-                      <a:headEnd type="none" w="med" len="med"/>
-                      <a:tailEnd type="none" w="med" len="med"/>
-                    </a:lnB>
-                    <a:solidFill>
-                      <a:srgbClr val="FFF1E2"/>
-                    </a:solidFill>
-                  </a:tcPr>
-                </a:tc>
-              </a:tr>
-              <a:tr h="429768">
-                <a:tc>
-                  <a:txBody>
-                    <a:bodyPr/>
-                    <a:lstStyle/>
-                    <a:p>
-                      <a:pPr indent="0" marL="0">
-                        <a:buNone/>
-                      </a:pPr>
-                      <a:r>
-                        <a:rPr lang="en-US" sz="1300" b="1" dirty="0">
-                          <a:solidFill>
-                            <a:srgbClr val="1A1433"/>
-                          </a:solidFill>
-                        </a:rPr>
-                        <a:t>Один ответственный за товар и работу</a:t>
-                      </a:r>
-                      <a:endParaRPr lang="en-US" sz="1300" dirty="0"/>
-                    </a:p>
-                  </a:txBody>
-                  <a:tcPr marL="109728" marR="109728" marT="36576" marB="36576" anchor="ctr">
-                    <a:lnL w="9525" cap="flat" cmpd="sng" algn="ctr">
-                      <a:solidFill>
-                        <a:srgbClr val="DCE1EC"/>
-                      </a:solidFill>
-                      <a:prstDash val="solid"/>
-                      <a:round/>
-                      <a:headEnd type="none" w="med" len="med"/>
-                      <a:tailEnd type="none" w="med" len="med"/>
-                    </a:lnL>
-                    <a:lnR w="9525" cap="flat" cmpd="sng" algn="ctr">
-                      <a:solidFill>
-                        <a:srgbClr val="DCE1EC"/>
-                      </a:solidFill>
-                      <a:prstDash val="solid"/>
-                      <a:round/>
-                      <a:headEnd type="none" w="med" len="med"/>
-                      <a:tailEnd type="none" w="med" len="med"/>
-                    </a:lnR>
-                    <a:lnT w="9525" cap="flat" cmpd="sng" algn="ctr">
-                      <a:solidFill>
-                        <a:srgbClr val="DCE1EC"/>
-                      </a:solidFill>
-                      <a:prstDash val="solid"/>
-                      <a:round/>
-                      <a:headEnd type="none" w="med" len="med"/>
-                      <a:tailEnd type="none" w="med" len="med"/>
-                    </a:lnT>
-                    <a:lnB w="9525" cap="flat" cmpd="sng" algn="ctr">
-                      <a:solidFill>
-                        <a:srgbClr val="DCE1EC"/>
-                      </a:solidFill>
-                      <a:prstDash val="solid"/>
-                      <a:round/>
-                      <a:headEnd type="none" w="med" len="med"/>
-                      <a:tailEnd type="none" w="med" len="med"/>
-                    </a:lnB>
-                    <a:solidFill>
-                      <a:srgbClr val="FFFFFF"/>
-                    </a:solidFill>
-                  </a:tcPr>
-                </a:tc>
-                <a:tc>
-                  <a:txBody>
-                    <a:bodyPr/>
-                    <a:lstStyle/>
-                    <a:p>
-                      <a:pPr indent="0" marL="0">
-                        <a:buNone/>
-                      </a:pPr>
-                      <a:r>
-                        <a:rPr lang="en-US" sz="1300" dirty="0">
-                          <a:solidFill>
-                            <a:srgbClr val="5C6478"/>
-                          </a:solidFill>
-                        </a:rPr>
-                        <a:t>Нет</a:t>
-                      </a:r>
-                      <a:endParaRPr lang="en-US" sz="1300" dirty="0"/>
-                    </a:p>
-                  </a:txBody>
-                  <a:tcPr marL="109728" marR="109728" marT="36576" marB="36576" anchor="ctr">
-                    <a:lnL w="9525" cap="flat" cmpd="sng" algn="ctr">
-                      <a:solidFill>
-                        <a:srgbClr val="DCE1EC"/>
-                      </a:solidFill>
-                      <a:prstDash val="solid"/>
-                      <a:round/>
-                      <a:headEnd type="none" w="med" len="med"/>
-                      <a:tailEnd type="none" w="med" len="med"/>
-                    </a:lnL>
-                    <a:lnR w="9525" cap="flat" cmpd="sng" algn="ctr">
-                      <a:solidFill>
-                        <a:srgbClr val="DCE1EC"/>
-                      </a:solidFill>
-                      <a:prstDash val="solid"/>
-                      <a:round/>
-                      <a:headEnd type="none" w="med" len="med"/>
-                      <a:tailEnd type="none" w="med" len="med"/>
-                    </a:lnR>
-                    <a:lnT w="9525" cap="flat" cmpd="sng" algn="ctr">
-                      <a:solidFill>
-                        <a:srgbClr val="DCE1EC"/>
-                      </a:solidFill>
-                      <a:prstDash val="solid"/>
-                      <a:round/>
-                      <a:headEnd type="none" w="med" len="med"/>
-                      <a:tailEnd type="none" w="med" len="med"/>
-                    </a:lnT>
-                    <a:lnB w="9525" cap="flat" cmpd="sng" algn="ctr">
-                      <a:solidFill>
-                        <a:srgbClr val="DCE1EC"/>
-                      </a:solidFill>
-                      <a:prstDash val="solid"/>
-                      <a:round/>
-                      <a:headEnd type="none" w="med" len="med"/>
-                      <a:tailEnd type="none" w="med" len="med"/>
-                    </a:lnB>
-                    <a:solidFill>
-                      <a:srgbClr val="FFFFFF"/>
-                    </a:solidFill>
-                  </a:tcPr>
-                </a:tc>
-                <a:tc>
-                  <a:txBody>
-                    <a:bodyPr/>
-                    <a:lstStyle/>
-                    <a:p>
-                      <a:pPr indent="0" marL="0">
-                        <a:buNone/>
-                      </a:pPr>
-                      <a:r>
-                        <a:rPr lang="en-US" sz="1300" dirty="0">
-                          <a:solidFill>
-                            <a:srgbClr val="5C6478"/>
-                          </a:solidFill>
-                        </a:rPr>
-                        <a:t>Нет</a:t>
-                      </a:r>
-                      <a:endParaRPr lang="en-US" sz="1300" dirty="0"/>
-                    </a:p>
-                  </a:txBody>
-                  <a:tcPr marL="109728" marR="109728" marT="36576" marB="36576" anchor="ctr">
-                    <a:lnL w="9525" cap="flat" cmpd="sng" algn="ctr">
-                      <a:solidFill>
-                        <a:srgbClr val="DCE1EC"/>
-                      </a:solidFill>
-                      <a:prstDash val="solid"/>
-                      <a:round/>
-                      <a:headEnd type="none" w="med" len="med"/>
-                      <a:tailEnd type="none" w="med" len="med"/>
-                    </a:lnL>
-                    <a:lnR w="9525" cap="flat" cmpd="sng" algn="ctr">
-                      <a:solidFill>
-                        <a:srgbClr val="DCE1EC"/>
-                      </a:solidFill>
-                      <a:prstDash val="solid"/>
-                      <a:round/>
-                      <a:headEnd type="none" w="med" len="med"/>
-                      <a:tailEnd type="none" w="med" len="med"/>
-                    </a:lnR>
-                    <a:lnT w="9525" cap="flat" cmpd="sng" algn="ctr">
-                      <a:solidFill>
-                        <a:srgbClr val="DCE1EC"/>
-                      </a:solidFill>
-                      <a:prstDash val="solid"/>
-                      <a:round/>
-                      <a:headEnd type="none" w="med" len="med"/>
-                      <a:tailEnd type="none" w="med" len="med"/>
-                    </a:lnT>
-                    <a:lnB w="9525" cap="flat" cmpd="sng" algn="ctr">
-                      <a:solidFill>
-                        <a:srgbClr val="DCE1EC"/>
-                      </a:solidFill>
-                      <a:prstDash val="solid"/>
-                      <a:round/>
-                      <a:headEnd type="none" w="med" len="med"/>
-                      <a:tailEnd type="none" w="med" len="med"/>
-                    </a:lnB>
-                    <a:solidFill>
-                      <a:srgbClr val="FFFFFF"/>
-                    </a:solidFill>
-                  </a:tcPr>
-                </a:tc>
-                <a:tc>
-                  <a:txBody>
-                    <a:bodyPr/>
-                    <a:lstStyle/>
-                    <a:p>
-                      <a:pPr indent="0" marL="0">
-                        <a:buNone/>
-                      </a:pPr>
-                      <a:r>
-                        <a:rPr lang="en-US" sz="1300" dirty="0">
-                          <a:solidFill>
-                            <a:srgbClr val="5C6478"/>
-                          </a:solidFill>
-                        </a:rPr>
-                        <a:t>Нет</a:t>
-                      </a:r>
-                      <a:endParaRPr lang="en-US" sz="1300" dirty="0"/>
-                    </a:p>
-                  </a:txBody>
-                  <a:tcPr marL="109728" marR="109728" marT="36576" marB="36576" anchor="ctr">
-                    <a:lnL w="9525" cap="flat" cmpd="sng" algn="ctr">
-                      <a:solidFill>
-                        <a:srgbClr val="DCE1EC"/>
-                      </a:solidFill>
-                      <a:prstDash val="solid"/>
-                      <a:round/>
-                      <a:headEnd type="none" w="med" len="med"/>
-                      <a:tailEnd type="none" w="med" len="med"/>
-                    </a:lnL>
-                    <a:lnR w="9525" cap="flat" cmpd="sng" algn="ctr">
-                      <a:solidFill>
-                        <a:srgbClr val="DCE1EC"/>
-                      </a:solidFill>
-                      <a:prstDash val="solid"/>
-                      <a:round/>
-                      <a:headEnd type="none" w="med" len="med"/>
-                      <a:tailEnd type="none" w="med" len="med"/>
-                    </a:lnR>
-                    <a:lnT w="9525" cap="flat" cmpd="sng" algn="ctr">
-                      <a:solidFill>
-                        <a:srgbClr val="DCE1EC"/>
-                      </a:solidFill>
-                      <a:prstDash val="solid"/>
-                      <a:round/>
-                      <a:headEnd type="none" w="med" len="med"/>
-                      <a:tailEnd type="none" w="med" len="med"/>
-                    </a:lnT>
-                    <a:lnB w="9525" cap="flat" cmpd="sng" algn="ctr">
-                      <a:solidFill>
-                        <a:srgbClr val="DCE1EC"/>
-                      </a:solidFill>
-                      <a:prstDash val="solid"/>
-                      <a:round/>
-                      <a:headEnd type="none" w="med" len="med"/>
-                      <a:tailEnd type="none" w="med" len="med"/>
-                    </a:lnB>
-                    <a:solidFill>
-                      <a:srgbClr val="FFFFFF"/>
-                    </a:solidFill>
-                  </a:tcPr>
-                </a:tc>
-                <a:tc>
-                  <a:txBody>
-                    <a:bodyPr/>
-                    <a:lstStyle/>
-                    <a:p>
-                      <a:pPr indent="0" marL="0">
-                        <a:buNone/>
-                      </a:pPr>
-                      <a:r>
-                        <a:rPr lang="en-US" sz="1300" b="1" dirty="0">
-                          <a:solidFill>
-                            <a:srgbClr val="24164F"/>
-                          </a:solidFill>
-                        </a:rPr>
-                        <a:t>ОМА</a:t>
-                      </a:r>
-                      <a:endParaRPr lang="en-US" sz="1300" dirty="0"/>
-                    </a:p>
-                  </a:txBody>
-                  <a:tcPr marL="109728" marR="109728" marT="36576" marB="36576" anchor="ctr">
-                    <a:lnL w="9525" cap="flat" cmpd="sng" algn="ctr">
-                      <a:solidFill>
-                        <a:srgbClr val="DCE1EC"/>
-                      </a:solidFill>
-                      <a:prstDash val="solid"/>
-                      <a:round/>
-                      <a:headEnd type="none" w="med" len="med"/>
-                      <a:tailEnd type="none" w="med" len="med"/>
-                    </a:lnL>
-                    <a:lnR w="9525" cap="flat" cmpd="sng" algn="ctr">
-                      <a:solidFill>
-                        <a:srgbClr val="DCE1EC"/>
-                      </a:solidFill>
-                      <a:prstDash val="solid"/>
-                      <a:round/>
-                      <a:headEnd type="none" w="med" len="med"/>
-                      <a:tailEnd type="none" w="med" len="med"/>
-                    </a:lnR>
-                    <a:lnT w="9525" cap="flat" cmpd="sng" algn="ctr">
-                      <a:solidFill>
-                        <a:srgbClr val="DCE1EC"/>
-                      </a:solidFill>
-                      <a:prstDash val="solid"/>
-                      <a:round/>
-                      <a:headEnd type="none" w="med" len="med"/>
-                      <a:tailEnd type="none" w="med" len="med"/>
-                    </a:lnT>
-                    <a:lnB w="9525" cap="flat" cmpd="sng" algn="ctr">
-                      <a:solidFill>
-                        <a:srgbClr val="DCE1EC"/>
-                      </a:solidFill>
-                      <a:prstDash val="solid"/>
-                      <a:round/>
-                      <a:headEnd type="none" w="med" len="med"/>
-                      <a:tailEnd type="none" w="med" len="med"/>
-                    </a:lnB>
-                    <a:solidFill>
-                      <a:srgbClr val="FFF1E2"/>
-                    </a:solidFill>
-                  </a:tcPr>
-                </a:tc>
-              </a:tr>
-              <a:tr h="429768">
-                <a:tc>
-                  <a:txBody>
-                    <a:bodyPr/>
-                    <a:lstStyle/>
-                    <a:p>
-                      <a:pPr indent="0" marL="0">
-                        <a:buNone/>
-                      </a:pPr>
-                      <a:r>
-                        <a:rPr lang="en-US" sz="1300" b="1" dirty="0">
-                          <a:solidFill>
-                            <a:srgbClr val="1A1433"/>
-                          </a:solidFill>
-                        </a:rPr>
-                        <a:t>Гарантия и история ремонта</a:t>
-                      </a:r>
-                      <a:endParaRPr lang="en-US" sz="1300" dirty="0"/>
-                    </a:p>
-                  </a:txBody>
-                  <a:tcPr marL="109728" marR="109728" marT="36576" marB="36576" anchor="ctr">
-                    <a:lnL w="9525" cap="flat" cmpd="sng" algn="ctr">
-                      <a:solidFill>
-                        <a:srgbClr val="DCE1EC"/>
-                      </a:solidFill>
-                      <a:prstDash val="solid"/>
-                      <a:round/>
-                      <a:headEnd type="none" w="med" len="med"/>
-                      <a:tailEnd type="none" w="med" len="med"/>
-                    </a:lnL>
-                    <a:lnR w="9525" cap="flat" cmpd="sng" algn="ctr">
-                      <a:solidFill>
-                        <a:srgbClr val="DCE1EC"/>
-                      </a:solidFill>
-                      <a:prstDash val="solid"/>
-                      <a:round/>
-                      <a:headEnd type="none" w="med" len="med"/>
-                      <a:tailEnd type="none" w="med" len="med"/>
-                    </a:lnR>
-                    <a:lnT w="9525" cap="flat" cmpd="sng" algn="ctr">
-                      <a:solidFill>
-                        <a:srgbClr val="DCE1EC"/>
-                      </a:solidFill>
-                      <a:prstDash val="solid"/>
-                      <a:round/>
-                      <a:headEnd type="none" w="med" len="med"/>
-                      <a:tailEnd type="none" w="med" len="med"/>
-                    </a:lnT>
-                    <a:lnB w="9525" cap="flat" cmpd="sng" algn="ctr">
-                      <a:solidFill>
-                        <a:srgbClr val="DCE1EC"/>
-                      </a:solidFill>
-                      <a:prstDash val="solid"/>
-                      <a:round/>
-                      <a:headEnd type="none" w="med" len="med"/>
-                      <a:tailEnd type="none" w="med" len="med"/>
-                    </a:lnB>
-                    <a:solidFill>
-                      <a:srgbClr val="FFFFFF"/>
-                    </a:solidFill>
-                  </a:tcPr>
-                </a:tc>
-                <a:tc>
-                  <a:txBody>
-                    <a:bodyPr/>
-                    <a:lstStyle/>
-                    <a:p>
-                      <a:pPr indent="0" marL="0">
-                        <a:buNone/>
-                      </a:pPr>
-                      <a:r>
-                        <a:rPr lang="en-US" sz="1300" dirty="0">
-                          <a:solidFill>
-                            <a:srgbClr val="5C6478"/>
-                          </a:solidFill>
-                        </a:rPr>
-                        <a:t>Нет</a:t>
-                      </a:r>
-                      <a:endParaRPr lang="en-US" sz="1300" dirty="0"/>
-                    </a:p>
-                  </a:txBody>
-                  <a:tcPr marL="109728" marR="109728" marT="36576" marB="36576" anchor="ctr">
-                    <a:lnL w="9525" cap="flat" cmpd="sng" algn="ctr">
-                      <a:solidFill>
-                        <a:srgbClr val="DCE1EC"/>
-                      </a:solidFill>
-                      <a:prstDash val="solid"/>
-                      <a:round/>
-                      <a:headEnd type="none" w="med" len="med"/>
-                      <a:tailEnd type="none" w="med" len="med"/>
-                    </a:lnL>
-                    <a:lnR w="9525" cap="flat" cmpd="sng" algn="ctr">
-                      <a:solidFill>
-                        <a:srgbClr val="DCE1EC"/>
-                      </a:solidFill>
-                      <a:prstDash val="solid"/>
-                      <a:round/>
-                      <a:headEnd type="none" w="med" len="med"/>
-                      <a:tailEnd type="none" w="med" len="med"/>
-                    </a:lnR>
-                    <a:lnT w="9525" cap="flat" cmpd="sng" algn="ctr">
-                      <a:solidFill>
-                        <a:srgbClr val="DCE1EC"/>
-                      </a:solidFill>
-                      <a:prstDash val="solid"/>
-                      <a:round/>
-                      <a:headEnd type="none" w="med" len="med"/>
-                      <a:tailEnd type="none" w="med" len="med"/>
-                    </a:lnT>
-                    <a:lnB w="9525" cap="flat" cmpd="sng" algn="ctr">
-                      <a:solidFill>
-                        <a:srgbClr val="DCE1EC"/>
-                      </a:solidFill>
-                      <a:prstDash val="solid"/>
-                      <a:round/>
-                      <a:headEnd type="none" w="med" len="med"/>
-                      <a:tailEnd type="none" w="med" len="med"/>
-                    </a:lnB>
-                    <a:solidFill>
-                      <a:srgbClr val="FFFFFF"/>
-                    </a:solidFill>
-                  </a:tcPr>
-                </a:tc>
-                <a:tc>
-                  <a:txBody>
-                    <a:bodyPr/>
-                    <a:lstStyle/>
-                    <a:p>
-                      <a:pPr indent="0" marL="0">
-                        <a:buNone/>
-                      </a:pPr>
-                      <a:r>
-                        <a:rPr lang="en-US" sz="1300" dirty="0">
-                          <a:solidFill>
-                            <a:srgbClr val="5C6478"/>
-                          </a:solidFill>
-                        </a:rPr>
-                        <a:t>Нет</a:t>
-                      </a:r>
-                      <a:endParaRPr lang="en-US" sz="1300" dirty="0"/>
-                    </a:p>
-                  </a:txBody>
-                  <a:tcPr marL="109728" marR="109728" marT="36576" marB="36576" anchor="ctr">
-                    <a:lnL w="9525" cap="flat" cmpd="sng" algn="ctr">
-                      <a:solidFill>
-                        <a:srgbClr val="DCE1EC"/>
-                      </a:solidFill>
-                      <a:prstDash val="solid"/>
-                      <a:round/>
-                      <a:headEnd type="none" w="med" len="med"/>
-                      <a:tailEnd type="none" w="med" len="med"/>
-                    </a:lnL>
-                    <a:lnR w="9525" cap="flat" cmpd="sng" algn="ctr">
-                      <a:solidFill>
-                        <a:srgbClr val="DCE1EC"/>
-                      </a:solidFill>
-                      <a:prstDash val="solid"/>
-                      <a:round/>
-                      <a:headEnd type="none" w="med" len="med"/>
-                      <a:tailEnd type="none" w="med" len="med"/>
-                    </a:lnR>
-                    <a:lnT w="9525" cap="flat" cmpd="sng" algn="ctr">
-                      <a:solidFill>
-                        <a:srgbClr val="DCE1EC"/>
-                      </a:solidFill>
-                      <a:prstDash val="solid"/>
-                      <a:round/>
-                      <a:headEnd type="none" w="med" len="med"/>
-                      <a:tailEnd type="none" w="med" len="med"/>
-                    </a:lnT>
-                    <a:lnB w="9525" cap="flat" cmpd="sng" algn="ctr">
-                      <a:solidFill>
-                        <a:srgbClr val="DCE1EC"/>
-                      </a:solidFill>
-                      <a:prstDash val="solid"/>
-                      <a:round/>
-                      <a:headEnd type="none" w="med" len="med"/>
-                      <a:tailEnd type="none" w="med" len="med"/>
-                    </a:lnB>
-                    <a:solidFill>
-                      <a:srgbClr val="FFFFFF"/>
-                    </a:solidFill>
-                  </a:tcPr>
-                </a:tc>
-                <a:tc>
-                  <a:txBody>
-                    <a:bodyPr/>
-                    <a:lstStyle/>
-                    <a:p>
-                      <a:pPr indent="0" marL="0">
-                        <a:buNone/>
-                      </a:pPr>
-                      <a:r>
-                        <a:rPr lang="en-US" sz="1300" dirty="0">
-                          <a:solidFill>
-                            <a:srgbClr val="5C6478"/>
-                          </a:solidFill>
-                        </a:rPr>
-                        <a:t>Нет</a:t>
-                      </a:r>
-                      <a:endParaRPr lang="en-US" sz="1300" dirty="0"/>
-                    </a:p>
-                  </a:txBody>
-                  <a:tcPr marL="109728" marR="109728" marT="36576" marB="36576" anchor="ctr">
-                    <a:lnL w="9525" cap="flat" cmpd="sng" algn="ctr">
-                      <a:solidFill>
-                        <a:srgbClr val="DCE1EC"/>
-                      </a:solidFill>
-                      <a:prstDash val="solid"/>
-                      <a:round/>
-                      <a:headEnd type="none" w="med" len="med"/>
-                      <a:tailEnd type="none" w="med" len="med"/>
-                    </a:lnL>
-                    <a:lnR w="9525" cap="flat" cmpd="sng" algn="ctr">
-                      <a:solidFill>
-                        <a:srgbClr val="DCE1EC"/>
-                      </a:solidFill>
-                      <a:prstDash val="solid"/>
-                      <a:round/>
-                      <a:headEnd type="none" w="med" len="med"/>
-                      <a:tailEnd type="none" w="med" len="med"/>
-                    </a:lnR>
-                    <a:lnT w="9525" cap="flat" cmpd="sng" algn="ctr">
-                      <a:solidFill>
-                        <a:srgbClr val="DCE1EC"/>
-                      </a:solidFill>
-                      <a:prstDash val="solid"/>
-                      <a:round/>
-                      <a:headEnd type="none" w="med" len="med"/>
-                      <a:tailEnd type="none" w="med" len="med"/>
-                    </a:lnT>
-                    <a:lnB w="9525" cap="flat" cmpd="sng" algn="ctr">
-                      <a:solidFill>
-                        <a:srgbClr val="DCE1EC"/>
-                      </a:solidFill>
-                      <a:prstDash val="solid"/>
-                      <a:round/>
-                      <a:headEnd type="none" w="med" len="med"/>
-                      <a:tailEnd type="none" w="med" len="med"/>
-                    </a:lnB>
-                    <a:solidFill>
-                      <a:srgbClr val="FFFFFF"/>
-                    </a:solidFill>
-                  </a:tcPr>
-                </a:tc>
-                <a:tc>
-                  <a:txBody>
-                    <a:bodyPr/>
-                    <a:lstStyle/>
-                    <a:p>
-                      <a:pPr indent="0" marL="0">
-                        <a:buNone/>
-                      </a:pPr>
-                      <a:r>
-                        <a:rPr lang="en-US" sz="1300" b="1" dirty="0">
-                          <a:solidFill>
-                            <a:srgbClr val="24164F"/>
-                          </a:solidFill>
-                        </a:rPr>
-                        <a:t>Паспорт дома</a:t>
-                      </a:r>
-                      <a:endParaRPr lang="en-US" sz="1300" dirty="0"/>
-                    </a:p>
-                  </a:txBody>
-                  <a:tcPr marL="109728" marR="109728" marT="36576" marB="36576" anchor="ctr">
-                    <a:lnL w="9525" cap="flat" cmpd="sng" algn="ctr">
-                      <a:solidFill>
-                        <a:srgbClr val="DCE1EC"/>
-                      </a:solidFill>
-                      <a:prstDash val="solid"/>
-                      <a:round/>
-                      <a:headEnd type="none" w="med" len="med"/>
-                      <a:tailEnd type="none" w="med" len="med"/>
-                    </a:lnL>
-                    <a:lnR w="9525" cap="flat" cmpd="sng" algn="ctr">
-                      <a:solidFill>
-                        <a:srgbClr val="DCE1EC"/>
-                      </a:solidFill>
-                      <a:prstDash val="solid"/>
-                      <a:round/>
-                      <a:headEnd type="none" w="med" len="med"/>
-                      <a:tailEnd type="none" w="med" len="med"/>
-                    </a:lnR>
-                    <a:lnT w="9525" cap="flat" cmpd="sng" algn="ctr">
-                      <a:solidFill>
-                        <a:srgbClr val="DCE1EC"/>
-                      </a:solidFill>
-                      <a:prstDash val="solid"/>
-                      <a:round/>
-                      <a:headEnd type="none" w="med" len="med"/>
-                      <a:tailEnd type="none" w="med" len="med"/>
-                    </a:lnT>
-                    <a:lnB w="9525" cap="flat" cmpd="sng" algn="ctr">
-                      <a:solidFill>
-                        <a:srgbClr val="DCE1EC"/>
-                      </a:solidFill>
-                      <a:prstDash val="solid"/>
-                      <a:round/>
-                      <a:headEnd type="none" w="med" len="med"/>
-                      <a:tailEnd type="none" w="med" len="med"/>
-                    </a:lnB>
-                    <a:solidFill>
-                      <a:srgbClr val="FFF1E2"/>
-                    </a:solidFill>
-                  </a:tcPr>
-                </a:tc>
-              </a:tr>
-              <a:tr h="429768">
-                <a:tc>
-                  <a:txBody>
-                    <a:bodyPr/>
-                    <a:lstStyle/>
-                    <a:p>
-                      <a:pPr indent="0" marL="0">
-                        <a:buNone/>
-                      </a:pPr>
-                      <a:r>
-                        <a:rPr lang="en-US" sz="1300" b="1" dirty="0">
-                          <a:solidFill>
-                            <a:srgbClr val="1A1433"/>
-                          </a:solidFill>
-                        </a:rPr>
-                        <a:t>Поток заказов и закупка для мастера</a:t>
-                      </a:r>
-                      <a:endParaRPr lang="en-US" sz="1300" dirty="0"/>
-                    </a:p>
-                  </a:txBody>
-                  <a:tcPr marL="109728" marR="109728" marT="36576" marB="36576" anchor="ctr">
-                    <a:lnL w="9525" cap="flat" cmpd="sng" algn="ctr">
-                      <a:solidFill>
-                        <a:srgbClr val="DCE1EC"/>
-                      </a:solidFill>
-                      <a:prstDash val="solid"/>
-                      <a:round/>
-                      <a:headEnd type="none" w="med" len="med"/>
-                      <a:tailEnd type="none" w="med" len="med"/>
-                    </a:lnL>
-                    <a:lnR w="9525" cap="flat" cmpd="sng" algn="ctr">
-                      <a:solidFill>
-                        <a:srgbClr val="DCE1EC"/>
-                      </a:solidFill>
-                      <a:prstDash val="solid"/>
-                      <a:round/>
-                      <a:headEnd type="none" w="med" len="med"/>
-                      <a:tailEnd type="none" w="med" len="med"/>
-                    </a:lnR>
-                    <a:lnT w="9525" cap="flat" cmpd="sng" algn="ctr">
-                      <a:solidFill>
-                        <a:srgbClr val="DCE1EC"/>
-                      </a:solidFill>
-                      <a:prstDash val="solid"/>
-                      <a:round/>
-                      <a:headEnd type="none" w="med" len="med"/>
-                      <a:tailEnd type="none" w="med" len="med"/>
-                    </a:lnT>
-                    <a:lnB w="9525" cap="flat" cmpd="sng" algn="ctr">
-                      <a:solidFill>
-                        <a:srgbClr val="DCE1EC"/>
-                      </a:solidFill>
-                      <a:prstDash val="solid"/>
-                      <a:round/>
-                      <a:headEnd type="none" w="med" len="med"/>
-                      <a:tailEnd type="none" w="med" len="med"/>
-                    </a:lnB>
-                    <a:solidFill>
-                      <a:srgbClr val="FFFFFF"/>
-                    </a:solidFill>
-                  </a:tcPr>
-                </a:tc>
-                <a:tc>
-                  <a:txBody>
-                    <a:bodyPr/>
-                    <a:lstStyle/>
-                    <a:p>
-                      <a:pPr indent="0" marL="0">
-                        <a:buNone/>
-                      </a:pPr>
-                      <a:r>
-                        <a:rPr lang="en-US" sz="1300" dirty="0">
-                          <a:solidFill>
-                            <a:srgbClr val="5C6478"/>
-                          </a:solidFill>
-                        </a:rPr>
-                        <a:t>Нет</a:t>
-                      </a:r>
-                      <a:endParaRPr lang="en-US" sz="1300" dirty="0"/>
-                    </a:p>
-                  </a:txBody>
-                  <a:tcPr marL="109728" marR="109728" marT="36576" marB="36576" anchor="ctr">
-                    <a:lnL w="9525" cap="flat" cmpd="sng" algn="ctr">
-                      <a:solidFill>
-                        <a:srgbClr val="DCE1EC"/>
-                      </a:solidFill>
-                      <a:prstDash val="solid"/>
-                      <a:round/>
-                      <a:headEnd type="none" w="med" len="med"/>
-                      <a:tailEnd type="none" w="med" len="med"/>
-                    </a:lnL>
-                    <a:lnR w="9525" cap="flat" cmpd="sng" algn="ctr">
-                      <a:solidFill>
-                        <a:srgbClr val="DCE1EC"/>
-                      </a:solidFill>
-                      <a:prstDash val="solid"/>
-                      <a:round/>
-                      <a:headEnd type="none" w="med" len="med"/>
-                      <a:tailEnd type="none" w="med" len="med"/>
-                    </a:lnR>
-                    <a:lnT w="9525" cap="flat" cmpd="sng" algn="ctr">
-                      <a:solidFill>
-                        <a:srgbClr val="DCE1EC"/>
-                      </a:solidFill>
-                      <a:prstDash val="solid"/>
-                      <a:round/>
-                      <a:headEnd type="none" w="med" len="med"/>
-                      <a:tailEnd type="none" w="med" len="med"/>
-                    </a:lnT>
-                    <a:lnB w="9525" cap="flat" cmpd="sng" algn="ctr">
-                      <a:solidFill>
-                        <a:srgbClr val="DCE1EC"/>
-                      </a:solidFill>
-                      <a:prstDash val="solid"/>
-                      <a:round/>
-                      <a:headEnd type="none" w="med" len="med"/>
-                      <a:tailEnd type="none" w="med" len="med"/>
-                    </a:lnB>
-                    <a:solidFill>
-                      <a:srgbClr val="FFFFFF"/>
-                    </a:solidFill>
-                  </a:tcPr>
-                </a:tc>
-                <a:tc>
-                  <a:txBody>
-                    <a:bodyPr/>
-                    <a:lstStyle/>
-                    <a:p>
-                      <a:pPr indent="0" marL="0">
-                        <a:buNone/>
-                      </a:pPr>
-                      <a:r>
-                        <a:rPr lang="en-US" sz="1300" dirty="0">
-                          <a:solidFill>
-                            <a:srgbClr val="5C6478"/>
-                          </a:solidFill>
-                        </a:rPr>
-                        <a:t>Нет</a:t>
-                      </a:r>
-                      <a:endParaRPr lang="en-US" sz="1300" dirty="0"/>
-                    </a:p>
-                  </a:txBody>
-                  <a:tcPr marL="109728" marR="109728" marT="36576" marB="36576" anchor="ctr">
-                    <a:lnL w="9525" cap="flat" cmpd="sng" algn="ctr">
-                      <a:solidFill>
-                        <a:srgbClr val="DCE1EC"/>
-                      </a:solidFill>
-                      <a:prstDash val="solid"/>
-                      <a:round/>
-                      <a:headEnd type="none" w="med" len="med"/>
-                      <a:tailEnd type="none" w="med" len="med"/>
-                    </a:lnL>
-                    <a:lnR w="9525" cap="flat" cmpd="sng" algn="ctr">
-                      <a:solidFill>
-                        <a:srgbClr val="DCE1EC"/>
-                      </a:solidFill>
-                      <a:prstDash val="solid"/>
-                      <a:round/>
-                      <a:headEnd type="none" w="med" len="med"/>
-                      <a:tailEnd type="none" w="med" len="med"/>
-                    </a:lnR>
-                    <a:lnT w="9525" cap="flat" cmpd="sng" algn="ctr">
-                      <a:solidFill>
-                        <a:srgbClr val="DCE1EC"/>
-                      </a:solidFill>
-                      <a:prstDash val="solid"/>
-                      <a:round/>
-                      <a:headEnd type="none" w="med" len="med"/>
-                      <a:tailEnd type="none" w="med" len="med"/>
-                    </a:lnT>
-                    <a:lnB w="9525" cap="flat" cmpd="sng" algn="ctr">
-                      <a:solidFill>
-                        <a:srgbClr val="DCE1EC"/>
-                      </a:solidFill>
-                      <a:prstDash val="solid"/>
-                      <a:round/>
-                      <a:headEnd type="none" w="med" len="med"/>
-                      <a:tailEnd type="none" w="med" len="med"/>
-                    </a:lnB>
-                    <a:solidFill>
-                      <a:srgbClr val="FFFFFF"/>
-                    </a:solidFill>
-                  </a:tcPr>
-                </a:tc>
-                <a:tc>
-                  <a:txBody>
-                    <a:bodyPr/>
-                    <a:lstStyle/>
-                    <a:p>
-                      <a:pPr indent="0" marL="0">
-                        <a:buNone/>
-                      </a:pPr>
-                      <a:r>
-                        <a:rPr lang="en-US" sz="1300" dirty="0">
-                          <a:solidFill>
-                            <a:srgbClr val="1A1433"/>
-                          </a:solidFill>
-                        </a:rPr>
-                        <a:t>Частично</a:t>
-                      </a:r>
-                      <a:endParaRPr lang="en-US" sz="1300" dirty="0"/>
-                    </a:p>
-                  </a:txBody>
-                  <a:tcPr marL="109728" marR="109728" marT="36576" marB="36576" anchor="ctr">
-                    <a:lnL w="9525" cap="flat" cmpd="sng" algn="ctr">
-                      <a:solidFill>
-                        <a:srgbClr val="DCE1EC"/>
-                      </a:solidFill>
-                      <a:prstDash val="solid"/>
-                      <a:round/>
-                      <a:headEnd type="none" w="med" len="med"/>
-                      <a:tailEnd type="none" w="med" len="med"/>
-                    </a:lnL>
-                    <a:lnR w="9525" cap="flat" cmpd="sng" algn="ctr">
-                      <a:solidFill>
-                        <a:srgbClr val="DCE1EC"/>
-                      </a:solidFill>
-                      <a:prstDash val="solid"/>
-                      <a:round/>
-                      <a:headEnd type="none" w="med" len="med"/>
-                      <a:tailEnd type="none" w="med" len="med"/>
-                    </a:lnR>
-                    <a:lnT w="9525" cap="flat" cmpd="sng" algn="ctr">
-                      <a:solidFill>
-                        <a:srgbClr val="DCE1EC"/>
-                      </a:solidFill>
-                      <a:prstDash val="solid"/>
-                      <a:round/>
-                      <a:headEnd type="none" w="med" len="med"/>
-                      <a:tailEnd type="none" w="med" len="med"/>
-                    </a:lnT>
-                    <a:lnB w="9525" cap="flat" cmpd="sng" algn="ctr">
-                      <a:solidFill>
-                        <a:srgbClr val="DCE1EC"/>
-                      </a:solidFill>
-                      <a:prstDash val="solid"/>
-                      <a:round/>
-                      <a:headEnd type="none" w="med" len="med"/>
-                      <a:tailEnd type="none" w="med" len="med"/>
-                    </a:lnB>
-                    <a:solidFill>
-                      <a:srgbClr val="FFFFFF"/>
-                    </a:solidFill>
-                  </a:tcPr>
-                </a:tc>
-                <a:tc>
-                  <a:txBody>
-                    <a:bodyPr/>
-                    <a:lstStyle/>
-                    <a:p>
-                      <a:pPr indent="0" marL="0">
-                        <a:buNone/>
-                      </a:pPr>
-                      <a:r>
-                        <a:rPr lang="en-US" sz="1300" b="1" dirty="0">
-                          <a:solidFill>
-                            <a:srgbClr val="24164F"/>
-                          </a:solidFill>
-                        </a:rPr>
-                        <a:t>Заявки ОМА + OMA PRO</a:t>
-                      </a:r>
-                      <a:endParaRPr lang="en-US" sz="1300" dirty="0"/>
-                    </a:p>
-                  </a:txBody>
-                  <a:tcPr marL="109728" marR="109728" marT="36576" marB="36576" anchor="ctr">
-                    <a:lnL w="9525" cap="flat" cmpd="sng" algn="ctr">
-                      <a:solidFill>
-                        <a:srgbClr val="DCE1EC"/>
-                      </a:solidFill>
-                      <a:prstDash val="solid"/>
-                      <a:round/>
-                      <a:headEnd type="none" w="med" len="med"/>
-                      <a:tailEnd type="none" w="med" len="med"/>
-                    </a:lnL>
-                    <a:lnR w="9525" cap="flat" cmpd="sng" algn="ctr">
-                      <a:solidFill>
-                        <a:srgbClr val="DCE1EC"/>
-                      </a:solidFill>
-                      <a:prstDash val="solid"/>
-                      <a:round/>
-                      <a:headEnd type="none" w="med" len="med"/>
-                      <a:tailEnd type="none" w="med" len="med"/>
-                    </a:lnR>
-                    <a:lnT w="9525" cap="flat" cmpd="sng" algn="ctr">
-                      <a:solidFill>
-                        <a:srgbClr val="DCE1EC"/>
-                      </a:solidFill>
-                      <a:prstDash val="solid"/>
-                      <a:round/>
-                      <a:headEnd type="none" w="med" len="med"/>
-                      <a:tailEnd type="none" w="med" len="med"/>
-                    </a:lnT>
-                    <a:lnB w="9525" cap="flat" cmpd="sng" algn="ctr">
-                      <a:solidFill>
-                        <a:srgbClr val="DCE1EC"/>
-                      </a:solidFill>
-                      <a:prstDash val="solid"/>
-                      <a:round/>
-                      <a:headEnd type="none" w="med" len="med"/>
-                      <a:tailEnd type="none" w="med" len="med"/>
-                    </a:lnB>
-                    <a:solidFill>
-                      <a:srgbClr val="FFF1E2"/>
-                    </a:solidFill>
-                  </a:tcPr>
-                </a:tc>
-              </a:tr>
-            </a:tbl>
-          </a:graphicData>
-        </a:graphic>
-      </p:graphicFrame>
       <p:sp>
         <p:nvSpPr>
           <p:cNvPr id="4" name="Преимущество 1"/>
@@ -6332,7 +3928,7 @@
             </a:avLst>
           </a:prstGeom>
           <a:solidFill>
-            <a:srgbClr val="24164F"/>
+            <a:srgbClr val="1B1480"/>
           </a:solidFill>
           <a:ln w="12700">
             <a:solidFill>
@@ -6341,7 +3937,7 @@
             <a:prstDash val="solid"/>
           </a:ln>
           <a:effectLst>
-            <a:outerShdw sx="100000" sy="100000" kx="0" ky="0" algn="bl" rotWithShape="0" blurRad="101600" dist="25400" dir="5400000">
+            <a:outerShdw blurRad="101600" dist="25400" dir="5400000" algn="bl" rotWithShape="0">
               <a:srgbClr val="1A1433">
                 <a:alpha val="8000"/>
               </a:srgbClr>
@@ -6351,7 +3947,7 @@
       </p:sp>
       <p:sp>
         <p:nvSpPr>
-          <p:cNvPr id="5" name="Преимущество 1: заголовок"/>
+          <p:cNvPr id="3" name="Преимущество 1: заголовок"/>
           <p:cNvSpPr txBox="1"/>
           <p:nvPr/>
         </p:nvSpPr>
@@ -6370,7 +3966,7 @@
           <a:bodyPr wrap="square" lIns="0" tIns="0" rIns="0" bIns="0" rtlCol="0" anchor="t"/>
           <a:lstStyle/>
           <a:p>
-            <a:pPr indent="0" marL="0">
+            <a:pPr marL="0" indent="0">
               <a:buNone/>
             </a:pPr>
             <a:r>
@@ -6406,7 +4002,7 @@
           <a:bodyPr wrap="square" lIns="0" tIns="0" rIns="0" bIns="0" rtlCol="0" anchor="t"/>
           <a:lstStyle/>
           <a:p>
-            <a:pPr indent="0" marL="0">
+            <a:pPr marL="0" indent="0">
               <a:buNone/>
             </a:pPr>
             <a:r>
@@ -6438,7 +4034,7 @@
             </a:avLst>
           </a:prstGeom>
           <a:solidFill>
-            <a:srgbClr val="24164F"/>
+            <a:srgbClr val="1B1480"/>
           </a:solidFill>
           <a:ln w="12700">
             <a:solidFill>
@@ -6447,7 +4043,7 @@
             <a:prstDash val="solid"/>
           </a:ln>
           <a:effectLst>
-            <a:outerShdw sx="100000" sy="100000" kx="0" ky="0" algn="bl" rotWithShape="0" blurRad="101600" dist="25400" dir="5400000">
+            <a:outerShdw blurRad="101600" dist="25400" dir="5400000" algn="bl" rotWithShape="0">
               <a:srgbClr val="1A1433">
                 <a:alpha val="8000"/>
               </a:srgbClr>
@@ -6476,7 +4072,7 @@
           <a:bodyPr wrap="square" lIns="0" tIns="0" rIns="0" bIns="0" rtlCol="0" anchor="t"/>
           <a:lstStyle/>
           <a:p>
-            <a:pPr indent="0" marL="0">
+            <a:pPr marL="0" indent="0">
               <a:buNone/>
             </a:pPr>
             <a:r>
@@ -6512,7 +4108,7 @@
           <a:bodyPr wrap="square" lIns="0" tIns="0" rIns="0" bIns="0" rtlCol="0" anchor="t"/>
           <a:lstStyle/>
           <a:p>
-            <a:pPr indent="0" marL="0">
+            <a:pPr marL="0" indent="0">
               <a:buNone/>
             </a:pPr>
             <a:r>
@@ -6547,7 +4143,7 @@
           </a:prstGeom>
           <a:extLst>
             <a:ext uri="{C572A759-6A51-4108-AA02-DFA0A04FC94B}">
-              <ma14:wrappingTextBoxFlag xmlns:ma14="http://schemas.microsoft.com/office/mac/drawingml/2011/main" val="0"/>
+              <ma14:wrappingTextBoxFlag xmlns="" xmlns:ma14="http://schemas.microsoft.com/office/mac/drawingml/2011/main" val="0"/>
             </a:ext>
           </a:extLst>
         </p:spPr>
@@ -6565,10 +4161,1000 @@
           <a:p>
             <a:pPr algn="r"/>
             <a:fld id="{F7021451-1387-4CA6-816F-3879F97B5CBC}" type="slidenum">
-              <a:rPr b="0" lang="en-US"/>
+              <a:rPr lang="en-US" b="0"/>
               <a:t>4</a:t>
             </a:fld>
             <a:endParaRPr lang="en-US"/>
+          </a:p>
+        </p:txBody>
+      </p:sp>
+      <p:sp>
+        <p:nvSpPr>
+          <p:cNvPr id="60" name="Альтернатива 1"/>
+          <p:cNvSpPr/>
+          <p:nvPr/>
+        </p:nvSpPr>
+        <p:spPr>
+          <a:xfrm>
+            <a:off x="548640" y="1280160"/>
+            <a:ext cx="2109155" cy="3566160"/>
+          </a:xfrm>
+          <a:prstGeom prst="roundRect">
+            <a:avLst>
+              <a:gd name="adj" fmla="val 5000"/>
+            </a:avLst>
+          </a:prstGeom>
+          <a:solidFill>
+            <a:srgbClr val="FFFFFF"/>
+          </a:solidFill>
+          <a:ln>
+            <a:noFill/>
+          </a:ln>
+          <a:effectLst>
+            <a:outerShdw blurRad="101600" dist="25400" dir="5400000" algn="bl" rotWithShape="0">
+              <a:srgbClr val="1A1433">
+                <a:alpha val="8000"/>
+              </a:srgbClr>
+            </a:outerShdw>
+          </a:effectLst>
+        </p:spPr>
+      </p:sp>
+      <p:sp>
+        <p:nvSpPr>
+          <p:cNvPr id="61" name="Альтернатива 1: текст"/>
+          <p:cNvSpPr txBox="1"/>
+          <p:nvPr/>
+        </p:nvSpPr>
+        <p:spPr>
+          <a:xfrm>
+            <a:off x="713232" y="1463040"/>
+            <a:ext cx="1779971" cy="3246120"/>
+          </a:xfrm>
+          <a:prstGeom prst="rect">
+            <a:avLst/>
+          </a:prstGeom>
+          <a:noFill/>
+        </p:spPr>
+        <p:txBody>
+          <a:bodyPr wrap="square" lIns="0" tIns="0" rIns="0" bIns="0" rtlCol="0" anchor="t">
+            <a:normAutofit/>
+          </a:bodyPr>
+          <a:lstStyle/>
+          <a:p>
+            <a:pPr algn="l" marL="0" indent="0">
+              <a:buNone/>
+            </a:pPr>
+            <a:r>
+              <a:rPr lang="ru-RU" sz="1500" b="1" dirty="0">
+                <a:solidFill>
+                  <a:srgbClr val="24164F"/>
+                </a:solidFill>
+              </a:rPr>
+              <a:t>Объявления</a:t>
+            </a:r>
+          </a:p>
+          <a:p>
+            <a:pPr algn="l" marL="0" indent="0">
+              <a:spcAft>
+                <a:spcPts val="800"/>
+              </a:spcAft>
+              <a:buNone/>
+            </a:pPr>
+            <a:r>
+              <a:rPr lang="ru-RU" sz="1100" dirty="0">
+                <a:solidFill>
+                  <a:srgbClr val="6B7385"/>
+                </a:solidFill>
+              </a:rPr>
+              <a:t>Kufar, соцсети</a:t>
+            </a:r>
+          </a:p>
+          <a:p>
+            <a:pPr algn="l" marL="0" indent="0">
+              <a:spcAft>
+                <a:spcPts val="300"/>
+              </a:spcAft>
+              <a:buNone/>
+            </a:pPr>
+            <a:r>
+              <a:rPr lang="ru-RU" sz="1050" b="1" dirty="0">
+                <a:solidFill>
+                  <a:srgbClr val="6B7385"/>
+                </a:solidFill>
+              </a:rPr>
+              <a:t>Сильные стороны</a:t>
+            </a:r>
+          </a:p>
+          <a:p>
+            <a:pPr algn="l" marL="171450" indent="-171450">
+              <a:spcAft>
+                <a:spcPts val="300"/>
+              </a:spcAft>
+              <a:buClr>
+                <a:srgbClr val="005DD6"/>
+              </a:buClr>
+              <a:buFont typeface="Arial"/>
+              <a:buChar char="+"/>
+            </a:pPr>
+            <a:r>
+              <a:rPr lang="ru-RU" sz="1200" dirty="0">
+                <a:solidFill>
+                  <a:srgbClr val="1A1433"/>
+                </a:solidFill>
+              </a:rPr>
+              <a:t>Много мастеров, найти быстро</a:t>
+            </a:r>
+          </a:p>
+          <a:p>
+            <a:pPr algn="l" marL="171450" indent="-171450">
+              <a:spcAft>
+                <a:spcPts val="300"/>
+              </a:spcAft>
+              <a:buClr>
+                <a:srgbClr val="005DD6"/>
+              </a:buClr>
+              <a:buFont typeface="Arial"/>
+              <a:buChar char="+"/>
+            </a:pPr>
+            <a:r>
+              <a:rPr lang="ru-RU" sz="1200" dirty="0">
+                <a:solidFill>
+                  <a:srgbClr val="1A1433"/>
+                </a:solidFill>
+              </a:rPr>
+              <a:t>Цены часто ниже рынка</a:t>
+            </a:r>
+          </a:p>
+          <a:p>
+            <a:pPr algn="l" marL="0" indent="0">
+              <a:spcBef>
+                <a:spcPts val="800"/>
+              </a:spcBef>
+              <a:spcAft>
+                <a:spcPts val="300"/>
+              </a:spcAft>
+              <a:buNone/>
+            </a:pPr>
+            <a:r>
+              <a:rPr lang="ru-RU" sz="1050" b="1" dirty="0">
+                <a:solidFill>
+                  <a:srgbClr val="6B7385"/>
+                </a:solidFill>
+              </a:rPr>
+              <a:t>Слабые стороны</a:t>
+            </a:r>
+          </a:p>
+          <a:p>
+            <a:pPr algn="l" marL="171450" indent="-171450">
+              <a:spcAft>
+                <a:spcPts val="300"/>
+              </a:spcAft>
+              <a:buClr>
+                <a:srgbClr val="C25E00"/>
+              </a:buClr>
+              <a:buFont typeface="Arial"/>
+              <a:buChar char="–"/>
+            </a:pPr>
+            <a:r>
+              <a:rPr lang="ru-RU" sz="1200" dirty="0">
+                <a:solidFill>
+                  <a:srgbClr val="1A1433"/>
+                </a:solidFill>
+              </a:rPr>
+              <a:t>Нет проверки и гарантии</a:t>
+            </a:r>
+          </a:p>
+          <a:p>
+            <a:pPr algn="l" marL="171450" indent="-171450">
+              <a:spcAft>
+                <a:spcPts val="300"/>
+              </a:spcAft>
+              <a:buClr>
+                <a:srgbClr val="C25E00"/>
+              </a:buClr>
+              <a:buFont typeface="Arial"/>
+              <a:buChar char="–"/>
+            </a:pPr>
+            <a:r>
+              <a:rPr lang="ru-RU" sz="1200" dirty="0">
+                <a:solidFill>
+                  <a:srgbClr val="1A1433"/>
+                </a:solidFill>
+              </a:rPr>
+              <a:t>Материалы клиент считает и покупает сам</a:t>
+            </a:r>
+          </a:p>
+        </p:txBody>
+      </p:sp>
+      <p:sp>
+        <p:nvSpPr>
+          <p:cNvPr id="62" name="Альтернатива 2"/>
+          <p:cNvSpPr/>
+          <p:nvPr/>
+        </p:nvSpPr>
+        <p:spPr>
+          <a:xfrm>
+            <a:off x="2794955" y="1280160"/>
+            <a:ext cx="2109155" cy="3566160"/>
+          </a:xfrm>
+          <a:prstGeom prst="roundRect">
+            <a:avLst>
+              <a:gd name="adj" fmla="val 5000"/>
+            </a:avLst>
+          </a:prstGeom>
+          <a:solidFill>
+            <a:srgbClr val="FFFFFF"/>
+          </a:solidFill>
+          <a:ln>
+            <a:noFill/>
+          </a:ln>
+          <a:effectLst>
+            <a:outerShdw blurRad="101600" dist="25400" dir="5400000" algn="bl" rotWithShape="0">
+              <a:srgbClr val="1A1433">
+                <a:alpha val="8000"/>
+              </a:srgbClr>
+            </a:outerShdw>
+          </a:effectLst>
+        </p:spPr>
+      </p:sp>
+      <p:sp>
+        <p:nvSpPr>
+          <p:cNvPr id="63" name="Альтернатива 2: текст"/>
+          <p:cNvSpPr txBox="1"/>
+          <p:nvPr/>
+        </p:nvSpPr>
+        <p:spPr>
+          <a:xfrm>
+            <a:off x="2959547" y="1463040"/>
+            <a:ext cx="1779971" cy="3246120"/>
+          </a:xfrm>
+          <a:prstGeom prst="rect">
+            <a:avLst/>
+          </a:prstGeom>
+          <a:noFill/>
+        </p:spPr>
+        <p:txBody>
+          <a:bodyPr wrap="square" lIns="0" tIns="0" rIns="0" bIns="0" rtlCol="0" anchor="t">
+            <a:normAutofit/>
+          </a:bodyPr>
+          <a:lstStyle/>
+          <a:p>
+            <a:pPr algn="l" marL="0" indent="0">
+              <a:buNone/>
+            </a:pPr>
+            <a:r>
+              <a:rPr lang="ru-RU" sz="1500" b="1" dirty="0">
+                <a:solidFill>
+                  <a:srgbClr val="24164F"/>
+                </a:solidFill>
+              </a:rPr>
+              <a:t>По знакомству</a:t>
+            </a:r>
+          </a:p>
+          <a:p>
+            <a:pPr algn="l" marL="0" indent="0">
+              <a:spcAft>
+                <a:spcPts val="800"/>
+              </a:spcAft>
+              <a:buNone/>
+            </a:pPr>
+            <a:r>
+              <a:rPr lang="ru-RU" sz="1100" dirty="0">
+                <a:solidFill>
+                  <a:srgbClr val="6B7385"/>
+                </a:solidFill>
+              </a:rPr>
+              <a:t>рекомендации друзей</a:t>
+            </a:r>
+          </a:p>
+          <a:p>
+            <a:pPr algn="l" marL="0" indent="0">
+              <a:spcAft>
+                <a:spcPts val="300"/>
+              </a:spcAft>
+              <a:buNone/>
+            </a:pPr>
+            <a:r>
+              <a:rPr lang="ru-RU" sz="1050" b="1" dirty="0">
+                <a:solidFill>
+                  <a:srgbClr val="6B7385"/>
+                </a:solidFill>
+              </a:rPr>
+              <a:t>Сильные стороны</a:t>
+            </a:r>
+          </a:p>
+          <a:p>
+            <a:pPr algn="l" marL="171450" indent="-171450">
+              <a:spcAft>
+                <a:spcPts val="300"/>
+              </a:spcAft>
+              <a:buClr>
+                <a:srgbClr val="005DD6"/>
+              </a:buClr>
+              <a:buFont typeface="Arial"/>
+              <a:buChar char="+"/>
+            </a:pPr>
+            <a:r>
+              <a:rPr lang="ru-RU" sz="1200" dirty="0">
+                <a:solidFill>
+                  <a:srgbClr val="1A1433"/>
+                </a:solidFill>
+              </a:rPr>
+              <a:t>Доверие к мастеру</a:t>
+            </a:r>
+          </a:p>
+          <a:p>
+            <a:pPr algn="l" marL="171450" indent="-171450">
+              <a:spcAft>
+                <a:spcPts val="300"/>
+              </a:spcAft>
+              <a:buClr>
+                <a:srgbClr val="005DD6"/>
+              </a:buClr>
+              <a:buFont typeface="Arial"/>
+              <a:buChar char="+"/>
+            </a:pPr>
+            <a:r>
+              <a:rPr lang="ru-RU" sz="1200" dirty="0">
+                <a:solidFill>
+                  <a:srgbClr val="1A1433"/>
+                </a:solidFill>
+              </a:rPr>
+              <a:t>Гибкая цена и сроки</a:t>
+            </a:r>
+          </a:p>
+          <a:p>
+            <a:pPr algn="l" marL="0" indent="0">
+              <a:spcBef>
+                <a:spcPts val="800"/>
+              </a:spcBef>
+              <a:spcAft>
+                <a:spcPts val="300"/>
+              </a:spcAft>
+              <a:buNone/>
+            </a:pPr>
+            <a:r>
+              <a:rPr lang="ru-RU" sz="1050" b="1" dirty="0">
+                <a:solidFill>
+                  <a:srgbClr val="6B7385"/>
+                </a:solidFill>
+              </a:rPr>
+              <a:t>Слабые стороны</a:t>
+            </a:r>
+          </a:p>
+          <a:p>
+            <a:pPr algn="l" marL="171450" indent="-171450">
+              <a:spcAft>
+                <a:spcPts val="300"/>
+              </a:spcAft>
+              <a:buClr>
+                <a:srgbClr val="C25E00"/>
+              </a:buClr>
+              <a:buFont typeface="Arial"/>
+              <a:buChar char="–"/>
+            </a:pPr>
+            <a:r>
+              <a:rPr lang="ru-RU" sz="1200" dirty="0">
+                <a:solidFill>
+                  <a:srgbClr val="1A1433"/>
+                </a:solidFill>
+              </a:rPr>
+              <a:t>Мастер пропал — спросить не с кого</a:t>
+            </a:r>
+          </a:p>
+          <a:p>
+            <a:pPr algn="l" marL="171450" indent="-171450">
+              <a:spcAft>
+                <a:spcPts val="300"/>
+              </a:spcAft>
+              <a:buClr>
+                <a:srgbClr val="C25E00"/>
+              </a:buClr>
+              <a:buFont typeface="Arial"/>
+              <a:buChar char="–"/>
+            </a:pPr>
+            <a:r>
+              <a:rPr lang="ru-RU" sz="1200" dirty="0">
+                <a:solidFill>
+                  <a:srgbClr val="1A1433"/>
+                </a:solidFill>
+              </a:rPr>
+              <a:t>Без договора и чеков</a:t>
+            </a:r>
+          </a:p>
+        </p:txBody>
+      </p:sp>
+      <p:sp>
+        <p:nvSpPr>
+          <p:cNvPr id="64" name="Альтернатива 3"/>
+          <p:cNvSpPr/>
+          <p:nvPr/>
+        </p:nvSpPr>
+        <p:spPr>
+          <a:xfrm>
+            <a:off x="5041270" y="1280160"/>
+            <a:ext cx="2109155" cy="3566160"/>
+          </a:xfrm>
+          <a:prstGeom prst="roundRect">
+            <a:avLst>
+              <a:gd name="adj" fmla="val 5000"/>
+            </a:avLst>
+          </a:prstGeom>
+          <a:solidFill>
+            <a:srgbClr val="FFFFFF"/>
+          </a:solidFill>
+          <a:ln>
+            <a:noFill/>
+          </a:ln>
+          <a:effectLst>
+            <a:outerShdw blurRad="101600" dist="25400" dir="5400000" algn="bl" rotWithShape="0">
+              <a:srgbClr val="1A1433">
+                <a:alpha val="8000"/>
+              </a:srgbClr>
+            </a:outerShdw>
+          </a:effectLst>
+        </p:spPr>
+      </p:sp>
+      <p:sp>
+        <p:nvSpPr>
+          <p:cNvPr id="65" name="Альтернатива 3: текст"/>
+          <p:cNvSpPr txBox="1"/>
+          <p:nvPr/>
+        </p:nvSpPr>
+        <p:spPr>
+          <a:xfrm>
+            <a:off x="5205862" y="1463040"/>
+            <a:ext cx="1779971" cy="3246120"/>
+          </a:xfrm>
+          <a:prstGeom prst="rect">
+            <a:avLst/>
+          </a:prstGeom>
+          <a:noFill/>
+        </p:spPr>
+        <p:txBody>
+          <a:bodyPr wrap="square" lIns="0" tIns="0" rIns="0" bIns="0" rtlCol="0" anchor="t">
+            <a:normAutofit/>
+          </a:bodyPr>
+          <a:lstStyle/>
+          <a:p>
+            <a:pPr algn="l" marL="0" indent="0">
+              <a:buNone/>
+            </a:pPr>
+            <a:r>
+              <a:rPr lang="ru-RU" sz="1500" b="1" dirty="0">
+                <a:solidFill>
+                  <a:srgbClr val="24164F"/>
+                </a:solidFill>
+              </a:rPr>
+              <a:t>Площадки услуг</a:t>
+            </a:r>
+          </a:p>
+          <a:p>
+            <a:pPr algn="l" marL="0" indent="0">
+              <a:spcAft>
+                <a:spcPts val="800"/>
+              </a:spcAft>
+              <a:buNone/>
+            </a:pPr>
+            <a:r>
+              <a:rPr lang="ru-RU" sz="1100" dirty="0">
+                <a:solidFill>
+                  <a:srgbClr val="6B7385"/>
+                </a:solidFill>
+              </a:rPr>
+              <a:t>Onliner Услуги</a:t>
+            </a:r>
+          </a:p>
+          <a:p>
+            <a:pPr algn="l" marL="0" indent="0">
+              <a:spcAft>
+                <a:spcPts val="300"/>
+              </a:spcAft>
+              <a:buNone/>
+            </a:pPr>
+            <a:r>
+              <a:rPr lang="ru-RU" sz="1050" b="1" dirty="0">
+                <a:solidFill>
+                  <a:srgbClr val="6B7385"/>
+                </a:solidFill>
+              </a:rPr>
+              <a:t>Сильные стороны</a:t>
+            </a:r>
+          </a:p>
+          <a:p>
+            <a:pPr algn="l" marL="171450" indent="-171450">
+              <a:spcAft>
+                <a:spcPts val="300"/>
+              </a:spcAft>
+              <a:buClr>
+                <a:srgbClr val="005DD6"/>
+              </a:buClr>
+              <a:buFont typeface="Arial"/>
+              <a:buChar char="+"/>
+            </a:pPr>
+            <a:r>
+              <a:rPr lang="ru-RU" sz="1200" dirty="0">
+                <a:solidFill>
+                  <a:srgbClr val="1A1433"/>
+                </a:solidFill>
+              </a:rPr>
+              <a:t>Отзывы и рейтинги</a:t>
+            </a:r>
+          </a:p>
+          <a:p>
+            <a:pPr algn="l" marL="171450" indent="-171450">
+              <a:spcAft>
+                <a:spcPts val="300"/>
+              </a:spcAft>
+              <a:buClr>
+                <a:srgbClr val="005DD6"/>
+              </a:buClr>
+              <a:buFont typeface="Arial"/>
+              <a:buChar char="+"/>
+            </a:pPr>
+            <a:r>
+              <a:rPr lang="ru-RU" sz="1200" dirty="0">
+                <a:solidFill>
+                  <a:srgbClr val="1A1433"/>
+                </a:solidFill>
+              </a:rPr>
+              <a:t>Легко сравнить предложения</a:t>
+            </a:r>
+          </a:p>
+          <a:p>
+            <a:pPr algn="l" marL="0" indent="0">
+              <a:spcBef>
+                <a:spcPts val="800"/>
+              </a:spcBef>
+              <a:spcAft>
+                <a:spcPts val="300"/>
+              </a:spcAft>
+              <a:buNone/>
+            </a:pPr>
+            <a:r>
+              <a:rPr lang="ru-RU" sz="1050" b="1" dirty="0">
+                <a:solidFill>
+                  <a:srgbClr val="6B7385"/>
+                </a:solidFill>
+              </a:rPr>
+              <a:t>Слабые стороны</a:t>
+            </a:r>
+          </a:p>
+          <a:p>
+            <a:pPr algn="l" marL="171450" indent="-171450">
+              <a:spcAft>
+                <a:spcPts val="300"/>
+              </a:spcAft>
+              <a:buClr>
+                <a:srgbClr val="C25E00"/>
+              </a:buClr>
+              <a:buFont typeface="Arial"/>
+              <a:buChar char="–"/>
+            </a:pPr>
+            <a:r>
+              <a:rPr lang="ru-RU" sz="1200" dirty="0">
+                <a:solidFill>
+                  <a:srgbClr val="1A1433"/>
+                </a:solidFill>
+              </a:rPr>
+              <a:t>Договор с мастером — напрямую</a:t>
+            </a:r>
+          </a:p>
+          <a:p>
+            <a:pPr algn="l" marL="171450" indent="-171450">
+              <a:spcAft>
+                <a:spcPts val="300"/>
+              </a:spcAft>
+              <a:buClr>
+                <a:srgbClr val="C25E00"/>
+              </a:buClr>
+              <a:buFont typeface="Arial"/>
+              <a:buChar char="–"/>
+            </a:pPr>
+            <a:r>
+              <a:rPr lang="ru-RU" sz="1200" dirty="0">
+                <a:solidFill>
+                  <a:srgbClr val="1A1433"/>
+                </a:solidFill>
+              </a:rPr>
+              <a:t>Материалы — отдельно, в другом месте</a:t>
+            </a:r>
+          </a:p>
+        </p:txBody>
+      </p:sp>
+      <p:sp>
+        <p:nvSpPr>
+          <p:cNvPr id="66" name="Альтернатива 4"/>
+          <p:cNvSpPr/>
+          <p:nvPr/>
+        </p:nvSpPr>
+        <p:spPr>
+          <a:xfrm>
+            <a:off x="7287585" y="1280160"/>
+            <a:ext cx="2109155" cy="3566160"/>
+          </a:xfrm>
+          <a:prstGeom prst="roundRect">
+            <a:avLst>
+              <a:gd name="adj" fmla="val 5000"/>
+            </a:avLst>
+          </a:prstGeom>
+          <a:solidFill>
+            <a:srgbClr val="FFFFFF"/>
+          </a:solidFill>
+          <a:ln>
+            <a:noFill/>
+          </a:ln>
+          <a:effectLst>
+            <a:outerShdw blurRad="101600" dist="25400" dir="5400000" algn="bl" rotWithShape="0">
+              <a:srgbClr val="1A1433">
+                <a:alpha val="8000"/>
+              </a:srgbClr>
+            </a:outerShdw>
+          </a:effectLst>
+        </p:spPr>
+      </p:sp>
+      <p:sp>
+        <p:nvSpPr>
+          <p:cNvPr id="67" name="Альтернатива 4: текст"/>
+          <p:cNvSpPr txBox="1"/>
+          <p:nvPr/>
+        </p:nvSpPr>
+        <p:spPr>
+          <a:xfrm>
+            <a:off x="7452177" y="1463040"/>
+            <a:ext cx="1779971" cy="3246120"/>
+          </a:xfrm>
+          <a:prstGeom prst="rect">
+            <a:avLst/>
+          </a:prstGeom>
+          <a:noFill/>
+        </p:spPr>
+        <p:txBody>
+          <a:bodyPr wrap="square" lIns="0" tIns="0" rIns="0" bIns="0" rtlCol="0" anchor="t">
+            <a:normAutofit/>
+          </a:bodyPr>
+          <a:lstStyle/>
+          <a:p>
+            <a:pPr algn="l" marL="0" indent="0">
+              <a:buNone/>
+            </a:pPr>
+            <a:r>
+              <a:rPr lang="ru-RU" sz="1500" b="1" dirty="0">
+                <a:solidFill>
+                  <a:srgbClr val="24164F"/>
+                </a:solidFill>
+              </a:rPr>
+              <a:t>Услуги ОМА сейчас</a:t>
+            </a:r>
+          </a:p>
+          <a:p>
+            <a:pPr algn="l" marL="0" indent="0">
+              <a:spcAft>
+                <a:spcPts val="800"/>
+              </a:spcAft>
+              <a:buNone/>
+            </a:pPr>
+            <a:r>
+              <a:rPr lang="ru-RU" sz="1100" dirty="0">
+                <a:solidFill>
+                  <a:srgbClr val="6B7385"/>
+                </a:solidFill>
+              </a:rPr>
+              <a:t>мастера-партнёры на oma.by</a:t>
+            </a:r>
+          </a:p>
+          <a:p>
+            <a:pPr algn="l" marL="0" indent="0">
+              <a:spcAft>
+                <a:spcPts val="300"/>
+              </a:spcAft>
+              <a:buNone/>
+            </a:pPr>
+            <a:r>
+              <a:rPr lang="ru-RU" sz="1050" b="1" dirty="0">
+                <a:solidFill>
+                  <a:srgbClr val="6B7385"/>
+                </a:solidFill>
+              </a:rPr>
+              <a:t>Сильные стороны</a:t>
+            </a:r>
+          </a:p>
+          <a:p>
+            <a:pPr algn="l" marL="171450" indent="-171450">
+              <a:spcAft>
+                <a:spcPts val="300"/>
+              </a:spcAft>
+              <a:buClr>
+                <a:srgbClr val="005DD6"/>
+              </a:buClr>
+              <a:buFont typeface="Arial"/>
+              <a:buChar char="+"/>
+            </a:pPr>
+            <a:r>
+              <a:rPr lang="ru-RU" sz="1200" dirty="0">
+                <a:solidFill>
+                  <a:srgbClr val="1A1433"/>
+                </a:solidFill>
+              </a:rPr>
+              <a:t>Бренд ОМА и проверенные партнёры</a:t>
+            </a:r>
+          </a:p>
+          <a:p>
+            <a:pPr algn="l" marL="171450" indent="-171450">
+              <a:spcAft>
+                <a:spcPts val="300"/>
+              </a:spcAft>
+              <a:buClr>
+                <a:srgbClr val="005DD6"/>
+              </a:buClr>
+              <a:buFont typeface="Arial"/>
+              <a:buChar char="+"/>
+            </a:pPr>
+            <a:r>
+              <a:rPr lang="ru-RU" sz="1200" dirty="0">
+                <a:solidFill>
+                  <a:srgbClr val="1A1433"/>
+                </a:solidFill>
+              </a:rPr>
+              <a:t>Рядом с покупкой товара</a:t>
+            </a:r>
+          </a:p>
+          <a:p>
+            <a:pPr algn="l" marL="0" indent="0">
+              <a:spcBef>
+                <a:spcPts val="800"/>
+              </a:spcBef>
+              <a:spcAft>
+                <a:spcPts val="300"/>
+              </a:spcAft>
+              <a:buNone/>
+            </a:pPr>
+            <a:r>
+              <a:rPr lang="ru-RU" sz="1050" b="1" dirty="0">
+                <a:solidFill>
+                  <a:srgbClr val="6B7385"/>
+                </a:solidFill>
+              </a:rPr>
+              <a:t>Слабые стороны</a:t>
+            </a:r>
+          </a:p>
+          <a:p>
+            <a:pPr algn="l" marL="171450" indent="-171450">
+              <a:spcAft>
+                <a:spcPts val="300"/>
+              </a:spcAft>
+              <a:buClr>
+                <a:srgbClr val="C25E00"/>
+              </a:buClr>
+              <a:buFont typeface="Arial"/>
+              <a:buChar char="–"/>
+            </a:pPr>
+            <a:r>
+              <a:rPr lang="ru-RU" sz="1200" dirty="0">
+                <a:solidFill>
+                  <a:srgbClr val="1A1433"/>
+                </a:solidFill>
+              </a:rPr>
+              <a:t>Товары и работы — отдельные заказы</a:t>
+            </a:r>
+          </a:p>
+          <a:p>
+            <a:pPr algn="l" marL="171450" indent="-171450">
+              <a:spcAft>
+                <a:spcPts val="300"/>
+              </a:spcAft>
+              <a:buClr>
+                <a:srgbClr val="C25E00"/>
+              </a:buClr>
+              <a:buFont typeface="Arial"/>
+              <a:buChar char="–"/>
+            </a:pPr>
+            <a:r>
+              <a:rPr lang="ru-RU" sz="1200" dirty="0">
+                <a:solidFill>
+                  <a:srgbClr val="1A1433"/>
+                </a:solidFill>
+              </a:rPr>
+              <a:t>Без поэтапной приёмки в приложении</a:t>
+            </a:r>
+          </a:p>
+        </p:txBody>
+      </p:sp>
+      <p:sp>
+        <p:nvSpPr>
+          <p:cNvPr id="68" name="Альтернатива 5"/>
+          <p:cNvSpPr/>
+          <p:nvPr/>
+        </p:nvSpPr>
+        <p:spPr>
+          <a:xfrm>
+            <a:off x="9533900" y="1280160"/>
+            <a:ext cx="2109155" cy="3566160"/>
+          </a:xfrm>
+          <a:prstGeom prst="roundRect">
+            <a:avLst>
+              <a:gd name="adj" fmla="val 5000"/>
+            </a:avLst>
+          </a:prstGeom>
+          <a:solidFill>
+            <a:srgbClr val="1B1480"/>
+          </a:solidFill>
+          <a:ln>
+            <a:noFill/>
+          </a:ln>
+          <a:effectLst>
+            <a:outerShdw blurRad="101600" dist="25400" dir="5400000" algn="bl" rotWithShape="0">
+              <a:srgbClr val="1A1433">
+                <a:alpha val="8000"/>
+              </a:srgbClr>
+            </a:outerShdw>
+          </a:effectLst>
+        </p:spPr>
+      </p:sp>
+      <p:sp>
+        <p:nvSpPr>
+          <p:cNvPr id="69" name="Альтернатива 5: текст"/>
+          <p:cNvSpPr txBox="1"/>
+          <p:nvPr/>
+        </p:nvSpPr>
+        <p:spPr>
+          <a:xfrm>
+            <a:off x="9698492" y="1463040"/>
+            <a:ext cx="1779971" cy="3246120"/>
+          </a:xfrm>
+          <a:prstGeom prst="rect">
+            <a:avLst/>
+          </a:prstGeom>
+          <a:noFill/>
+        </p:spPr>
+        <p:txBody>
+          <a:bodyPr wrap="square" lIns="0" tIns="0" rIns="0" bIns="0" rtlCol="0" anchor="t">
+            <a:normAutofit/>
+          </a:bodyPr>
+          <a:lstStyle/>
+          <a:p>
+            <a:pPr algn="l" marL="0" indent="0">
+              <a:buNone/>
+            </a:pPr>
+            <a:r>
+              <a:rPr lang="ru-RU" sz="1500" b="1" dirty="0">
+                <a:solidFill>
+                  <a:srgbClr val="FFFFFF"/>
+                </a:solidFill>
+              </a:rPr>
+              <a:t>ОМА для дома</a:t>
+            </a:r>
+          </a:p>
+          <a:p>
+            <a:pPr algn="l" marL="0" indent="0">
+              <a:spcAft>
+                <a:spcPts val="800"/>
+              </a:spcAft>
+              <a:buNone/>
+            </a:pPr>
+            <a:r>
+              <a:rPr lang="ru-RU" sz="1100" dirty="0">
+                <a:solidFill>
+                  <a:srgbClr val="C9BFF0"/>
+                </a:solidFill>
+              </a:rPr>
+              <a:t>наше решение</a:t>
+            </a:r>
+          </a:p>
+          <a:p>
+            <a:pPr algn="l" marL="0" indent="0">
+              <a:spcAft>
+                <a:spcPts val="300"/>
+              </a:spcAft>
+              <a:buNone/>
+            </a:pPr>
+            <a:r>
+              <a:rPr lang="ru-RU" sz="1050" b="1" dirty="0">
+                <a:solidFill>
+                  <a:srgbClr val="FF9A3D"/>
+                </a:solidFill>
+              </a:rPr>
+              <a:t>Сильные стороны</a:t>
+            </a:r>
+          </a:p>
+          <a:p>
+            <a:pPr algn="l" marL="171450" indent="-171450">
+              <a:spcAft>
+                <a:spcPts val="300"/>
+              </a:spcAft>
+              <a:buClr>
+                <a:srgbClr val="FF9A3D"/>
+              </a:buClr>
+              <a:buFont typeface="Arial"/>
+              <a:buChar char="+"/>
+            </a:pPr>
+            <a:r>
+              <a:rPr lang="ru-RU" sz="1200" dirty="0">
+                <a:solidFill>
+                  <a:srgbClr val="FFFFFF"/>
+                </a:solidFill>
+              </a:rPr>
+              <a:t>Смета из товаров ОМА, материалы к дате работ</a:t>
+            </a:r>
+          </a:p>
+          <a:p>
+            <a:pPr algn="l" marL="171450" indent="-171450">
+              <a:spcAft>
+                <a:spcPts val="300"/>
+              </a:spcAft>
+              <a:buClr>
+                <a:srgbClr val="FF9A3D"/>
+              </a:buClr>
+              <a:buFont typeface="Arial"/>
+              <a:buChar char="+"/>
+            </a:pPr>
+            <a:r>
+              <a:rPr lang="ru-RU" sz="1200" dirty="0">
+                <a:solidFill>
+                  <a:srgbClr val="FFFFFF"/>
+                </a:solidFill>
+              </a:rPr>
+              <a:t>Один ответственный, оплата этапа после приёмки</a:t>
+            </a:r>
+          </a:p>
+          <a:p>
+            <a:pPr algn="l" marL="0" indent="0">
+              <a:spcBef>
+                <a:spcPts val="800"/>
+              </a:spcBef>
+              <a:spcAft>
+                <a:spcPts val="300"/>
+              </a:spcAft>
+              <a:buNone/>
+            </a:pPr>
+            <a:r>
+              <a:rPr lang="ru-RU" sz="1050" b="1" dirty="0">
+                <a:solidFill>
+                  <a:srgbClr val="FF9A3D"/>
+                </a:solidFill>
+              </a:rPr>
+              <a:t>Слабые стороны</a:t>
+            </a:r>
+          </a:p>
+          <a:p>
+            <a:pPr algn="l" marL="171450" indent="-171450">
+              <a:spcAft>
+                <a:spcPts val="300"/>
+              </a:spcAft>
+              <a:buClr>
+                <a:srgbClr val="C9BFF0"/>
+              </a:buClr>
+              <a:buFont typeface="Arial"/>
+              <a:buChar char="–"/>
+            </a:pPr>
+            <a:r>
+              <a:rPr lang="ru-RU" sz="1200" dirty="0">
+                <a:solidFill>
+                  <a:srgbClr val="FFFFFF"/>
+                </a:solidFill>
+              </a:rPr>
+              <a:t>Пилот: пока Минск и санузлы</a:t>
+            </a:r>
+          </a:p>
+          <a:p>
+            <a:pPr algn="l" marL="171450" indent="-171450">
+              <a:spcAft>
+                <a:spcPts val="300"/>
+              </a:spcAft>
+              <a:buClr>
+                <a:srgbClr val="C9BFF0"/>
+              </a:buClr>
+              <a:buFont typeface="Arial"/>
+              <a:buChar char="–"/>
+            </a:pPr>
+            <a:r>
+              <a:rPr lang="ru-RU" sz="1200" dirty="0">
+                <a:solidFill>
+                  <a:srgbClr val="FFFFFF"/>
+                </a:solidFill>
+              </a:rPr>
+              <a:t>Цена работ на уровне рынка, не ниже</a:t>
+            </a:r>
           </a:p>
         </p:txBody>
       </p:sp>
@@ -6600,9 +5186,11 @@
       <p:sp>
         <p:nvSpPr>
           <p:cNvPr id="2" name="Text 0"/>
-          <p:cNvSpPr/>
+          <p:cNvSpPr>
+            <a:spLocks noGrp="1"/>
+          </p:cNvSpPr>
           <p:nvPr>
-            <p:ph idx="100" type="title" hasCustomPrompt="1"/>
+            <p:ph type="title" idx="100" hasCustomPrompt="1"/>
           </p:nvPr>
         </p:nvSpPr>
         <p:spPr>
@@ -6620,7 +5208,7 @@
           <a:bodyPr wrap="square" lIns="0" tIns="0" rIns="0" bIns="0" rtlCol="0" anchor="ctr"/>
           <a:lstStyle/>
           <a:p>
-            <a:pPr algn="l" indent="0" marL="0">
+            <a:pPr marL="0" indent="0" algn="l">
               <a:buNone/>
             </a:pPr>
             <a:r>
@@ -6637,14 +5225,14 @@
       </p:sp>
       <p:pic>
         <p:nvPicPr>
-          <p:cNvPr id="3" name="Клиент: иконка" descr="/tmp/claude-0/-home-user-hackatonoma/e77f010d-b8c6-588a-a375-3aa4548717b1/scratchpad/deckgen/assets/home.png">    </p:cNvPr>
+          <p:cNvPr id="3" name="Клиент: иконка" descr="/tmp/claude-0/-home-user-hackatonoma/e77f010d-b8c6-588a-a375-3aa4548717b1/scratchpad/deckgen/assets/home.png"/>
           <p:cNvPicPr>
             <a:picLocks noChangeAspect="1"/>
           </p:cNvPicPr>
           <p:nvPr/>
         </p:nvPicPr>
         <p:blipFill>
-          <a:blip r:embed="rId1"/>
+          <a:blip r:embed="rId3"/>
           <a:stretch>
             <a:fillRect/>
           </a:stretch>
@@ -6680,7 +5268,7 @@
           <a:bodyPr wrap="square" lIns="0" tIns="0" rIns="0" bIns="0" rtlCol="0" anchor="t"/>
           <a:lstStyle/>
           <a:p>
-            <a:pPr algn="ctr" indent="0" marL="0">
+            <a:pPr marL="0" indent="0" algn="ctr">
               <a:buNone/>
             </a:pPr>
             <a:r>
@@ -6721,7 +5309,7 @@
             <a:prstDash val="solid"/>
           </a:ln>
           <a:effectLst>
-            <a:outerShdw sx="100000" sy="100000" kx="0" ky="0" algn="bl" rotWithShape="0" blurRad="101600" dist="25400" dir="5400000">
+            <a:outerShdw blurRad="101600" dist="25400" dir="5400000" algn="bl" rotWithShape="0">
               <a:srgbClr val="1A1433">
                 <a:alpha val="8000"/>
               </a:srgbClr>
@@ -6775,7 +5363,7 @@
           <a:bodyPr wrap="square" lIns="0" tIns="0" rIns="0" bIns="0" rtlCol="0" anchor="ctr"/>
           <a:lstStyle/>
           <a:p>
-            <a:pPr algn="ctr" indent="0" marL="0">
+            <a:pPr marL="0" indent="0" algn="ctr">
               <a:buNone/>
             </a:pPr>
             <a:r>
@@ -6811,7 +5399,7 @@
           <a:bodyPr wrap="square" lIns="0" tIns="0" rIns="0" bIns="0" rtlCol="0" anchor="ctr"/>
           <a:lstStyle/>
           <a:p>
-            <a:pPr indent="0" marL="0">
+            <a:pPr marL="0" indent="0">
               <a:buNone/>
             </a:pPr>
             <a:r>
@@ -6847,7 +5435,7 @@
           <a:bodyPr wrap="square" lIns="0" tIns="0" rIns="0" bIns="0" rtlCol="0" anchor="t"/>
           <a:lstStyle/>
           <a:p>
-            <a:pPr indent="0" marL="0">
+            <a:pPr marL="0" indent="0">
               <a:buNone/>
             </a:pPr>
             <a:r>
@@ -6888,7 +5476,7 @@
             <a:prstDash val="solid"/>
           </a:ln>
           <a:effectLst>
-            <a:outerShdw sx="100000" sy="100000" kx="0" ky="0" algn="bl" rotWithShape="0" blurRad="101600" dist="25400" dir="5400000">
+            <a:outerShdw blurRad="101600" dist="25400" dir="5400000" algn="bl" rotWithShape="0">
               <a:srgbClr val="1A1433">
                 <a:alpha val="8000"/>
               </a:srgbClr>
@@ -6942,7 +5530,7 @@
           <a:bodyPr wrap="square" lIns="0" tIns="0" rIns="0" bIns="0" rtlCol="0" anchor="ctr"/>
           <a:lstStyle/>
           <a:p>
-            <a:pPr algn="ctr" indent="0" marL="0">
+            <a:pPr marL="0" indent="0" algn="ctr">
               <a:buNone/>
             </a:pPr>
             <a:r>
@@ -6978,7 +5566,7 @@
           <a:bodyPr wrap="square" lIns="0" tIns="0" rIns="0" bIns="0" rtlCol="0" anchor="ctr"/>
           <a:lstStyle/>
           <a:p>
-            <a:pPr indent="0" marL="0">
+            <a:pPr marL="0" indent="0">
               <a:buNone/>
             </a:pPr>
             <a:r>
@@ -7014,7 +5602,7 @@
           <a:bodyPr wrap="square" lIns="0" tIns="0" rIns="0" bIns="0" rtlCol="0" anchor="t"/>
           <a:lstStyle/>
           <a:p>
-            <a:pPr indent="0" marL="0">
+            <a:pPr marL="0" indent="0">
               <a:buNone/>
             </a:pPr>
             <a:r>
@@ -7055,7 +5643,7 @@
             <a:prstDash val="solid"/>
           </a:ln>
           <a:effectLst>
-            <a:outerShdw sx="100000" sy="100000" kx="0" ky="0" algn="bl" rotWithShape="0" blurRad="101600" dist="25400" dir="5400000">
+            <a:outerShdw blurRad="101600" dist="25400" dir="5400000" algn="bl" rotWithShape="0">
               <a:srgbClr val="1A1433">
                 <a:alpha val="8000"/>
               </a:srgbClr>
@@ -7109,7 +5697,7 @@
           <a:bodyPr wrap="square" lIns="0" tIns="0" rIns="0" bIns="0" rtlCol="0" anchor="ctr"/>
           <a:lstStyle/>
           <a:p>
-            <a:pPr algn="ctr" indent="0" marL="0">
+            <a:pPr marL="0" indent="0" algn="ctr">
               <a:buNone/>
             </a:pPr>
             <a:r>
@@ -7145,7 +5733,7 @@
           <a:bodyPr wrap="square" lIns="0" tIns="0" rIns="0" bIns="0" rtlCol="0" anchor="ctr"/>
           <a:lstStyle/>
           <a:p>
-            <a:pPr indent="0" marL="0">
+            <a:pPr marL="0" indent="0">
               <a:buNone/>
             </a:pPr>
             <a:r>
@@ -7181,7 +5769,7 @@
           <a:bodyPr wrap="square" lIns="0" tIns="0" rIns="0" bIns="0" rtlCol="0" anchor="t"/>
           <a:lstStyle/>
           <a:p>
-            <a:pPr indent="0" marL="0">
+            <a:pPr marL="0" indent="0">
               <a:buNone/>
             </a:pPr>
             <a:r>
@@ -7222,7 +5810,7 @@
             <a:prstDash val="solid"/>
           </a:ln>
           <a:effectLst>
-            <a:outerShdw sx="100000" sy="100000" kx="0" ky="0" algn="bl" rotWithShape="0" blurRad="101600" dist="25400" dir="5400000">
+            <a:outerShdw blurRad="101600" dist="25400" dir="5400000" algn="bl" rotWithShape="0">
               <a:srgbClr val="1A1433">
                 <a:alpha val="8000"/>
               </a:srgbClr>
@@ -7276,7 +5864,7 @@
           <a:bodyPr wrap="square" lIns="0" tIns="0" rIns="0" bIns="0" rtlCol="0" anchor="ctr"/>
           <a:lstStyle/>
           <a:p>
-            <a:pPr algn="ctr" indent="0" marL="0">
+            <a:pPr marL="0" indent="0" algn="ctr">
               <a:buNone/>
             </a:pPr>
             <a:r>
@@ -7312,7 +5900,7 @@
           <a:bodyPr wrap="square" lIns="0" tIns="0" rIns="0" bIns="0" rtlCol="0" anchor="ctr"/>
           <a:lstStyle/>
           <a:p>
-            <a:pPr indent="0" marL="0">
+            <a:pPr marL="0" indent="0">
               <a:buNone/>
             </a:pPr>
             <a:r>
@@ -7348,7 +5936,7 @@
           <a:bodyPr wrap="square" lIns="0" tIns="0" rIns="0" bIns="0" rtlCol="0" anchor="t"/>
           <a:lstStyle/>
           <a:p>
-            <a:pPr indent="0" marL="0">
+            <a:pPr marL="0" indent="0">
               <a:buNone/>
             </a:pPr>
             <a:r>
@@ -7389,7 +5977,7 @@
             <a:prstDash val="solid"/>
           </a:ln>
           <a:effectLst>
-            <a:outerShdw sx="100000" sy="100000" kx="0" ky="0" algn="bl" rotWithShape="0" blurRad="101600" dist="25400" dir="5400000">
+            <a:outerShdw blurRad="101600" dist="25400" dir="5400000" algn="bl" rotWithShape="0">
               <a:srgbClr val="1A1433">
                 <a:alpha val="8000"/>
               </a:srgbClr>
@@ -7443,7 +6031,7 @@
           <a:bodyPr wrap="square" lIns="0" tIns="0" rIns="0" bIns="0" rtlCol="0" anchor="ctr"/>
           <a:lstStyle/>
           <a:p>
-            <a:pPr algn="ctr" indent="0" marL="0">
+            <a:pPr marL="0" indent="0" algn="ctr">
               <a:buNone/>
             </a:pPr>
             <a:r>
@@ -7479,7 +6067,7 @@
           <a:bodyPr wrap="square" lIns="0" tIns="0" rIns="0" bIns="0" rtlCol="0" anchor="ctr"/>
           <a:lstStyle/>
           <a:p>
-            <a:pPr indent="0" marL="0">
+            <a:pPr marL="0" indent="0">
               <a:buNone/>
             </a:pPr>
             <a:r>
@@ -7515,7 +6103,7 @@
           <a:bodyPr wrap="square" lIns="0" tIns="0" rIns="0" bIns="0" rtlCol="0" anchor="t"/>
           <a:lstStyle/>
           <a:p>
-            <a:pPr indent="0" marL="0">
+            <a:pPr marL="0" indent="0">
               <a:buNone/>
             </a:pPr>
             <a:r>
@@ -7532,14 +6120,14 @@
       </p:sp>
       <p:pic>
         <p:nvPicPr>
-          <p:cNvPr id="30" name="Мастер: иконка" descr="/tmp/claude-0/-home-user-hackatonoma/e77f010d-b8c6-588a-a375-3aa4548717b1/scratchpad/deckgen/assets/briefcase.png">    </p:cNvPr>
+          <p:cNvPr id="30" name="Мастер: иконка" descr="/tmp/claude-0/-home-user-hackatonoma/e77f010d-b8c6-588a-a375-3aa4548717b1/scratchpad/deckgen/assets/briefcase.png"/>
           <p:cNvPicPr>
             <a:picLocks noChangeAspect="1"/>
           </p:cNvPicPr>
           <p:nvPr/>
         </p:nvPicPr>
         <p:blipFill>
-          <a:blip r:embed="rId2"/>
+          <a:blip r:embed="rId4"/>
           <a:stretch>
             <a:fillRect/>
           </a:stretch>
@@ -7575,7 +6163,7 @@
           <a:bodyPr wrap="square" lIns="0" tIns="0" rIns="0" bIns="0" rtlCol="0" anchor="t"/>
           <a:lstStyle/>
           <a:p>
-            <a:pPr algn="ctr" indent="0" marL="0">
+            <a:pPr marL="0" indent="0" algn="ctr">
               <a:buNone/>
             </a:pPr>
             <a:r>
@@ -7616,7 +6204,7 @@
             <a:prstDash val="solid"/>
           </a:ln>
           <a:effectLst>
-            <a:outerShdw sx="100000" sy="100000" kx="0" ky="0" algn="bl" rotWithShape="0" blurRad="101600" dist="25400" dir="5400000">
+            <a:outerShdw blurRad="101600" dist="25400" dir="5400000" algn="bl" rotWithShape="0">
               <a:srgbClr val="1A1433">
                 <a:alpha val="8000"/>
               </a:srgbClr>
@@ -7639,11 +6227,11 @@
             <a:avLst/>
           </a:prstGeom>
           <a:solidFill>
-            <a:srgbClr val="005DD6"/>
+            <a:srgbClr val="1B1480"/>
           </a:solidFill>
           <a:ln w="12700">
             <a:solidFill>
-              <a:srgbClr val="005DD6"/>
+              <a:srgbClr val="1B1480"/>
             </a:solidFill>
             <a:prstDash val="solid"/>
           </a:ln>
@@ -7670,7 +6258,7 @@
           <a:bodyPr wrap="square" lIns="0" tIns="0" rIns="0" bIns="0" rtlCol="0" anchor="ctr"/>
           <a:lstStyle/>
           <a:p>
-            <a:pPr algn="ctr" indent="0" marL="0">
+            <a:pPr marL="0" indent="0" algn="ctr">
               <a:buNone/>
             </a:pPr>
             <a:r>
@@ -7706,7 +6294,7 @@
           <a:bodyPr wrap="square" lIns="0" tIns="0" rIns="0" bIns="0" rtlCol="0" anchor="ctr"/>
           <a:lstStyle/>
           <a:p>
-            <a:pPr indent="0" marL="0">
+            <a:pPr marL="0" indent="0">
               <a:buNone/>
             </a:pPr>
             <a:r>
@@ -7742,7 +6330,7 @@
           <a:bodyPr wrap="square" lIns="0" tIns="0" rIns="0" bIns="0" rtlCol="0" anchor="t"/>
           <a:lstStyle/>
           <a:p>
-            <a:pPr indent="0" marL="0">
+            <a:pPr marL="0" indent="0">
               <a:buNone/>
             </a:pPr>
             <a:r>
@@ -7783,7 +6371,7 @@
             <a:prstDash val="solid"/>
           </a:ln>
           <a:effectLst>
-            <a:outerShdw sx="100000" sy="100000" kx="0" ky="0" algn="bl" rotWithShape="0" blurRad="101600" dist="25400" dir="5400000">
+            <a:outerShdw blurRad="101600" dist="25400" dir="5400000" algn="bl" rotWithShape="0">
               <a:srgbClr val="1A1433">
                 <a:alpha val="8000"/>
               </a:srgbClr>
@@ -7806,11 +6394,11 @@
             <a:avLst/>
           </a:prstGeom>
           <a:solidFill>
-            <a:srgbClr val="005DD6"/>
+            <a:srgbClr val="1B1480"/>
           </a:solidFill>
           <a:ln w="12700">
             <a:solidFill>
-              <a:srgbClr val="005DD6"/>
+              <a:srgbClr val="1B1480"/>
             </a:solidFill>
             <a:prstDash val="solid"/>
           </a:ln>
@@ -7837,7 +6425,7 @@
           <a:bodyPr wrap="square" lIns="0" tIns="0" rIns="0" bIns="0" rtlCol="0" anchor="ctr"/>
           <a:lstStyle/>
           <a:p>
-            <a:pPr algn="ctr" indent="0" marL="0">
+            <a:pPr marL="0" indent="0" algn="ctr">
               <a:buNone/>
             </a:pPr>
             <a:r>
@@ -7873,7 +6461,7 @@
           <a:bodyPr wrap="square" lIns="0" tIns="0" rIns="0" bIns="0" rtlCol="0" anchor="ctr"/>
           <a:lstStyle/>
           <a:p>
-            <a:pPr indent="0" marL="0">
+            <a:pPr marL="0" indent="0">
               <a:buNone/>
             </a:pPr>
             <a:r>
@@ -7909,7 +6497,7 @@
           <a:bodyPr wrap="square" lIns="0" tIns="0" rIns="0" bIns="0" rtlCol="0" anchor="t"/>
           <a:lstStyle/>
           <a:p>
-            <a:pPr indent="0" marL="0">
+            <a:pPr marL="0" indent="0">
               <a:buNone/>
             </a:pPr>
             <a:r>
@@ -7950,7 +6538,7 @@
             <a:prstDash val="solid"/>
           </a:ln>
           <a:effectLst>
-            <a:outerShdw sx="100000" sy="100000" kx="0" ky="0" algn="bl" rotWithShape="0" blurRad="101600" dist="25400" dir="5400000">
+            <a:outerShdw blurRad="101600" dist="25400" dir="5400000" algn="bl" rotWithShape="0">
               <a:srgbClr val="1A1433">
                 <a:alpha val="8000"/>
               </a:srgbClr>
@@ -7973,11 +6561,11 @@
             <a:avLst/>
           </a:prstGeom>
           <a:solidFill>
-            <a:srgbClr val="005DD6"/>
+            <a:srgbClr val="1B1480"/>
           </a:solidFill>
           <a:ln w="12700">
             <a:solidFill>
-              <a:srgbClr val="005DD6"/>
+              <a:srgbClr val="1B1480"/>
             </a:solidFill>
             <a:prstDash val="solid"/>
           </a:ln>
@@ -8004,7 +6592,7 @@
           <a:bodyPr wrap="square" lIns="0" tIns="0" rIns="0" bIns="0" rtlCol="0" anchor="ctr"/>
           <a:lstStyle/>
           <a:p>
-            <a:pPr algn="ctr" indent="0" marL="0">
+            <a:pPr marL="0" indent="0" algn="ctr">
               <a:buNone/>
             </a:pPr>
             <a:r>
@@ -8040,7 +6628,7 @@
           <a:bodyPr wrap="square" lIns="0" tIns="0" rIns="0" bIns="0" rtlCol="0" anchor="ctr"/>
           <a:lstStyle/>
           <a:p>
-            <a:pPr indent="0" marL="0">
+            <a:pPr marL="0" indent="0">
               <a:buNone/>
             </a:pPr>
             <a:r>
@@ -8076,7 +6664,7 @@
           <a:bodyPr wrap="square" lIns="0" tIns="0" rIns="0" bIns="0" rtlCol="0" anchor="t"/>
           <a:lstStyle/>
           <a:p>
-            <a:pPr indent="0" marL="0">
+            <a:pPr marL="0" indent="0">
               <a:buNone/>
             </a:pPr>
             <a:r>
@@ -8117,7 +6705,7 @@
             <a:prstDash val="solid"/>
           </a:ln>
           <a:effectLst>
-            <a:outerShdw sx="100000" sy="100000" kx="0" ky="0" algn="bl" rotWithShape="0" blurRad="101600" dist="25400" dir="5400000">
+            <a:outerShdw blurRad="101600" dist="25400" dir="5400000" algn="bl" rotWithShape="0">
               <a:srgbClr val="1A1433">
                 <a:alpha val="8000"/>
               </a:srgbClr>
@@ -8140,11 +6728,11 @@
             <a:avLst/>
           </a:prstGeom>
           <a:solidFill>
-            <a:srgbClr val="005DD6"/>
+            <a:srgbClr val="1B1480"/>
           </a:solidFill>
           <a:ln w="12700">
             <a:solidFill>
-              <a:srgbClr val="005DD6"/>
+              <a:srgbClr val="1B1480"/>
             </a:solidFill>
             <a:prstDash val="solid"/>
           </a:ln>
@@ -8171,7 +6759,7 @@
           <a:bodyPr wrap="square" lIns="0" tIns="0" rIns="0" bIns="0" rtlCol="0" anchor="ctr"/>
           <a:lstStyle/>
           <a:p>
-            <a:pPr algn="ctr" indent="0" marL="0">
+            <a:pPr marL="0" indent="0" algn="ctr">
               <a:buNone/>
             </a:pPr>
             <a:r>
@@ -8207,7 +6795,7 @@
           <a:bodyPr wrap="square" lIns="0" tIns="0" rIns="0" bIns="0" rtlCol="0" anchor="ctr"/>
           <a:lstStyle/>
           <a:p>
-            <a:pPr indent="0" marL="0">
+            <a:pPr marL="0" indent="0">
               <a:buNone/>
             </a:pPr>
             <a:r>
@@ -8243,7 +6831,7 @@
           <a:bodyPr wrap="square" lIns="0" tIns="0" rIns="0" bIns="0" rtlCol="0" anchor="t"/>
           <a:lstStyle/>
           <a:p>
-            <a:pPr indent="0" marL="0">
+            <a:pPr marL="0" indent="0">
               <a:buNone/>
             </a:pPr>
             <a:r>
@@ -8284,7 +6872,7 @@
             <a:prstDash val="solid"/>
           </a:ln>
           <a:effectLst>
-            <a:outerShdw sx="100000" sy="100000" kx="0" ky="0" algn="bl" rotWithShape="0" blurRad="101600" dist="25400" dir="5400000">
+            <a:outerShdw blurRad="101600" dist="25400" dir="5400000" algn="bl" rotWithShape="0">
               <a:srgbClr val="1A1433">
                 <a:alpha val="8000"/>
               </a:srgbClr>
@@ -8307,11 +6895,11 @@
             <a:avLst/>
           </a:prstGeom>
           <a:solidFill>
-            <a:srgbClr val="005DD6"/>
+            <a:srgbClr val="1B1480"/>
           </a:solidFill>
           <a:ln w="12700">
             <a:solidFill>
-              <a:srgbClr val="005DD6"/>
+              <a:srgbClr val="1B1480"/>
             </a:solidFill>
             <a:prstDash val="solid"/>
           </a:ln>
@@ -8338,7 +6926,7 @@
           <a:bodyPr wrap="square" lIns="0" tIns="0" rIns="0" bIns="0" rtlCol="0" anchor="ctr"/>
           <a:lstStyle/>
           <a:p>
-            <a:pPr algn="ctr" indent="0" marL="0">
+            <a:pPr marL="0" indent="0" algn="ctr">
               <a:buNone/>
             </a:pPr>
             <a:r>
@@ -8374,7 +6962,7 @@
           <a:bodyPr wrap="square" lIns="0" tIns="0" rIns="0" bIns="0" rtlCol="0" anchor="ctr"/>
           <a:lstStyle/>
           <a:p>
-            <a:pPr indent="0" marL="0">
+            <a:pPr marL="0" indent="0">
               <a:buNone/>
             </a:pPr>
             <a:r>
@@ -8410,7 +6998,7 @@
           <a:bodyPr wrap="square" lIns="0" tIns="0" rIns="0" bIns="0" rtlCol="0" anchor="t"/>
           <a:lstStyle/>
           <a:p>
-            <a:pPr indent="0" marL="0">
+            <a:pPr marL="0" indent="0">
               <a:buNone/>
             </a:pPr>
             <a:r>
@@ -8442,7 +7030,7 @@
             </a:avLst>
           </a:prstGeom>
           <a:solidFill>
-            <a:srgbClr val="24164F"/>
+            <a:srgbClr val="1B1480"/>
           </a:solidFill>
           <a:ln w="12700">
             <a:solidFill>
@@ -8451,7 +7039,7 @@
             <a:prstDash val="solid"/>
           </a:ln>
           <a:effectLst>
-            <a:outerShdw sx="100000" sy="100000" kx="0" ky="0" algn="bl" rotWithShape="0" blurRad="101600" dist="25400" dir="5400000">
+            <a:outerShdw blurRad="101600" dist="25400" dir="5400000" algn="bl" rotWithShape="0">
               <a:srgbClr val="1A1433">
                 <a:alpha val="8000"/>
               </a:srgbClr>
@@ -8461,14 +7049,14 @@
       </p:sp>
       <p:pic>
         <p:nvPicPr>
-          <p:cNvPr id="58" name="Возврат: иконка" descr="/tmp/claude-0/-home-user-hackatonoma/e77f010d-b8c6-588a-a375-3aa4548717b1/scratchpad/deckgen/assets/docs.png">    </p:cNvPr>
+          <p:cNvPr id="58" name="Возврат: иконка" descr="/tmp/claude-0/-home-user-hackatonoma/e77f010d-b8c6-588a-a375-3aa4548717b1/scratchpad/deckgen/assets/docs.png"/>
           <p:cNvPicPr>
             <a:picLocks noChangeAspect="1"/>
           </p:cNvPicPr>
           <p:nvPr/>
         </p:nvPicPr>
         <p:blipFill>
-          <a:blip r:embed="rId3"/>
+          <a:blip r:embed="rId5"/>
           <a:stretch>
             <a:fillRect/>
           </a:stretch>
@@ -8504,7 +7092,7 @@
           <a:bodyPr wrap="square" lIns="0" tIns="0" rIns="0" bIns="0" rtlCol="0" anchor="t"/>
           <a:lstStyle/>
           <a:p>
-            <a:pPr indent="0" marL="0">
+            <a:pPr marL="0" indent="0">
               <a:buNone/>
             </a:pPr>
             <a:r>
@@ -8540,7 +7128,7 @@
           <a:bodyPr wrap="square" lIns="0" tIns="0" rIns="0" bIns="0" rtlCol="0" anchor="t"/>
           <a:lstStyle/>
           <a:p>
-            <a:pPr indent="0" marL="0">
+            <a:pPr marL="0" indent="0">
               <a:buNone/>
             </a:pPr>
             <a:r>
@@ -8557,7 +7145,7 @@
       </p:sp>
       <p:sp>
         <p:nvSpPr>
-          <p:cNvPr id="25" name="Slide Number Placeholder 0"/>
+          <p:cNvPr id="61" name="Slide Number Placeholder 0"/>
           <p:cNvSpPr>
             <a:spLocks noGrp="1"/>
           </p:cNvSpPr>
@@ -8575,7 +7163,7 @@
           </a:prstGeom>
           <a:extLst>
             <a:ext uri="{C572A759-6A51-4108-AA02-DFA0A04FC94B}">
-              <ma14:wrappingTextBoxFlag xmlns:ma14="http://schemas.microsoft.com/office/mac/drawingml/2011/main" val="0"/>
+              <ma14:wrappingTextBoxFlag xmlns="" xmlns:ma14="http://schemas.microsoft.com/office/mac/drawingml/2011/main" val="0"/>
             </a:ext>
           </a:extLst>
         </p:spPr>
@@ -8593,7 +7181,7 @@
           <a:p>
             <a:pPr algn="r"/>
             <a:fld id="{F7021451-1387-4CA6-816F-3879F97B5CBC}" type="slidenum">
-              <a:rPr b="0" lang="en-US"/>
+              <a:rPr lang="en-US" b="0"/>
               <a:t>5</a:t>
             </a:fld>
             <a:endParaRPr lang="en-US"/>
@@ -8628,9 +7216,11 @@
       <p:sp>
         <p:nvSpPr>
           <p:cNvPr id="2" name="Text 0"/>
-          <p:cNvSpPr/>
+          <p:cNvSpPr>
+            <a:spLocks noGrp="1"/>
+          </p:cNvSpPr>
           <p:nvPr>
-            <p:ph idx="100" type="title" hasCustomPrompt="1"/>
+            <p:ph type="title" idx="100" hasCustomPrompt="1"/>
           </p:nvPr>
         </p:nvSpPr>
         <p:spPr>
@@ -8648,16 +7238,48 @@
           <a:bodyPr wrap="square" lIns="0" tIns="0" rIns="0" bIns="0" rtlCol="0" anchor="ctr"/>
           <a:lstStyle/>
           <a:p>
-            <a:pPr algn="l" indent="0" marL="0">
-              <a:buNone/>
-            </a:pPr>
+            <a:pPr marL="0" indent="0" algn="l">
+              <a:buNone/>
+            </a:pPr>
+            <a:r>
+              <a:rPr lang="en-US" sz="3200" b="1" dirty="0" err="1">
+                <a:solidFill>
+                  <a:schemeClr val="tx2"/>
+                </a:solidFill>
+              </a:rPr>
+              <a:t>Как</a:t>
+            </a:r>
             <a:r>
               <a:rPr lang="en-US" sz="3200" b="1" dirty="0">
                 <a:solidFill>
                   <a:schemeClr val="tx2"/>
                 </a:solidFill>
               </a:rPr>
-              <a:t>Как это выглядит: кликабельный прототип</a:t>
+              <a:t> </a:t>
+            </a:r>
+            <a:r>
+              <a:rPr lang="ru-RU" sz="3200" b="1" dirty="0">
+                <a:solidFill>
+                  <a:schemeClr val="tx2"/>
+                </a:solidFill>
+              </a:rPr>
+              <a:t>выглядит </a:t>
+            </a:r>
+            <a:r>
+              <a:rPr lang="en-US" sz="3200" b="1" dirty="0" err="1">
+                <a:solidFill>
+                  <a:schemeClr val="tx2"/>
+                </a:solidFill>
+              </a:rPr>
+              <a:t>прототип</a:t>
+            </a:r>
+            <a:r>
+              <a:rPr lang="ru-RU" sz="3200" b="1" dirty="0">
+                <a:solidFill>
+                  <a:schemeClr val="tx2"/>
+                </a:solidFill>
+              </a:rPr>
+              <a:t>:</a:t>
             </a:r>
             <a:endParaRPr lang="en-US" sz="3200" dirty="0"/>
           </a:p>
@@ -8684,7 +7306,7 @@
           <a:bodyPr wrap="square" lIns="0" tIns="0" rIns="0" bIns="0" rtlCol="0" anchor="t"/>
           <a:lstStyle/>
           <a:p>
-            <a:pPr indent="0" marL="0">
+            <a:pPr marL="0" indent="0">
               <a:buNone/>
             </a:pPr>
             <a:r>
@@ -8701,127 +7323,7 @@
       </p:sp>
       <p:pic>
         <p:nvPicPr>
-          <p:cNvPr id="4" name="Экран: Регистрация: частное лицо или бизнес" descr="Регистрация: частное лицо или бизнес">    </p:cNvPr>
-          <p:cNvPicPr>
-            <a:picLocks noChangeAspect="1"/>
-          </p:cNvPicPr>
-          <p:nvPr/>
-        </p:nvPicPr>
-        <p:blipFill>
-          <a:blip r:embed="rId1"/>
-          <a:stretch>
-            <a:fillRect/>
-          </a:stretch>
-        </p:blipFill>
-        <p:spPr>
-          <a:xfrm>
-            <a:off x="548640" y="1463040"/>
-            <a:ext cx="1965960" cy="4132333"/>
-          </a:xfrm>
-          <a:prstGeom prst="rect">
-            <a:avLst/>
-          </a:prstGeom>
-        </p:spPr>
-      </p:pic>
-      <p:sp>
-        <p:nvSpPr>
-          <p:cNvPr id="5" name="Подпись: Регистрация: частное лицо или бизнес"/>
-          <p:cNvSpPr txBox="1"/>
-          <p:nvPr/>
-        </p:nvSpPr>
-        <p:spPr>
-          <a:xfrm>
-            <a:off x="502920" y="5641093"/>
-            <a:ext cx="2057400" cy="502920"/>
-          </a:xfrm>
-          <a:prstGeom prst="rect">
-            <a:avLst/>
-          </a:prstGeom>
-          <a:noFill/>
-          <a:ln/>
-        </p:spPr>
-        <p:txBody>
-          <a:bodyPr wrap="square" lIns="0" tIns="0" rIns="0" bIns="0" rtlCol="0" anchor="t"/>
-          <a:lstStyle/>
-          <a:p>
-            <a:pPr algn="ctr" indent="0" marL="0">
-              <a:buNone/>
-            </a:pPr>
-            <a:r>
-              <a:rPr lang="en-US" sz="1200" dirty="0">
-                <a:solidFill>
-                  <a:schemeClr val="tx1"/>
-                </a:solidFill>
-              </a:rPr>
-              <a:t>Регистрация: частное лицо или бизнес</a:t>
-            </a:r>
-            <a:endParaRPr lang="en-US" sz="1200" dirty="0"/>
-          </a:p>
-        </p:txBody>
-      </p:sp>
-      <p:pic>
-        <p:nvPicPr>
-          <p:cNvPr id="6" name="Экран: Стройка: категории как на маркетплейсе" descr="Стройка: категории как на маркетплейсе">    </p:cNvPr>
-          <p:cNvPicPr>
-            <a:picLocks noChangeAspect="1"/>
-          </p:cNvPicPr>
-          <p:nvPr/>
-        </p:nvPicPr>
-        <p:blipFill>
-          <a:blip r:embed="rId2"/>
-          <a:stretch>
-            <a:fillRect/>
-          </a:stretch>
-        </p:blipFill>
-        <p:spPr>
-          <a:xfrm>
-            <a:off x="2830754" y="1463040"/>
-            <a:ext cx="1965960" cy="4132333"/>
-          </a:xfrm>
-          <a:prstGeom prst="rect">
-            <a:avLst/>
-          </a:prstGeom>
-        </p:spPr>
-      </p:pic>
-      <p:sp>
-        <p:nvSpPr>
-          <p:cNvPr id="7" name="Подпись: Стройка: категории как на маркетплейсе"/>
-          <p:cNvSpPr txBox="1"/>
-          <p:nvPr/>
-        </p:nvSpPr>
-        <p:spPr>
-          <a:xfrm>
-            <a:off x="2785034" y="5641093"/>
-            <a:ext cx="2057400" cy="502920"/>
-          </a:xfrm>
-          <a:prstGeom prst="rect">
-            <a:avLst/>
-          </a:prstGeom>
-          <a:noFill/>
-          <a:ln/>
-        </p:spPr>
-        <p:txBody>
-          <a:bodyPr wrap="square" lIns="0" tIns="0" rIns="0" bIns="0" rtlCol="0" anchor="t"/>
-          <a:lstStyle/>
-          <a:p>
-            <a:pPr algn="ctr" indent="0" marL="0">
-              <a:buNone/>
-            </a:pPr>
-            <a:r>
-              <a:rPr lang="en-US" sz="1200" dirty="0">
-                <a:solidFill>
-                  <a:schemeClr val="tx1"/>
-                </a:solidFill>
-              </a:rPr>
-              <a:t>Стройка: категории как на маркетплейсе</a:t>
-            </a:r>
-            <a:endParaRPr lang="en-US" sz="1200" dirty="0"/>
-          </a:p>
-        </p:txBody>
-      </p:sp>
-      <p:pic>
-        <p:nvPicPr>
-          <p:cNvPr id="8" name="Экран: Мастера и бригады с фильтрами" descr="Мастера и бригады с фильтрами">    </p:cNvPr>
+          <p:cNvPr id="4" name="Экран: Регистрация: частное лицо или бизнес" descr="Регистрация: частное лицо или бизнес"/>
           <p:cNvPicPr>
             <a:picLocks noChangeAspect="1"/>
           </p:cNvPicPr>
@@ -8835,7 +7337,7 @@
         </p:blipFill>
         <p:spPr>
           <a:xfrm>
-            <a:off x="5112868" y="1463040"/>
+            <a:off x="548640" y="1463040"/>
             <a:ext cx="1965960" cy="4132333"/>
           </a:xfrm>
           <a:prstGeom prst="rect">
@@ -8845,13 +7347,13 @@
       </p:pic>
       <p:sp>
         <p:nvSpPr>
-          <p:cNvPr id="9" name="Подпись: Мастера и бригады с фильтрами"/>
+          <p:cNvPr id="5" name="Подпись: Регистрация: частное лицо или бизнес"/>
           <p:cNvSpPr txBox="1"/>
           <p:nvPr/>
         </p:nvSpPr>
         <p:spPr>
           <a:xfrm>
-            <a:off x="5067148" y="5641093"/>
+            <a:off x="502920" y="5641093"/>
             <a:ext cx="2057400" cy="502920"/>
           </a:xfrm>
           <a:prstGeom prst="rect">
@@ -8864,7 +7366,7 @@
           <a:bodyPr wrap="square" lIns="0" tIns="0" rIns="0" bIns="0" rtlCol="0" anchor="t"/>
           <a:lstStyle/>
           <a:p>
-            <a:pPr algn="ctr" indent="0" marL="0">
+            <a:pPr marL="0" indent="0" algn="ctr">
               <a:buNone/>
             </a:pPr>
             <a:r>
@@ -8873,7 +7375,7 @@
                   <a:schemeClr val="tx1"/>
                 </a:solidFill>
               </a:rPr>
-              <a:t>Мастера и бригады с фильтрами</a:t>
+              <a:t>Регистрация: частное лицо или бизнес</a:t>
             </a:r>
             <a:endParaRPr lang="en-US" sz="1200" dirty="0"/>
           </a:p>
@@ -8881,7 +7383,7 @@
       </p:sp>
       <p:pic>
         <p:nvPicPr>
-          <p:cNvPr id="10" name="Экран: Подбор решения и бюджета" descr="Подбор решения и бюджета">    </p:cNvPr>
+          <p:cNvPr id="6" name="Экран: Стройка: категории как на маркетплейсе" descr="Стройка: категории как на маркетплейсе"/>
           <p:cNvPicPr>
             <a:picLocks noChangeAspect="1"/>
           </p:cNvPicPr>
@@ -8895,7 +7397,7 @@
         </p:blipFill>
         <p:spPr>
           <a:xfrm>
-            <a:off x="7394981" y="1463040"/>
+            <a:off x="2830754" y="1463040"/>
             <a:ext cx="1965960" cy="4132333"/>
           </a:xfrm>
           <a:prstGeom prst="rect">
@@ -8905,13 +7407,13 @@
       </p:pic>
       <p:sp>
         <p:nvSpPr>
-          <p:cNvPr id="11" name="Подпись: Подбор решения и бюджета"/>
+          <p:cNvPr id="7" name="Подпись: Стройка: категории как на маркетплейсе"/>
           <p:cNvSpPr txBox="1"/>
           <p:nvPr/>
         </p:nvSpPr>
         <p:spPr>
           <a:xfrm>
-            <a:off x="7349261" y="5641093"/>
+            <a:off x="2785034" y="5641093"/>
             <a:ext cx="2057400" cy="502920"/>
           </a:xfrm>
           <a:prstGeom prst="rect">
@@ -8924,7 +7426,7 @@
           <a:bodyPr wrap="square" lIns="0" tIns="0" rIns="0" bIns="0" rtlCol="0" anchor="t"/>
           <a:lstStyle/>
           <a:p>
-            <a:pPr algn="ctr" indent="0" marL="0">
+            <a:pPr marL="0" indent="0" algn="ctr">
               <a:buNone/>
             </a:pPr>
             <a:r>
@@ -8933,7 +7435,7 @@
                   <a:schemeClr val="tx1"/>
                 </a:solidFill>
               </a:rPr>
-              <a:t>Подбор решения и бюджета</a:t>
+              <a:t>Стройка: категории как на маркетплейсе</a:t>
             </a:r>
             <a:endParaRPr lang="en-US" sz="1200" dirty="0"/>
           </a:p>
@@ -8941,7 +7443,7 @@
       </p:sp>
       <p:pic>
         <p:nvPicPr>
-          <p:cNvPr id="12" name="Экран: Бизнес: заказы и заработок" descr="Бизнес: заказы и заработок">    </p:cNvPr>
+          <p:cNvPr id="8" name="Экран: Мастера и бригады с фильтрами" descr="Мастера и бригады с фильтрами"/>
           <p:cNvPicPr>
             <a:picLocks noChangeAspect="1"/>
           </p:cNvPicPr>
@@ -8955,6 +7457,126 @@
         </p:blipFill>
         <p:spPr>
           <a:xfrm>
+            <a:off x="5112868" y="1463040"/>
+            <a:ext cx="1965960" cy="4132333"/>
+          </a:xfrm>
+          <a:prstGeom prst="rect">
+            <a:avLst/>
+          </a:prstGeom>
+        </p:spPr>
+      </p:pic>
+      <p:sp>
+        <p:nvSpPr>
+          <p:cNvPr id="9" name="Подпись: Мастера и бригады с фильтрами"/>
+          <p:cNvSpPr txBox="1"/>
+          <p:nvPr/>
+        </p:nvSpPr>
+        <p:spPr>
+          <a:xfrm>
+            <a:off x="5067148" y="5641093"/>
+            <a:ext cx="2057400" cy="502920"/>
+          </a:xfrm>
+          <a:prstGeom prst="rect">
+            <a:avLst/>
+          </a:prstGeom>
+          <a:noFill/>
+          <a:ln/>
+        </p:spPr>
+        <p:txBody>
+          <a:bodyPr wrap="square" lIns="0" tIns="0" rIns="0" bIns="0" rtlCol="0" anchor="t"/>
+          <a:lstStyle/>
+          <a:p>
+            <a:pPr marL="0" indent="0" algn="ctr">
+              <a:buNone/>
+            </a:pPr>
+            <a:r>
+              <a:rPr lang="en-US" sz="1200" dirty="0">
+                <a:solidFill>
+                  <a:schemeClr val="tx1"/>
+                </a:solidFill>
+              </a:rPr>
+              <a:t>Мастера и бригады с фильтрами</a:t>
+            </a:r>
+            <a:endParaRPr lang="en-US" sz="1200" dirty="0"/>
+          </a:p>
+        </p:txBody>
+      </p:sp>
+      <p:pic>
+        <p:nvPicPr>
+          <p:cNvPr id="10" name="Экран: Подбор решения и бюджета" descr="Подбор решения и бюджета"/>
+          <p:cNvPicPr>
+            <a:picLocks noChangeAspect="1"/>
+          </p:cNvPicPr>
+          <p:nvPr/>
+        </p:nvPicPr>
+        <p:blipFill>
+          <a:blip r:embed="rId6"/>
+          <a:stretch>
+            <a:fillRect/>
+          </a:stretch>
+        </p:blipFill>
+        <p:spPr>
+          <a:xfrm>
+            <a:off x="7394981" y="1463040"/>
+            <a:ext cx="1965960" cy="4132333"/>
+          </a:xfrm>
+          <a:prstGeom prst="rect">
+            <a:avLst/>
+          </a:prstGeom>
+        </p:spPr>
+      </p:pic>
+      <p:sp>
+        <p:nvSpPr>
+          <p:cNvPr id="11" name="Подпись: Подбор решения и бюджета"/>
+          <p:cNvSpPr txBox="1"/>
+          <p:nvPr/>
+        </p:nvSpPr>
+        <p:spPr>
+          <a:xfrm>
+            <a:off x="7349261" y="5641093"/>
+            <a:ext cx="2057400" cy="502920"/>
+          </a:xfrm>
+          <a:prstGeom prst="rect">
+            <a:avLst/>
+          </a:prstGeom>
+          <a:noFill/>
+          <a:ln/>
+        </p:spPr>
+        <p:txBody>
+          <a:bodyPr wrap="square" lIns="0" tIns="0" rIns="0" bIns="0" rtlCol="0" anchor="t"/>
+          <a:lstStyle/>
+          <a:p>
+            <a:pPr marL="0" indent="0" algn="ctr">
+              <a:buNone/>
+            </a:pPr>
+            <a:r>
+              <a:rPr lang="en-US" sz="1200" dirty="0">
+                <a:solidFill>
+                  <a:schemeClr val="tx1"/>
+                </a:solidFill>
+              </a:rPr>
+              <a:t>Подбор решения и бюджета</a:t>
+            </a:r>
+            <a:endParaRPr lang="en-US" sz="1200" dirty="0"/>
+          </a:p>
+        </p:txBody>
+      </p:sp>
+      <p:pic>
+        <p:nvPicPr>
+          <p:cNvPr id="12" name="Экран: Бизнес: заказы и заработок" descr="Бизнес: заказы и заработок"/>
+          <p:cNvPicPr>
+            <a:picLocks noChangeAspect="1"/>
+          </p:cNvPicPr>
+          <p:nvPr/>
+        </p:nvPicPr>
+        <p:blipFill>
+          <a:blip r:embed="rId7"/>
+          <a:stretch>
+            <a:fillRect/>
+          </a:stretch>
+        </p:blipFill>
+        <p:spPr>
+          <a:xfrm>
             <a:off x="9677095" y="1463040"/>
             <a:ext cx="1965960" cy="4132333"/>
           </a:xfrm>
@@ -8984,7 +7606,7 @@
           <a:bodyPr wrap="square" lIns="0" tIns="0" rIns="0" bIns="0" rtlCol="0" anchor="t"/>
           <a:lstStyle/>
           <a:p>
-            <a:pPr algn="ctr" indent="0" marL="0">
+            <a:pPr marL="0" indent="0" algn="ctr">
               <a:buNone/>
             </a:pPr>
             <a:r>
@@ -9019,7 +7641,7 @@
           </a:prstGeom>
           <a:extLst>
             <a:ext uri="{C572A759-6A51-4108-AA02-DFA0A04FC94B}">
-              <ma14:wrappingTextBoxFlag xmlns:ma14="http://schemas.microsoft.com/office/mac/drawingml/2011/main" val="0"/>
+              <ma14:wrappingTextBoxFlag xmlns="" xmlns:ma14="http://schemas.microsoft.com/office/mac/drawingml/2011/main" val="0"/>
             </a:ext>
           </a:extLst>
         </p:spPr>
@@ -9037,7 +7659,7 @@
           <a:p>
             <a:pPr algn="r"/>
             <a:fld id="{F7021451-1387-4CA6-816F-3879F97B5CBC}" type="slidenum">
-              <a:rPr b="0" lang="en-US"/>
+              <a:rPr lang="en-US" b="0"/>
               <a:t>6</a:t>
             </a:fld>
             <a:endParaRPr lang="en-US"/>
@@ -9072,9 +7694,11 @@
       <p:sp>
         <p:nvSpPr>
           <p:cNvPr id="2" name="Text 0"/>
-          <p:cNvSpPr/>
+          <p:cNvSpPr>
+            <a:spLocks noGrp="1"/>
+          </p:cNvSpPr>
           <p:nvPr>
-            <p:ph idx="100" type="title" hasCustomPrompt="1"/>
+            <p:ph type="title" idx="100" hasCustomPrompt="1"/>
           </p:nvPr>
         </p:nvSpPr>
         <p:spPr>
@@ -9092,7 +7716,7 @@
           <a:bodyPr wrap="square" lIns="0" tIns="0" rIns="0" bIns="0" rtlCol="0" anchor="ctr"/>
           <a:lstStyle/>
           <a:p>
-            <a:pPr algn="l" indent="0" marL="0">
+            <a:pPr marL="0" indent="0" algn="l">
               <a:buNone/>
             </a:pPr>
             <a:r>
@@ -9124,7 +7748,7 @@
             </a:avLst>
           </a:prstGeom>
           <a:solidFill>
-            <a:srgbClr val="24164F"/>
+            <a:srgbClr val="1B1480"/>
           </a:solidFill>
           <a:ln w="12700">
             <a:solidFill>
@@ -9133,7 +7757,7 @@
             <a:prstDash val="solid"/>
           </a:ln>
           <a:effectLst>
-            <a:outerShdw sx="100000" sy="100000" kx="0" ky="0" algn="bl" rotWithShape="0" blurRad="101600" dist="25400" dir="5400000">
+            <a:outerShdw blurRad="101600" dist="25400" dir="5400000" algn="bl" rotWithShape="0">
               <a:srgbClr val="1A1433">
                 <a:alpha val="8000"/>
               </a:srgbClr>
@@ -9162,7 +7786,7 @@
           <a:bodyPr wrap="square" lIns="0" tIns="0" rIns="0" bIns="0" rtlCol="0" anchor="t"/>
           <a:lstStyle/>
           <a:p>
-            <a:pPr indent="0" marL="0">
+            <a:pPr marL="0" indent="0">
               <a:buNone/>
             </a:pPr>
             <a:r>
@@ -9198,7 +7822,7 @@
           <a:bodyPr wrap="square" lIns="0" tIns="0" rIns="0" bIns="0" rtlCol="0" anchor="t"/>
           <a:lstStyle/>
           <a:p>
-            <a:pPr indent="0" marL="0">
+            <a:pPr marL="0" indent="0">
               <a:buNone/>
             </a:pPr>
             <a:r>
@@ -9230,7 +7854,7 @@
             </a:avLst>
           </a:prstGeom>
           <a:solidFill>
-            <a:srgbClr val="24164F"/>
+            <a:srgbClr val="1B1480"/>
           </a:solidFill>
           <a:ln w="12700">
             <a:solidFill>
@@ -9239,7 +7863,7 @@
             <a:prstDash val="solid"/>
           </a:ln>
           <a:effectLst>
-            <a:outerShdw sx="100000" sy="100000" kx="0" ky="0" algn="bl" rotWithShape="0" blurRad="101600" dist="25400" dir="5400000">
+            <a:outerShdw blurRad="101600" dist="25400" dir="5400000" algn="bl" rotWithShape="0">
               <a:srgbClr val="1A1433">
                 <a:alpha val="8000"/>
               </a:srgbClr>
@@ -9268,7 +7892,7 @@
           <a:bodyPr wrap="square" lIns="0" tIns="0" rIns="0" bIns="0" rtlCol="0" anchor="t"/>
           <a:lstStyle/>
           <a:p>
-            <a:pPr indent="0" marL="0">
+            <a:pPr marL="0" indent="0">
               <a:buNone/>
             </a:pPr>
             <a:r>
@@ -9304,7 +7928,7 @@
           <a:bodyPr wrap="square" lIns="0" tIns="0" rIns="0" bIns="0" rtlCol="0" anchor="t"/>
           <a:lstStyle/>
           <a:p>
-            <a:pPr indent="0" marL="0">
+            <a:pPr marL="0" indent="0">
               <a:buNone/>
             </a:pPr>
             <a:r>
@@ -9345,7 +7969,7 @@
             <a:prstDash val="solid"/>
           </a:ln>
           <a:effectLst>
-            <a:outerShdw sx="100000" sy="100000" kx="0" ky="0" algn="bl" rotWithShape="0" blurRad="101600" dist="25400" dir="5400000">
+            <a:outerShdw blurRad="101600" dist="25400" dir="5400000" algn="bl" rotWithShape="0">
               <a:srgbClr val="1A1433">
                 <a:alpha val="8000"/>
               </a:srgbClr>
@@ -9374,7 +7998,7 @@
           <a:bodyPr wrap="square" lIns="0" tIns="0" rIns="0" bIns="0" rtlCol="0" anchor="t"/>
           <a:lstStyle/>
           <a:p>
-            <a:pPr indent="0" marL="0">
+            <a:pPr marL="0" indent="0">
               <a:buNone/>
             </a:pPr>
             <a:r>
@@ -9410,7 +8034,7 @@
           <a:bodyPr wrap="square" lIns="0" tIns="0" rIns="0" bIns="0" rtlCol="0" anchor="t"/>
           <a:lstStyle/>
           <a:p>
-            <a:pPr indent="0" marL="0">
+            <a:pPr marL="0" indent="0">
               <a:buNone/>
             </a:pPr>
             <a:r>
@@ -9451,7 +8075,7 @@
             <a:prstDash val="solid"/>
           </a:ln>
           <a:effectLst>
-            <a:outerShdw sx="100000" sy="100000" kx="0" ky="0" algn="bl" rotWithShape="0" blurRad="101600" dist="25400" dir="5400000">
+            <a:outerShdw blurRad="101600" dist="25400" dir="5400000" algn="bl" rotWithShape="0">
               <a:srgbClr val="1A1433">
                 <a:alpha val="8000"/>
               </a:srgbClr>
@@ -9459,30 +8083,6 @@
           </a:effectLst>
         </p:spPr>
       </p:sp>
-      <p:pic>
-        <p:nvPicPr>
-          <p:cNvPr id="13" name="Затраты: иконка" descr="/tmp/claude-0/-home-user-hackatonoma/e77f010d-b8c6-588a-a375-3aa4548717b1/scratchpad/deckgen/assets/chart.png">    </p:cNvPr>
-          <p:cNvPicPr>
-            <a:picLocks noChangeAspect="1"/>
-          </p:cNvPicPr>
-          <p:nvPr/>
-        </p:nvPicPr>
-        <p:blipFill>
-          <a:blip r:embed="rId1"/>
-          <a:stretch>
-            <a:fillRect/>
-          </a:stretch>
-        </p:blipFill>
-        <p:spPr>
-          <a:xfrm>
-            <a:off x="3291840" y="3127248"/>
-            <a:ext cx="658368" cy="658368"/>
-          </a:xfrm>
-          <a:prstGeom prst="rect">
-            <a:avLst/>
-          </a:prstGeom>
-        </p:spPr>
-      </p:pic>
       <p:sp>
         <p:nvSpPr>
           <p:cNvPr id="14" name="Затраты: заголовок"/>
@@ -9504,7 +8104,7 @@
           <a:bodyPr wrap="square" lIns="0" tIns="0" rIns="0" bIns="0" rtlCol="0" anchor="t"/>
           <a:lstStyle/>
           <a:p>
-            <a:pPr indent="0" marL="0">
+            <a:pPr marL="0" indent="0">
               <a:buNone/>
             </a:pPr>
             <a:r>
@@ -9603,7 +8203,7 @@
             <a:prstDash val="solid"/>
           </a:ln>
           <a:effectLst>
-            <a:outerShdw sx="100000" sy="100000" kx="0" ky="0" algn="bl" rotWithShape="0" blurRad="101600" dist="25400" dir="5400000">
+            <a:outerShdw blurRad="101600" dist="25400" dir="5400000" algn="bl" rotWithShape="0">
               <a:srgbClr val="1A1433">
                 <a:alpha val="8000"/>
               </a:srgbClr>
@@ -9611,30 +8211,6 @@
           </a:effectLst>
         </p:spPr>
       </p:sp>
-      <p:pic>
-        <p:nvPicPr>
-          <p:cNvPr id="17" name="Доход: иконка" descr="/tmp/claude-0/-home-user-hackatonoma/e77f010d-b8c6-588a-a375-3aa4548717b1/scratchpad/deckgen/assets/moneybag.png">    </p:cNvPr>
-          <p:cNvPicPr>
-            <a:picLocks noChangeAspect="1"/>
-          </p:cNvPicPr>
-          <p:nvPr/>
-        </p:nvPicPr>
-        <p:blipFill>
-          <a:blip r:embed="rId2"/>
-          <a:stretch>
-            <a:fillRect/>
-          </a:stretch>
-        </p:blipFill>
-        <p:spPr>
-          <a:xfrm>
-            <a:off x="7040880" y="3127248"/>
-            <a:ext cx="658368" cy="658368"/>
-          </a:xfrm>
-          <a:prstGeom prst="rect">
-            <a:avLst/>
-          </a:prstGeom>
-        </p:spPr>
-      </p:pic>
       <p:sp>
         <p:nvSpPr>
           <p:cNvPr id="18" name="Доход: заголовок"/>
@@ -9656,7 +8232,7 @@
           <a:bodyPr wrap="square" lIns="0" tIns="0" rIns="0" bIns="0" rtlCol="0" anchor="t"/>
           <a:lstStyle/>
           <a:p>
-            <a:pPr indent="0" marL="0">
+            <a:pPr marL="0" indent="0">
               <a:buNone/>
             </a:pPr>
             <a:r>
@@ -9773,7 +8349,7 @@
             <a:prstDash val="solid"/>
           </a:ln>
           <a:effectLst>
-            <a:outerShdw sx="100000" sy="100000" kx="0" ky="0" algn="bl" rotWithShape="0" blurRad="101600" dist="25400" dir="5400000">
+            <a:outerShdw blurRad="101600" dist="25400" dir="5400000" algn="bl" rotWithShape="0">
               <a:srgbClr val="1A1433">
                 <a:alpha val="8000"/>
               </a:srgbClr>
@@ -9781,30 +8357,6 @@
           </a:effectLst>
         </p:spPr>
       </p:sp>
-      <p:pic>
-        <p:nvPicPr>
-          <p:cNvPr id="21" name="Экономия: иконка" descr="/tmp/claude-0/-home-user-hackatonoma/e77f010d-b8c6-588a-a375-3aa4548717b1/scratchpad/deckgen/assets/bricks.png">    </p:cNvPr>
-          <p:cNvPicPr>
-            <a:picLocks noChangeAspect="1"/>
-          </p:cNvPicPr>
-          <p:nvPr/>
-        </p:nvPicPr>
-        <p:blipFill>
-          <a:blip r:embed="rId3"/>
-          <a:stretch>
-            <a:fillRect/>
-          </a:stretch>
-        </p:blipFill>
-        <p:spPr>
-          <a:xfrm>
-            <a:off x="10789920" y="3127248"/>
-            <a:ext cx="658368" cy="658368"/>
-          </a:xfrm>
-          <a:prstGeom prst="rect">
-            <a:avLst/>
-          </a:prstGeom>
-        </p:spPr>
-      </p:pic>
       <p:sp>
         <p:nvSpPr>
           <p:cNvPr id="22" name="Экономия: заголовок"/>
@@ -9826,7 +8378,7 @@
           <a:bodyPr wrap="square" lIns="0" tIns="0" rIns="0" bIns="0" rtlCol="0" anchor="t"/>
           <a:lstStyle/>
           <a:p>
-            <a:pPr indent="0" marL="0">
+            <a:pPr marL="0" indent="0">
               <a:buNone/>
             </a:pPr>
             <a:r>
@@ -9934,7 +8486,7 @@
             </a:avLst>
           </a:prstGeom>
           <a:solidFill>
-            <a:srgbClr val="24164F"/>
+            <a:srgbClr val="1B1480"/>
           </a:solidFill>
           <a:ln w="12700">
             <a:solidFill>
@@ -9965,7 +8517,7 @@
           <a:bodyPr wrap="square" lIns="0" tIns="0" rIns="0" bIns="0" rtlCol="0" anchor="ctr"/>
           <a:lstStyle/>
           <a:p>
-            <a:pPr indent="0" marL="0">
+            <a:pPr marL="0" indent="0">
               <a:buNone/>
             </a:pPr>
             <a:r>
@@ -9976,9 +8528,6 @@
               </a:rPr>
               <a:t>Следующий шаг: </a:t>
             </a:r>
-            <a:pPr indent="0" marL="0">
-              <a:buNone/>
-            </a:pPr>
             <a:r>
               <a:rPr lang="en-US" sz="1400" dirty="0">
                 <a:solidFill>
@@ -10012,7 +8561,7 @@
           <a:bodyPr wrap="square" lIns="0" tIns="0" rIns="0" bIns="0" rtlCol="0" anchor="t"/>
           <a:lstStyle/>
           <a:p>
-            <a:pPr indent="0" marL="0">
+            <a:pPr marL="0" indent="0">
               <a:buNone/>
             </a:pPr>
             <a:r>
@@ -10029,7 +8578,7 @@
       </p:sp>
       <p:sp>
         <p:nvSpPr>
-          <p:cNvPr id="25" name="Slide Number Placeholder 0"/>
+          <p:cNvPr id="27" name="Slide Number Placeholder 0"/>
           <p:cNvSpPr>
             <a:spLocks noGrp="1"/>
           </p:cNvSpPr>
@@ -10047,7 +8596,7 @@
           </a:prstGeom>
           <a:extLst>
             <a:ext uri="{C572A759-6A51-4108-AA02-DFA0A04FC94B}">
-              <ma14:wrappingTextBoxFlag xmlns:ma14="http://schemas.microsoft.com/office/mac/drawingml/2011/main" val="0"/>
+              <ma14:wrappingTextBoxFlag xmlns="" xmlns:ma14="http://schemas.microsoft.com/office/mac/drawingml/2011/main" val="0"/>
             </a:ext>
           </a:extLst>
         </p:spPr>
@@ -10065,7 +8614,7 @@
           <a:p>
             <a:pPr algn="r"/>
             <a:fld id="{F7021451-1387-4CA6-816F-3879F97B5CBC}" type="slidenum">
-              <a:rPr b="0" lang="en-US"/>
+              <a:rPr lang="en-US" b="0"/>
               <a:t>7</a:t>
             </a:fld>
             <a:endParaRPr lang="en-US"/>
@@ -10373,4 +8922,299 @@
     </a:ext>
   </a:extLst>
 </a:theme>
+</file>
+
+<file path=ppt/theme/theme2.xml><?xml version="1.0" encoding="utf-8"?>
+<a:theme xmlns:a="http://schemas.openxmlformats.org/drawingml/2006/main" name="Тема Office">
+  <a:themeElements>
+    <a:clrScheme name="Стандартная">
+      <a:dk1>
+        <a:sysClr val="windowText" lastClr="000000"/>
+      </a:dk1>
+      <a:lt1>
+        <a:sysClr val="window" lastClr="FFFFFF"/>
+      </a:lt1>
+      <a:dk2>
+        <a:srgbClr val="44546A"/>
+      </a:dk2>
+      <a:lt2>
+        <a:srgbClr val="E7E6E6"/>
+      </a:lt2>
+      <a:accent1>
+        <a:srgbClr val="4472C4"/>
+      </a:accent1>
+      <a:accent2>
+        <a:srgbClr val="ED7D31"/>
+      </a:accent2>
+      <a:accent3>
+        <a:srgbClr val="A5A5A5"/>
+      </a:accent3>
+      <a:accent4>
+        <a:srgbClr val="FFC000"/>
+      </a:accent4>
+      <a:accent5>
+        <a:srgbClr val="5B9BD5"/>
+      </a:accent5>
+      <a:accent6>
+        <a:srgbClr val="70AD47"/>
+      </a:accent6>
+      <a:hlink>
+        <a:srgbClr val="0563C1"/>
+      </a:hlink>
+      <a:folHlink>
+        <a:srgbClr val="954F72"/>
+      </a:folHlink>
+    </a:clrScheme>
+    <a:fontScheme name="Стандартная">
+      <a:majorFont>
+        <a:latin typeface="Calibri Light" panose="020F0302020204030204"/>
+        <a:ea typeface=""/>
+        <a:cs typeface=""/>
+        <a:font script="Jpan" typeface="游ゴシック Light"/>
+        <a:font script="Hang" typeface="맑은 고딕"/>
+        <a:font script="Hans" typeface="等线 Light"/>
+        <a:font script="Hant" typeface="新細明體"/>
+        <a:font script="Arab" typeface="Times New Roman"/>
+        <a:font script="Hebr" typeface="Times New Roman"/>
+        <a:font script="Thai" typeface="Angsana New"/>
+        <a:font script="Ethi" typeface="Nyala"/>
+        <a:font script="Beng" typeface="Vrinda"/>
+        <a:font script="Gujr" typeface="Shruti"/>
+        <a:font script="Khmr" typeface="MoolBoran"/>
+        <a:font script="Knda" typeface="Tunga"/>
+        <a:font script="Guru" typeface="Raavi"/>
+        <a:font script="Cans" typeface="Euphemia"/>
+        <a:font script="Cher" typeface="Plantagenet Cherokee"/>
+        <a:font script="Yiii" typeface="Microsoft Yi Baiti"/>
+        <a:font script="Tibt" typeface="Microsoft Himalaya"/>
+        <a:font script="Thaa" typeface="MV Boli"/>
+        <a:font script="Deva" typeface="Mangal"/>
+        <a:font script="Telu" typeface="Gautami"/>
+        <a:font script="Taml" typeface="Latha"/>
+        <a:font script="Syrc" typeface="Estrangelo Edessa"/>
+        <a:font script="Orya" typeface="Kalinga"/>
+        <a:font script="Mlym" typeface="Kartika"/>
+        <a:font script="Laoo" typeface="DokChampa"/>
+        <a:font script="Sinh" typeface="Iskoola Pota"/>
+        <a:font script="Mong" typeface="Mongolian Baiti"/>
+        <a:font script="Viet" typeface="Times New Roman"/>
+        <a:font script="Uigh" typeface="Microsoft Uighur"/>
+        <a:font script="Geor" typeface="Sylfaen"/>
+        <a:font script="Armn" typeface="Arial"/>
+        <a:font script="Bugi" typeface="Leelawadee UI"/>
+        <a:font script="Bopo" typeface="Microsoft JhengHei"/>
+        <a:font script="Java" typeface="Javanese Text"/>
+        <a:font script="Lisu" typeface="Segoe UI"/>
+        <a:font script="Mymr" typeface="Myanmar Text"/>
+        <a:font script="Nkoo" typeface="Ebrima"/>
+        <a:font script="Olck" typeface="Nirmala UI"/>
+        <a:font script="Osma" typeface="Ebrima"/>
+        <a:font script="Phag" typeface="Phagspa"/>
+        <a:font script="Syrn" typeface="Estrangelo Edessa"/>
+        <a:font script="Syrj" typeface="Estrangelo Edessa"/>
+        <a:font script="Syre" typeface="Estrangelo Edessa"/>
+        <a:font script="Sora" typeface="Nirmala UI"/>
+        <a:font script="Tale" typeface="Microsoft Tai Le"/>
+        <a:font script="Talu" typeface="Microsoft New Tai Lue"/>
+        <a:font script="Tfng" typeface="Ebrima"/>
+      </a:majorFont>
+      <a:minorFont>
+        <a:latin typeface="Calibri" panose="020F0502020204030204"/>
+        <a:ea typeface=""/>
+        <a:cs typeface=""/>
+        <a:font script="Jpan" typeface="游ゴシック"/>
+        <a:font script="Hang" typeface="맑은 고딕"/>
+        <a:font script="Hans" typeface="等线"/>
+        <a:font script="Hant" typeface="新細明體"/>
+        <a:font script="Arab" typeface="Arial"/>
+        <a:font script="Hebr" typeface="Arial"/>
+        <a:font script="Thai" typeface="Cordia New"/>
+        <a:font script="Ethi" typeface="Nyala"/>
+        <a:font script="Beng" typeface="Vrinda"/>
+        <a:font script="Gujr" typeface="Shruti"/>
+        <a:font script="Khmr" typeface="DaunPenh"/>
+        <a:font script="Knda" typeface="Tunga"/>
+        <a:font script="Guru" typeface="Raavi"/>
+        <a:font script="Cans" typeface="Euphemia"/>
+        <a:font script="Cher" typeface="Plantagenet Cherokee"/>
+        <a:font script="Yiii" typeface="Microsoft Yi Baiti"/>
+        <a:font script="Tibt" typeface="Microsoft Himalaya"/>
+        <a:font script="Thaa" typeface="MV Boli"/>
+        <a:font script="Deva" typeface="Mangal"/>
+        <a:font script="Telu" typeface="Gautami"/>
+        <a:font script="Taml" typeface="Latha"/>
+        <a:font script="Syrc" typeface="Estrangelo Edessa"/>
+        <a:font script="Orya" typeface="Kalinga"/>
+        <a:font script="Mlym" typeface="Kartika"/>
+        <a:font script="Laoo" typeface="DokChampa"/>
+        <a:font script="Sinh" typeface="Iskoola Pota"/>
+        <a:font script="Mong" typeface="Mongolian Baiti"/>
+        <a:font script="Viet" typeface="Arial"/>
+        <a:font script="Uigh" typeface="Microsoft Uighur"/>
+        <a:font script="Geor" typeface="Sylfaen"/>
+        <a:font script="Armn" typeface="Arial"/>
+        <a:font script="Bugi" typeface="Leelawadee UI"/>
+        <a:font script="Bopo" typeface="Microsoft JhengHei"/>
+        <a:font script="Java" typeface="Javanese Text"/>
+        <a:font script="Lisu" typeface="Segoe UI"/>
+        <a:font script="Mymr" typeface="Myanmar Text"/>
+        <a:font script="Nkoo" typeface="Ebrima"/>
+        <a:font script="Olck" typeface="Nirmala UI"/>
+        <a:font script="Osma" typeface="Ebrima"/>
+        <a:font script="Phag" typeface="Phagspa"/>
+        <a:font script="Syrn" typeface="Estrangelo Edessa"/>
+        <a:font script="Syrj" typeface="Estrangelo Edessa"/>
+        <a:font script="Syre" typeface="Estrangelo Edessa"/>
+        <a:font script="Sora" typeface="Nirmala UI"/>
+        <a:font script="Tale" typeface="Microsoft Tai Le"/>
+        <a:font script="Talu" typeface="Microsoft New Tai Lue"/>
+        <a:font script="Tfng" typeface="Ebrima"/>
+      </a:minorFont>
+    </a:fontScheme>
+    <a:fmtScheme name="Стандартная">
+      <a:fillStyleLst>
+        <a:solidFill>
+          <a:schemeClr val="phClr"/>
+        </a:solidFill>
+        <a:gradFill rotWithShape="1">
+          <a:gsLst>
+            <a:gs pos="0">
+              <a:schemeClr val="phClr">
+                <a:lumMod val="110000"/>
+                <a:satMod val="105000"/>
+                <a:tint val="67000"/>
+              </a:schemeClr>
+            </a:gs>
+            <a:gs pos="50000">
+              <a:schemeClr val="phClr">
+                <a:lumMod val="105000"/>
+                <a:satMod val="103000"/>
+                <a:tint val="73000"/>
+              </a:schemeClr>
+            </a:gs>
+            <a:gs pos="100000">
+              <a:schemeClr val="phClr">
+                <a:lumMod val="105000"/>
+                <a:satMod val="109000"/>
+                <a:tint val="81000"/>
+              </a:schemeClr>
+            </a:gs>
+          </a:gsLst>
+          <a:lin ang="5400000" scaled="0"/>
+        </a:gradFill>
+        <a:gradFill rotWithShape="1">
+          <a:gsLst>
+            <a:gs pos="0">
+              <a:schemeClr val="phClr">
+                <a:satMod val="103000"/>
+                <a:lumMod val="102000"/>
+                <a:tint val="94000"/>
+              </a:schemeClr>
+            </a:gs>
+            <a:gs pos="50000">
+              <a:schemeClr val="phClr">
+                <a:satMod val="110000"/>
+                <a:lumMod val="100000"/>
+                <a:shade val="100000"/>
+              </a:schemeClr>
+            </a:gs>
+            <a:gs pos="100000">
+              <a:schemeClr val="phClr">
+                <a:lumMod val="99000"/>
+                <a:satMod val="120000"/>
+                <a:shade val="78000"/>
+              </a:schemeClr>
+            </a:gs>
+          </a:gsLst>
+          <a:lin ang="5400000" scaled="0"/>
+        </a:gradFill>
+      </a:fillStyleLst>
+      <a:lnStyleLst>
+        <a:ln w="6350" cap="flat" cmpd="sng" algn="ctr">
+          <a:solidFill>
+            <a:schemeClr val="phClr"/>
+          </a:solidFill>
+          <a:prstDash val="solid"/>
+          <a:miter lim="800000"/>
+        </a:ln>
+        <a:ln w="12700" cap="flat" cmpd="sng" algn="ctr">
+          <a:solidFill>
+            <a:schemeClr val="phClr"/>
+          </a:solidFill>
+          <a:prstDash val="solid"/>
+          <a:miter lim="800000"/>
+        </a:ln>
+        <a:ln w="19050" cap="flat" cmpd="sng" algn="ctr">
+          <a:solidFill>
+            <a:schemeClr val="phClr"/>
+          </a:solidFill>
+          <a:prstDash val="solid"/>
+          <a:miter lim="800000"/>
+        </a:ln>
+      </a:lnStyleLst>
+      <a:effectStyleLst>
+        <a:effectStyle>
+          <a:effectLst/>
+        </a:effectStyle>
+        <a:effectStyle>
+          <a:effectLst/>
+        </a:effectStyle>
+        <a:effectStyle>
+          <a:effectLst>
+            <a:outerShdw blurRad="57150" dist="19050" dir="5400000" algn="ctr" rotWithShape="0">
+              <a:srgbClr val="000000">
+                <a:alpha val="63000"/>
+              </a:srgbClr>
+            </a:outerShdw>
+          </a:effectLst>
+        </a:effectStyle>
+      </a:effectStyleLst>
+      <a:bgFillStyleLst>
+        <a:solidFill>
+          <a:schemeClr val="phClr"/>
+        </a:solidFill>
+        <a:solidFill>
+          <a:schemeClr val="phClr">
+            <a:tint val="95000"/>
+            <a:satMod val="170000"/>
+          </a:schemeClr>
+        </a:solidFill>
+        <a:gradFill rotWithShape="1">
+          <a:gsLst>
+            <a:gs pos="0">
+              <a:schemeClr val="phClr">
+                <a:tint val="93000"/>
+                <a:satMod val="150000"/>
+                <a:shade val="98000"/>
+                <a:lumMod val="102000"/>
+              </a:schemeClr>
+            </a:gs>
+            <a:gs pos="50000">
+              <a:schemeClr val="phClr">
+                <a:tint val="98000"/>
+                <a:satMod val="130000"/>
+                <a:shade val="90000"/>
+                <a:lumMod val="103000"/>
+              </a:schemeClr>
+            </a:gs>
+            <a:gs pos="100000">
+              <a:schemeClr val="phClr">
+                <a:shade val="63000"/>
+                <a:satMod val="120000"/>
+              </a:schemeClr>
+            </a:gs>
+          </a:gsLst>
+          <a:lin ang="5400000" scaled="0"/>
+        </a:gradFill>
+      </a:bgFillStyleLst>
+    </a:fmtScheme>
+  </a:themeElements>
+  <a:objectDefaults/>
+  <a:extraClrSchemeLst/>
+  <a:extLst>
+    <a:ext uri="{05A4C25C-085E-4340-85A3-A5531E510DB2}">
+      <thm15:themeFamily xmlns:thm15="http://schemas.microsoft.com/office/thememl/2012/main" name="Office Theme" id="{62F939B6-93AF-4DB8-9C6B-D6C7DFDC589F}" vid="{4A3C46E8-61CC-4603-A589-7422A47A8E4A}"/>
+    </a:ext>
+  </a:extLst>
+</a:theme>
 </file>